--- a/output/我为核安全文化代言-交互版.pptx
+++ b/output/我为核安全文化代言-交互版.pptx
@@ -5609,12 +5609,12 @@
         </p:nvSpPr>
         <p:spPr>
           <a:xfrm>
-            <a:off x="1458000" y="5400000"/>
-            <a:ext cx="5400000" cy="5328000"/>
+            <a:off x="990000" y="7560000"/>
+            <a:ext cx="5580000" cy="5832000"/>
           </a:xfrm>
           <a:prstGeom prst="roundRect">
             <a:avLst>
-              <a:gd name="adj" fmla="val 4054"/>
+              <a:gd name="adj" fmla="val 3870"/>
             </a:avLst>
           </a:prstGeom>
           <a:gradFill rotWithShape="1">
@@ -5657,8 +5657,8 @@
         </p:nvSpPr>
         <p:spPr>
           <a:xfrm>
-            <a:off x="1548000" y="5490000"/>
-            <a:ext cx="5220000" cy="3960000"/>
+            <a:off x="1080000" y="7650000"/>
+            <a:ext cx="5400000" cy="4104000"/>
           </a:xfrm>
           <a:prstGeom prst="rect">
             <a:avLst/>
@@ -5695,8 +5695,8 @@
         </p:blipFill>
         <p:spPr>
           <a:xfrm>
-            <a:off x="1638000" y="5580000"/>
-            <a:ext cx="5040000" cy="3780000"/>
+            <a:off x="1170000" y="7740000"/>
+            <a:ext cx="5220000" cy="3924000"/>
           </a:xfrm>
           <a:prstGeom prst="rect">
             <a:avLst/>
@@ -5711,8 +5711,8 @@
         </p:nvSpPr>
         <p:spPr>
           <a:xfrm>
-            <a:off x="1548000" y="9450000"/>
-            <a:ext cx="5220000" cy="1188000"/>
+            <a:off x="1080000" y="11754000"/>
+            <a:ext cx="5400000" cy="1548000"/>
           </a:xfrm>
           <a:prstGeom prst="rect">
             <a:avLst/>
@@ -5748,8 +5748,8 @@
         </p:nvSpPr>
         <p:spPr>
           <a:xfrm>
-            <a:off x="1548000" y="9450000"/>
-            <a:ext cx="5220000" cy="54000"/>
+            <a:off x="1080000" y="11754000"/>
+            <a:ext cx="5400000" cy="54000"/>
           </a:xfrm>
           <a:prstGeom prst="rect">
             <a:avLst/>
@@ -5777,8 +5777,8 @@
         </p:nvSpPr>
         <p:spPr>
           <a:xfrm>
-            <a:off x="1548000" y="9504000"/>
-            <a:ext cx="5220000" cy="1134000"/>
+            <a:off x="1080000" y="11808000"/>
+            <a:ext cx="5400000" cy="1494000"/>
           </a:xfrm>
           <a:prstGeom prst="rect">
             <a:avLst/>
@@ -5793,7 +5793,7 @@
           <a:p>
             <a:pPr algn="ctr"/>
             <a:r>
-              <a:rPr sz="4535" b="1">
+              <a:rPr sz="5669" b="1">
                 <a:solidFill>
                   <a:srgbClr val="FFD27A"/>
                 </a:solidFill>
@@ -5806,7 +5806,7 @@
           <a:p>
             <a:pPr algn="ctr"/>
             <a:r>
-              <a:rPr sz="2692" b="0">
+              <a:rPr sz="3259" b="0">
                 <a:solidFill>
                   <a:srgbClr val="FFF1D6"/>
                 </a:solidFill>
@@ -5820,145 +5820,7 @@
       </p:sp>
       <p:sp>
         <p:nvSpPr>
-          <p:cNvPr id="8" name="文字框1"/>
-          <p:cNvSpPr/>
-          <p:nvPr/>
-        </p:nvSpPr>
-        <p:spPr>
-          <a:xfrm>
-            <a:off x="1458000" y="10980000"/>
-            <a:ext cx="5400000" cy="5850000"/>
-          </a:xfrm>
-          <a:prstGeom prst="roundRect">
-            <a:avLst>
-              <a:gd name="adj" fmla="val 4000"/>
-            </a:avLst>
-          </a:prstGeom>
-          <a:gradFill rotWithShape="1">
-            <a:gsLst>
-              <a:gs pos="0">
-                <a:srgbClr val="FFFDF7"/>
-              </a:gs>
-              <a:gs pos="100000">
-                <a:srgbClr val="FBF1DC"/>
-              </a:gs>
-            </a:gsLst>
-            <a:lin ang="5400000" scaled="0"/>
-          </a:gradFill>
-          <a:ln w="36000">
-            <a:solidFill>
-              <a:srgbClr val="E9C46A"/>
-            </a:solidFill>
-          </a:ln>
-        </p:spPr>
-        <p:txBody>
-          <a:bodyPr rtlCol="0" anchor="ctr"/>
-          <a:lstStyle/>
-          <a:p>
-            <a:pPr algn="ctr"/>
-          </a:p>
-        </p:txBody>
-      </p:sp>
-      <p:sp>
-        <p:nvSpPr>
-          <p:cNvPr id="9" name="文字框饰条1"/>
-          <p:cNvSpPr/>
-          <p:nvPr/>
-        </p:nvSpPr>
-        <p:spPr>
-          <a:xfrm>
-            <a:off x="1674000" y="16578000"/>
-            <a:ext cx="4968000" cy="90000"/>
-          </a:xfrm>
-          <a:prstGeom prst="rect">
-            <a:avLst/>
-          </a:prstGeom>
-          <a:gradFill rotWithShape="1">
-            <a:gsLst>
-              <a:gs pos="0">
-                <a:srgbClr val="C8161D"/>
-              </a:gs>
-              <a:gs pos="60000">
-                <a:srgbClr val="E0A43A"/>
-              </a:gs>
-              <a:gs pos="100000">
-                <a:srgbClr val="FFD27A"/>
-              </a:gs>
-            </a:gsLst>
-            <a:lin ang="0" scaled="0"/>
-          </a:gradFill>
-          <a:ln>
-            <a:noFill/>
-          </a:ln>
-        </p:spPr>
-        <p:txBody>
-          <a:bodyPr rtlCol="0" anchor="ctr"/>
-          <a:lstStyle/>
-          <a:p>
-            <a:pPr algn="ctr"/>
-          </a:p>
-        </p:txBody>
-      </p:sp>
-      <p:sp>
-        <p:nvSpPr>
-          <p:cNvPr id="10" name="文字1"/>
-          <p:cNvSpPr txBox="1"/>
-          <p:nvPr/>
-        </p:nvSpPr>
-        <p:spPr>
-          <a:xfrm>
-            <a:off x="1746000" y="11232000"/>
-            <a:ext cx="4824000" cy="5130000"/>
-          </a:xfrm>
-          <a:prstGeom prst="rect">
-            <a:avLst/>
-          </a:prstGeom>
-          <a:noFill/>
-        </p:spPr>
-        <p:txBody>
-          <a:bodyPr wrap="square" lIns="0" rIns="0" tIns="0" bIns="0" anchor="t">
-            <a:noAutofit/>
-          </a:bodyPr>
-          <a:lstStyle/>
-          <a:p>
-            <a:pPr algn="just">
-              <a:lnSpc>
-                <a:spcPts val="3826"/>
-              </a:lnSpc>
-            </a:pPr>
-            <a:r>
-              <a:rPr sz="2551" b="1">
-                <a:solidFill>
-                  <a:srgbClr val="B8121A"/>
-                </a:solidFill>
-                <a:latin typeface="Microsoft YaHei"/>
-                <a:ea typeface="微软雅黑"/>
-              </a:rPr>
-              <a:t>“精准研判1号机主给水泵B电机振动隐患”</a:t>
-            </a:r>
-          </a:p>
-          <a:p>
-            <a:pPr algn="just" marL="0" indent="648000">
-              <a:lnSpc>
-                <a:spcPts val="3826"/>
-              </a:lnSpc>
-            </a:pPr>
-            <a:r>
-              <a:rPr sz="2551" b="0">
-                <a:solidFill>
-                  <a:srgbClr val="3A2A1A"/>
-                </a:solidFill>
-                <a:latin typeface="Microsoft YaHei"/>
-                <a:ea typeface="微软雅黑"/>
-              </a:rPr>
-              <a:t>刘明利精准研判1号机主给水泵B电机振动隐患，彰显了刘明利的技术自信、专业担当与对未知的执着探索精神——正是这些，构成了核安全文化的深层底色。刘明利同志用实际行动诠释了“我为核安全文化代言”的深刻内涵。</a:t>
-            </a:r>
-          </a:p>
-        </p:txBody>
-      </p:sp>
-      <p:sp>
-        <p:nvSpPr>
-          <p:cNvPr id="11" name="热区1">
+          <p:cNvPr id="8" name="热区1">
             <a:hlinkClick action="ppaction://hlinksldjump" r:id="rId3"/>
           </p:cNvPr>
           <p:cNvSpPr/>
@@ -5966,8 +5828,8 @@
         </p:nvSpPr>
         <p:spPr>
           <a:xfrm>
-            <a:off x="1458000" y="5400000"/>
-            <a:ext cx="5400000" cy="11430000"/>
+            <a:off x="990000" y="7560000"/>
+            <a:ext cx="5580000" cy="5832000"/>
           </a:xfrm>
           <a:prstGeom prst="rect">
             <a:avLst/>
@@ -5991,18 +5853,18 @@
       </p:sp>
       <p:sp>
         <p:nvSpPr>
-          <p:cNvPr id="12" name="卡框2"/>
-          <p:cNvSpPr/>
-          <p:nvPr/>
-        </p:nvSpPr>
-        <p:spPr>
-          <a:xfrm>
-            <a:off x="7470000" y="5400000"/>
-            <a:ext cx="5400000" cy="5328000"/>
+          <p:cNvPr id="9" name="卡框2"/>
+          <p:cNvSpPr/>
+          <p:nvPr/>
+        </p:nvSpPr>
+        <p:spPr>
+          <a:xfrm>
+            <a:off x="7110000" y="7560000"/>
+            <a:ext cx="5580000" cy="5832000"/>
           </a:xfrm>
           <a:prstGeom prst="roundRect">
             <a:avLst>
-              <a:gd name="adj" fmla="val 4054"/>
+              <a:gd name="adj" fmla="val 3870"/>
             </a:avLst>
           </a:prstGeom>
           <a:gradFill rotWithShape="1">
@@ -6039,14 +5901,14 @@
       </p:sp>
       <p:sp>
         <p:nvSpPr>
-          <p:cNvPr id="13" name="衬纸2"/>
-          <p:cNvSpPr/>
-          <p:nvPr/>
-        </p:nvSpPr>
-        <p:spPr>
-          <a:xfrm>
-            <a:off x="7560000" y="5490000"/>
-            <a:ext cx="5220000" cy="3960000"/>
+          <p:cNvPr id="10" name="衬纸2"/>
+          <p:cNvSpPr/>
+          <p:nvPr/>
+        </p:nvSpPr>
+        <p:spPr>
+          <a:xfrm>
+            <a:off x="7200000" y="7650000"/>
+            <a:ext cx="5400000" cy="4104000"/>
           </a:xfrm>
           <a:prstGeom prst="rect">
             <a:avLst/>
@@ -6068,7 +5930,7 @@
       </p:sp>
       <p:pic>
         <p:nvPicPr>
-          <p:cNvPr id="14" name="!!p2" descr="image.jpg"/>
+          <p:cNvPr id="11" name="!!p2" descr="image.jpg"/>
           <p:cNvPicPr>
             <a:picLocks noChangeAspect="1"/>
           </p:cNvPicPr>
@@ -6083,8 +5945,8 @@
         </p:blipFill>
         <p:spPr>
           <a:xfrm>
-            <a:off x="7650000" y="5580000"/>
-            <a:ext cx="5040000" cy="3780000"/>
+            <a:off x="7290000" y="7740000"/>
+            <a:ext cx="5220000" cy="3924000"/>
           </a:xfrm>
           <a:prstGeom prst="rect">
             <a:avLst/>
@@ -6093,14 +5955,14 @@
       </p:pic>
       <p:sp>
         <p:nvSpPr>
-          <p:cNvPr id="15" name="名牌底2"/>
-          <p:cNvSpPr/>
-          <p:nvPr/>
-        </p:nvSpPr>
-        <p:spPr>
-          <a:xfrm>
-            <a:off x="7560000" y="9450000"/>
-            <a:ext cx="5220000" cy="1188000"/>
+          <p:cNvPr id="12" name="名牌底2"/>
+          <p:cNvSpPr/>
+          <p:nvPr/>
+        </p:nvSpPr>
+        <p:spPr>
+          <a:xfrm>
+            <a:off x="7200000" y="11754000"/>
+            <a:ext cx="5400000" cy="1548000"/>
           </a:xfrm>
           <a:prstGeom prst="rect">
             <a:avLst/>
@@ -6130,14 +5992,14 @@
       </p:sp>
       <p:sp>
         <p:nvSpPr>
-          <p:cNvPr id="16" name="名牌金线2"/>
-          <p:cNvSpPr/>
-          <p:nvPr/>
-        </p:nvSpPr>
-        <p:spPr>
-          <a:xfrm>
-            <a:off x="7560000" y="9450000"/>
-            <a:ext cx="5220000" cy="54000"/>
+          <p:cNvPr id="13" name="名牌金线2"/>
+          <p:cNvSpPr/>
+          <p:nvPr/>
+        </p:nvSpPr>
+        <p:spPr>
+          <a:xfrm>
+            <a:off x="7200000" y="11754000"/>
+            <a:ext cx="5400000" cy="54000"/>
           </a:xfrm>
           <a:prstGeom prst="rect">
             <a:avLst/>
@@ -6159,14 +6021,14 @@
       </p:sp>
       <p:sp>
         <p:nvSpPr>
-          <p:cNvPr id="17" name="名牌2"/>
+          <p:cNvPr id="14" name="名牌2"/>
           <p:cNvSpPr txBox="1"/>
           <p:nvPr/>
         </p:nvSpPr>
         <p:spPr>
           <a:xfrm>
-            <a:off x="7560000" y="9504000"/>
-            <a:ext cx="5220000" cy="1134000"/>
+            <a:off x="7200000" y="11808000"/>
+            <a:ext cx="5400000" cy="1494000"/>
           </a:xfrm>
           <a:prstGeom prst="rect">
             <a:avLst/>
@@ -6181,7 +6043,7 @@
           <a:p>
             <a:pPr algn="ctr"/>
             <a:r>
-              <a:rPr sz="4535" b="1">
+              <a:rPr sz="5669" b="1">
                 <a:solidFill>
                   <a:srgbClr val="FFD27A"/>
                 </a:solidFill>
@@ -6194,7 +6056,7 @@
           <a:p>
             <a:pPr algn="ctr"/>
             <a:r>
-              <a:rPr sz="2692" b="0">
+              <a:rPr sz="3259" b="0">
                 <a:solidFill>
                   <a:srgbClr val="FFF1D6"/>
                 </a:solidFill>
@@ -6208,145 +6070,7 @@
       </p:sp>
       <p:sp>
         <p:nvSpPr>
-          <p:cNvPr id="18" name="文字框2"/>
-          <p:cNvSpPr/>
-          <p:nvPr/>
-        </p:nvSpPr>
-        <p:spPr>
-          <a:xfrm>
-            <a:off x="7470000" y="10980000"/>
-            <a:ext cx="5400000" cy="5850000"/>
-          </a:xfrm>
-          <a:prstGeom prst="roundRect">
-            <a:avLst>
-              <a:gd name="adj" fmla="val 4000"/>
-            </a:avLst>
-          </a:prstGeom>
-          <a:gradFill rotWithShape="1">
-            <a:gsLst>
-              <a:gs pos="0">
-                <a:srgbClr val="FFFDF7"/>
-              </a:gs>
-              <a:gs pos="100000">
-                <a:srgbClr val="FBF1DC"/>
-              </a:gs>
-            </a:gsLst>
-            <a:lin ang="5400000" scaled="0"/>
-          </a:gradFill>
-          <a:ln w="36000">
-            <a:solidFill>
-              <a:srgbClr val="E9C46A"/>
-            </a:solidFill>
-          </a:ln>
-        </p:spPr>
-        <p:txBody>
-          <a:bodyPr rtlCol="0" anchor="ctr"/>
-          <a:lstStyle/>
-          <a:p>
-            <a:pPr algn="ctr"/>
-          </a:p>
-        </p:txBody>
-      </p:sp>
-      <p:sp>
-        <p:nvSpPr>
-          <p:cNvPr id="19" name="文字框饰条2"/>
-          <p:cNvSpPr/>
-          <p:nvPr/>
-        </p:nvSpPr>
-        <p:spPr>
-          <a:xfrm>
-            <a:off x="7686000" y="16578000"/>
-            <a:ext cx="4968000" cy="90000"/>
-          </a:xfrm>
-          <a:prstGeom prst="rect">
-            <a:avLst/>
-          </a:prstGeom>
-          <a:gradFill rotWithShape="1">
-            <a:gsLst>
-              <a:gs pos="0">
-                <a:srgbClr val="C8161D"/>
-              </a:gs>
-              <a:gs pos="60000">
-                <a:srgbClr val="E0A43A"/>
-              </a:gs>
-              <a:gs pos="100000">
-                <a:srgbClr val="FFD27A"/>
-              </a:gs>
-            </a:gsLst>
-            <a:lin ang="0" scaled="0"/>
-          </a:gradFill>
-          <a:ln>
-            <a:noFill/>
-          </a:ln>
-        </p:spPr>
-        <p:txBody>
-          <a:bodyPr rtlCol="0" anchor="ctr"/>
-          <a:lstStyle/>
-          <a:p>
-            <a:pPr algn="ctr"/>
-          </a:p>
-        </p:txBody>
-      </p:sp>
-      <p:sp>
-        <p:nvSpPr>
-          <p:cNvPr id="20" name="文字2"/>
-          <p:cNvSpPr txBox="1"/>
-          <p:nvPr/>
-        </p:nvSpPr>
-        <p:spPr>
-          <a:xfrm>
-            <a:off x="7758000" y="11232000"/>
-            <a:ext cx="4824000" cy="5130000"/>
-          </a:xfrm>
-          <a:prstGeom prst="rect">
-            <a:avLst/>
-          </a:prstGeom>
-          <a:noFill/>
-        </p:spPr>
-        <p:txBody>
-          <a:bodyPr wrap="square" lIns="0" rIns="0" tIns="0" bIns="0" anchor="t">
-            <a:noAutofit/>
-          </a:bodyPr>
-          <a:lstStyle/>
-          <a:p>
-            <a:pPr algn="just">
-              <a:lnSpc>
-                <a:spcPts val="3401"/>
-              </a:lnSpc>
-            </a:pPr>
-            <a:r>
-              <a:rPr sz="2267" b="1">
-                <a:solidFill>
-                  <a:srgbClr val="B8121A"/>
-                </a:solidFill>
-                <a:latin typeface="Microsoft YaHei"/>
-                <a:ea typeface="微软雅黑"/>
-              </a:rPr>
-              <a:t>“发现并及时上报2号机CPS取样架标识与实际取样点不一致”</a:t>
-            </a:r>
-          </a:p>
-          <a:p>
-            <a:pPr algn="just" marL="0" indent="576000">
-              <a:lnSpc>
-                <a:spcPts val="3401"/>
-              </a:lnSpc>
-            </a:pPr>
-            <a:r>
-              <a:rPr sz="2267" b="0">
-                <a:solidFill>
-                  <a:srgbClr val="3A2A1A"/>
-                </a:solidFill>
-                <a:latin typeface="Microsoft YaHei"/>
-                <a:ea typeface="微软雅黑"/>
-              </a:rPr>
-              <a:t>张岩发现并及时上报2号机CPS取样架标识与实际取样点不一致。张岩同志在隔离操作中，遇疑则停，并充分发挥主观能动性，对该系统有关取样管排逐根细致排查，确定CPS取样架区域存在系统性标牌错误，并及时上报，体现了严慎细实的工作作风，用实际行动履行了运行人员对核安全的庄重承诺。</a:t>
-            </a:r>
-          </a:p>
-        </p:txBody>
-      </p:sp>
-      <p:sp>
-        <p:nvSpPr>
-          <p:cNvPr id="21" name="热区2">
+          <p:cNvPr id="15" name="热区2">
             <a:hlinkClick action="ppaction://hlinksldjump" r:id="rId5"/>
           </p:cNvPr>
           <p:cNvSpPr/>
@@ -6354,8 +6078,8 @@
         </p:nvSpPr>
         <p:spPr>
           <a:xfrm>
-            <a:off x="7470000" y="5400000"/>
-            <a:ext cx="5400000" cy="11430000"/>
+            <a:off x="7110000" y="7560000"/>
+            <a:ext cx="5580000" cy="5832000"/>
           </a:xfrm>
           <a:prstGeom prst="rect">
             <a:avLst/>
@@ -6379,18 +6103,18 @@
       </p:sp>
       <p:sp>
         <p:nvSpPr>
-          <p:cNvPr id="22" name="卡框3"/>
-          <p:cNvSpPr/>
-          <p:nvPr/>
-        </p:nvSpPr>
-        <p:spPr>
-          <a:xfrm>
-            <a:off x="13482000" y="5400000"/>
-            <a:ext cx="5400000" cy="5328000"/>
+          <p:cNvPr id="16" name="卡框3"/>
+          <p:cNvSpPr/>
+          <p:nvPr/>
+        </p:nvSpPr>
+        <p:spPr>
+          <a:xfrm>
+            <a:off x="13230000" y="7560000"/>
+            <a:ext cx="5580000" cy="5832000"/>
           </a:xfrm>
           <a:prstGeom prst="roundRect">
             <a:avLst>
-              <a:gd name="adj" fmla="val 4054"/>
+              <a:gd name="adj" fmla="val 3870"/>
             </a:avLst>
           </a:prstGeom>
           <a:gradFill rotWithShape="1">
@@ -6427,14 +6151,14 @@
       </p:sp>
       <p:sp>
         <p:nvSpPr>
-          <p:cNvPr id="23" name="衬纸3"/>
-          <p:cNvSpPr/>
-          <p:nvPr/>
-        </p:nvSpPr>
-        <p:spPr>
-          <a:xfrm>
-            <a:off x="13572000" y="5490000"/>
-            <a:ext cx="5220000" cy="3960000"/>
+          <p:cNvPr id="17" name="衬纸3"/>
+          <p:cNvSpPr/>
+          <p:nvPr/>
+        </p:nvSpPr>
+        <p:spPr>
+          <a:xfrm>
+            <a:off x="13320000" y="7650000"/>
+            <a:ext cx="5400000" cy="4104000"/>
           </a:xfrm>
           <a:prstGeom prst="rect">
             <a:avLst/>
@@ -6456,7 +6180,7 @@
       </p:sp>
       <p:pic>
         <p:nvPicPr>
-          <p:cNvPr id="24" name="!!p3" descr="image.jpg"/>
+          <p:cNvPr id="18" name="!!p3" descr="image.jpg"/>
           <p:cNvPicPr>
             <a:picLocks noChangeAspect="1"/>
           </p:cNvPicPr>
@@ -6471,8 +6195,8 @@
         </p:blipFill>
         <p:spPr>
           <a:xfrm>
-            <a:off x="13662000" y="5580000"/>
-            <a:ext cx="5040000" cy="3780000"/>
+            <a:off x="13410000" y="7740000"/>
+            <a:ext cx="5220000" cy="3924000"/>
           </a:xfrm>
           <a:prstGeom prst="rect">
             <a:avLst/>
@@ -6481,14 +6205,14 @@
       </p:pic>
       <p:sp>
         <p:nvSpPr>
-          <p:cNvPr id="25" name="名牌底3"/>
-          <p:cNvSpPr/>
-          <p:nvPr/>
-        </p:nvSpPr>
-        <p:spPr>
-          <a:xfrm>
-            <a:off x="13572000" y="9450000"/>
-            <a:ext cx="5220000" cy="1188000"/>
+          <p:cNvPr id="19" name="名牌底3"/>
+          <p:cNvSpPr/>
+          <p:nvPr/>
+        </p:nvSpPr>
+        <p:spPr>
+          <a:xfrm>
+            <a:off x="13320000" y="11754000"/>
+            <a:ext cx="5400000" cy="1548000"/>
           </a:xfrm>
           <a:prstGeom prst="rect">
             <a:avLst/>
@@ -6518,14 +6242,14 @@
       </p:sp>
       <p:sp>
         <p:nvSpPr>
-          <p:cNvPr id="26" name="名牌金线3"/>
-          <p:cNvSpPr/>
-          <p:nvPr/>
-        </p:nvSpPr>
-        <p:spPr>
-          <a:xfrm>
-            <a:off x="13572000" y="9450000"/>
-            <a:ext cx="5220000" cy="54000"/>
+          <p:cNvPr id="20" name="名牌金线3"/>
+          <p:cNvSpPr/>
+          <p:nvPr/>
+        </p:nvSpPr>
+        <p:spPr>
+          <a:xfrm>
+            <a:off x="13320000" y="11754000"/>
+            <a:ext cx="5400000" cy="54000"/>
           </a:xfrm>
           <a:prstGeom prst="rect">
             <a:avLst/>
@@ -6547,14 +6271,14 @@
       </p:sp>
       <p:sp>
         <p:nvSpPr>
-          <p:cNvPr id="27" name="名牌3"/>
+          <p:cNvPr id="21" name="名牌3"/>
           <p:cNvSpPr txBox="1"/>
           <p:nvPr/>
         </p:nvSpPr>
         <p:spPr>
           <a:xfrm>
-            <a:off x="13572000" y="9504000"/>
-            <a:ext cx="5220000" cy="1134000"/>
+            <a:off x="13320000" y="11808000"/>
+            <a:ext cx="5400000" cy="1494000"/>
           </a:xfrm>
           <a:prstGeom prst="rect">
             <a:avLst/>
@@ -6569,7 +6293,7 @@
           <a:p>
             <a:pPr algn="ctr"/>
             <a:r>
-              <a:rPr sz="4535" b="1">
+              <a:rPr sz="5669" b="1">
                 <a:solidFill>
                   <a:srgbClr val="FFD27A"/>
                 </a:solidFill>
@@ -6582,7 +6306,7 @@
           <a:p>
             <a:pPr algn="ctr"/>
             <a:r>
-              <a:rPr sz="2692" b="0">
+              <a:rPr sz="3259" b="0">
                 <a:solidFill>
                   <a:srgbClr val="FFF1D6"/>
                 </a:solidFill>
@@ -6596,145 +6320,7 @@
       </p:sp>
       <p:sp>
         <p:nvSpPr>
-          <p:cNvPr id="28" name="文字框3"/>
-          <p:cNvSpPr/>
-          <p:nvPr/>
-        </p:nvSpPr>
-        <p:spPr>
-          <a:xfrm>
-            <a:off x="13482000" y="10980000"/>
-            <a:ext cx="5400000" cy="5850000"/>
-          </a:xfrm>
-          <a:prstGeom prst="roundRect">
-            <a:avLst>
-              <a:gd name="adj" fmla="val 4000"/>
-            </a:avLst>
-          </a:prstGeom>
-          <a:gradFill rotWithShape="1">
-            <a:gsLst>
-              <a:gs pos="0">
-                <a:srgbClr val="FFFDF7"/>
-              </a:gs>
-              <a:gs pos="100000">
-                <a:srgbClr val="FBF1DC"/>
-              </a:gs>
-            </a:gsLst>
-            <a:lin ang="5400000" scaled="0"/>
-          </a:gradFill>
-          <a:ln w="36000">
-            <a:solidFill>
-              <a:srgbClr val="E9C46A"/>
-            </a:solidFill>
-          </a:ln>
-        </p:spPr>
-        <p:txBody>
-          <a:bodyPr rtlCol="0" anchor="ctr"/>
-          <a:lstStyle/>
-          <a:p>
-            <a:pPr algn="ctr"/>
-          </a:p>
-        </p:txBody>
-      </p:sp>
-      <p:sp>
-        <p:nvSpPr>
-          <p:cNvPr id="29" name="文字框饰条3"/>
-          <p:cNvSpPr/>
-          <p:nvPr/>
-        </p:nvSpPr>
-        <p:spPr>
-          <a:xfrm>
-            <a:off x="13698000" y="16578000"/>
-            <a:ext cx="4968000" cy="90000"/>
-          </a:xfrm>
-          <a:prstGeom prst="rect">
-            <a:avLst/>
-          </a:prstGeom>
-          <a:gradFill rotWithShape="1">
-            <a:gsLst>
-              <a:gs pos="0">
-                <a:srgbClr val="C8161D"/>
-              </a:gs>
-              <a:gs pos="60000">
-                <a:srgbClr val="E0A43A"/>
-              </a:gs>
-              <a:gs pos="100000">
-                <a:srgbClr val="FFD27A"/>
-              </a:gs>
-            </a:gsLst>
-            <a:lin ang="0" scaled="0"/>
-          </a:gradFill>
-          <a:ln>
-            <a:noFill/>
-          </a:ln>
-        </p:spPr>
-        <p:txBody>
-          <a:bodyPr rtlCol="0" anchor="ctr"/>
-          <a:lstStyle/>
-          <a:p>
-            <a:pPr algn="ctr"/>
-          </a:p>
-        </p:txBody>
-      </p:sp>
-      <p:sp>
-        <p:nvSpPr>
-          <p:cNvPr id="30" name="文字3"/>
-          <p:cNvSpPr txBox="1"/>
-          <p:nvPr/>
-        </p:nvSpPr>
-        <p:spPr>
-          <a:xfrm>
-            <a:off x="13770000" y="11232000"/>
-            <a:ext cx="4824000" cy="5130000"/>
-          </a:xfrm>
-          <a:prstGeom prst="rect">
-            <a:avLst/>
-          </a:prstGeom>
-          <a:noFill/>
-        </p:spPr>
-        <p:txBody>
-          <a:bodyPr wrap="square" lIns="0" rIns="0" tIns="0" bIns="0" anchor="t">
-            <a:noAutofit/>
-          </a:bodyPr>
-          <a:lstStyle/>
-          <a:p>
-            <a:pPr algn="just">
-              <a:lnSpc>
-                <a:spcPts val="3826"/>
-              </a:lnSpc>
-            </a:pPr>
-            <a:r>
-              <a:rPr sz="2551" b="1">
-                <a:solidFill>
-                  <a:srgbClr val="B8121A"/>
-                </a:solidFill>
-                <a:latin typeface="Microsoft YaHei"/>
-                <a:ea typeface="微软雅黑"/>
-              </a:rPr>
-              <a:t>“紧盯外委监测质量，严守监测数据安全防线”</a:t>
-            </a:r>
-          </a:p>
-          <a:p>
-            <a:pPr algn="just" marL="0" indent="648000">
-              <a:lnSpc>
-                <a:spcPts val="3826"/>
-              </a:lnSpc>
-            </a:pPr>
-            <a:r>
-              <a:rPr sz="2551" b="0">
-                <a:solidFill>
-                  <a:srgbClr val="3A2A1A"/>
-                </a:solidFill>
-                <a:latin typeface="Microsoft YaHei"/>
-                <a:ea typeface="微软雅黑"/>
-              </a:rPr>
-              <a:t>杨帆紧盯外委监测质量，严守监测数据安全防线。工作中，该同志始终秉持“严、慎、细、实”的优良作风，防患未然、精益求精，以高度的责任担当持续推动核安全文化走深走实，为核与辐射环境安全稳定保驾护航。</a:t>
-            </a:r>
-          </a:p>
-        </p:txBody>
-      </p:sp>
-      <p:sp>
-        <p:nvSpPr>
-          <p:cNvPr id="31" name="热区3">
+          <p:cNvPr id="22" name="热区3">
             <a:hlinkClick action="ppaction://hlinksldjump" r:id="rId7"/>
           </p:cNvPr>
           <p:cNvSpPr/>
@@ -6742,8 +6328,8 @@
         </p:nvSpPr>
         <p:spPr>
           <a:xfrm>
-            <a:off x="13482000" y="5400000"/>
-            <a:ext cx="5400000" cy="11430000"/>
+            <a:off x="13230000" y="7560000"/>
+            <a:ext cx="5580000" cy="5832000"/>
           </a:xfrm>
           <a:prstGeom prst="rect">
             <a:avLst/>
@@ -6767,18 +6353,18 @@
       </p:sp>
       <p:sp>
         <p:nvSpPr>
-          <p:cNvPr id="32" name="卡框4"/>
-          <p:cNvSpPr/>
-          <p:nvPr/>
-        </p:nvSpPr>
-        <p:spPr>
-          <a:xfrm>
-            <a:off x="19494000" y="5400000"/>
-            <a:ext cx="5400000" cy="5328000"/>
+          <p:cNvPr id="23" name="卡框4"/>
+          <p:cNvSpPr/>
+          <p:nvPr/>
+        </p:nvSpPr>
+        <p:spPr>
+          <a:xfrm>
+            <a:off x="19350000" y="7560000"/>
+            <a:ext cx="5580000" cy="5832000"/>
           </a:xfrm>
           <a:prstGeom prst="roundRect">
             <a:avLst>
-              <a:gd name="adj" fmla="val 4054"/>
+              <a:gd name="adj" fmla="val 3870"/>
             </a:avLst>
           </a:prstGeom>
           <a:gradFill rotWithShape="1">
@@ -6815,14 +6401,14 @@
       </p:sp>
       <p:sp>
         <p:nvSpPr>
-          <p:cNvPr id="33" name="衬纸4"/>
-          <p:cNvSpPr/>
-          <p:nvPr/>
-        </p:nvSpPr>
-        <p:spPr>
-          <a:xfrm>
-            <a:off x="19584000" y="5490000"/>
-            <a:ext cx="5220000" cy="3960000"/>
+          <p:cNvPr id="24" name="衬纸4"/>
+          <p:cNvSpPr/>
+          <p:nvPr/>
+        </p:nvSpPr>
+        <p:spPr>
+          <a:xfrm>
+            <a:off x="19440000" y="7650000"/>
+            <a:ext cx="5400000" cy="4104000"/>
           </a:xfrm>
           <a:prstGeom prst="rect">
             <a:avLst/>
@@ -6844,7 +6430,7 @@
       </p:sp>
       <p:pic>
         <p:nvPicPr>
-          <p:cNvPr id="34" name="!!p4" descr="image.jpg"/>
+          <p:cNvPr id="25" name="!!p4" descr="image.jpg"/>
           <p:cNvPicPr>
             <a:picLocks noChangeAspect="1"/>
           </p:cNvPicPr>
@@ -6859,8 +6445,8 @@
         </p:blipFill>
         <p:spPr>
           <a:xfrm>
-            <a:off x="19674000" y="5580000"/>
-            <a:ext cx="5040000" cy="3780000"/>
+            <a:off x="19530000" y="7740000"/>
+            <a:ext cx="5220000" cy="3924000"/>
           </a:xfrm>
           <a:prstGeom prst="rect">
             <a:avLst/>
@@ -6869,14 +6455,14 @@
       </p:pic>
       <p:sp>
         <p:nvSpPr>
-          <p:cNvPr id="35" name="名牌底4"/>
-          <p:cNvSpPr/>
-          <p:nvPr/>
-        </p:nvSpPr>
-        <p:spPr>
-          <a:xfrm>
-            <a:off x="19584000" y="9450000"/>
-            <a:ext cx="5220000" cy="1188000"/>
+          <p:cNvPr id="26" name="名牌底4"/>
+          <p:cNvSpPr/>
+          <p:nvPr/>
+        </p:nvSpPr>
+        <p:spPr>
+          <a:xfrm>
+            <a:off x="19440000" y="11754000"/>
+            <a:ext cx="5400000" cy="1548000"/>
           </a:xfrm>
           <a:prstGeom prst="rect">
             <a:avLst/>
@@ -6906,14 +6492,14 @@
       </p:sp>
       <p:sp>
         <p:nvSpPr>
-          <p:cNvPr id="36" name="名牌金线4"/>
-          <p:cNvSpPr/>
-          <p:nvPr/>
-        </p:nvSpPr>
-        <p:spPr>
-          <a:xfrm>
-            <a:off x="19584000" y="9450000"/>
-            <a:ext cx="5220000" cy="54000"/>
+          <p:cNvPr id="27" name="名牌金线4"/>
+          <p:cNvSpPr/>
+          <p:nvPr/>
+        </p:nvSpPr>
+        <p:spPr>
+          <a:xfrm>
+            <a:off x="19440000" y="11754000"/>
+            <a:ext cx="5400000" cy="54000"/>
           </a:xfrm>
           <a:prstGeom prst="rect">
             <a:avLst/>
@@ -6935,14 +6521,14 @@
       </p:sp>
       <p:sp>
         <p:nvSpPr>
-          <p:cNvPr id="37" name="名牌4"/>
+          <p:cNvPr id="28" name="名牌4"/>
           <p:cNvSpPr txBox="1"/>
           <p:nvPr/>
         </p:nvSpPr>
         <p:spPr>
           <a:xfrm>
-            <a:off x="19584000" y="9504000"/>
-            <a:ext cx="5220000" cy="1134000"/>
+            <a:off x="19440000" y="11808000"/>
+            <a:ext cx="5400000" cy="1494000"/>
           </a:xfrm>
           <a:prstGeom prst="rect">
             <a:avLst/>
@@ -6957,7 +6543,7 @@
           <a:p>
             <a:pPr algn="ctr"/>
             <a:r>
-              <a:rPr sz="4535" b="1">
+              <a:rPr sz="5669" b="1">
                 <a:solidFill>
                   <a:srgbClr val="FFD27A"/>
                 </a:solidFill>
@@ -6970,7 +6556,7 @@
           <a:p>
             <a:pPr algn="ctr"/>
             <a:r>
-              <a:rPr sz="2692" b="0">
+              <a:rPr sz="3259" b="0">
                 <a:solidFill>
                   <a:srgbClr val="FFF1D6"/>
                 </a:solidFill>
@@ -6984,145 +6570,7 @@
       </p:sp>
       <p:sp>
         <p:nvSpPr>
-          <p:cNvPr id="38" name="文字框4"/>
-          <p:cNvSpPr/>
-          <p:nvPr/>
-        </p:nvSpPr>
-        <p:spPr>
-          <a:xfrm>
-            <a:off x="19494000" y="10980000"/>
-            <a:ext cx="5400000" cy="5850000"/>
-          </a:xfrm>
-          <a:prstGeom prst="roundRect">
-            <a:avLst>
-              <a:gd name="adj" fmla="val 4000"/>
-            </a:avLst>
-          </a:prstGeom>
-          <a:gradFill rotWithShape="1">
-            <a:gsLst>
-              <a:gs pos="0">
-                <a:srgbClr val="FFFDF7"/>
-              </a:gs>
-              <a:gs pos="100000">
-                <a:srgbClr val="FBF1DC"/>
-              </a:gs>
-            </a:gsLst>
-            <a:lin ang="5400000" scaled="0"/>
-          </a:gradFill>
-          <a:ln w="36000">
-            <a:solidFill>
-              <a:srgbClr val="E9C46A"/>
-            </a:solidFill>
-          </a:ln>
-        </p:spPr>
-        <p:txBody>
-          <a:bodyPr rtlCol="0" anchor="ctr"/>
-          <a:lstStyle/>
-          <a:p>
-            <a:pPr algn="ctr"/>
-          </a:p>
-        </p:txBody>
-      </p:sp>
-      <p:sp>
-        <p:nvSpPr>
-          <p:cNvPr id="39" name="文字框饰条4"/>
-          <p:cNvSpPr/>
-          <p:nvPr/>
-        </p:nvSpPr>
-        <p:spPr>
-          <a:xfrm>
-            <a:off x="19710000" y="16578000"/>
-            <a:ext cx="4968000" cy="90000"/>
-          </a:xfrm>
-          <a:prstGeom prst="rect">
-            <a:avLst/>
-          </a:prstGeom>
-          <a:gradFill rotWithShape="1">
-            <a:gsLst>
-              <a:gs pos="0">
-                <a:srgbClr val="C8161D"/>
-              </a:gs>
-              <a:gs pos="60000">
-                <a:srgbClr val="E0A43A"/>
-              </a:gs>
-              <a:gs pos="100000">
-                <a:srgbClr val="FFD27A"/>
-              </a:gs>
-            </a:gsLst>
-            <a:lin ang="0" scaled="0"/>
-          </a:gradFill>
-          <a:ln>
-            <a:noFill/>
-          </a:ln>
-        </p:spPr>
-        <p:txBody>
-          <a:bodyPr rtlCol="0" anchor="ctr"/>
-          <a:lstStyle/>
-          <a:p>
-            <a:pPr algn="ctr"/>
-          </a:p>
-        </p:txBody>
-      </p:sp>
-      <p:sp>
-        <p:nvSpPr>
-          <p:cNvPr id="40" name="文字4"/>
-          <p:cNvSpPr txBox="1"/>
-          <p:nvPr/>
-        </p:nvSpPr>
-        <p:spPr>
-          <a:xfrm>
-            <a:off x="19782000" y="11232000"/>
-            <a:ext cx="4824000" cy="5130000"/>
-          </a:xfrm>
-          <a:prstGeom prst="rect">
-            <a:avLst/>
-          </a:prstGeom>
-          <a:noFill/>
-        </p:spPr>
-        <p:txBody>
-          <a:bodyPr wrap="square" lIns="0" rIns="0" tIns="0" bIns="0" anchor="t">
-            <a:noAutofit/>
-          </a:bodyPr>
-          <a:lstStyle/>
-          <a:p>
-            <a:pPr algn="just">
-              <a:lnSpc>
-                <a:spcPts val="3614"/>
-              </a:lnSpc>
-            </a:pPr>
-            <a:r>
-              <a:rPr sz="2409" b="1">
-                <a:solidFill>
-                  <a:srgbClr val="B8121A"/>
-                </a:solidFill>
-                <a:latin typeface="Microsoft YaHei"/>
-                <a:ea typeface="微软雅黑"/>
-              </a:rPr>
-              <a:t>“及时发现并处置CCS B泵异常情况，成功避免设备损坏风险”</a:t>
-            </a:r>
-          </a:p>
-          <a:p>
-            <a:pPr algn="just" marL="0" indent="612000">
-              <a:lnSpc>
-                <a:spcPts val="3614"/>
-              </a:lnSpc>
-            </a:pPr>
-            <a:r>
-              <a:rPr sz="2409" b="0">
-                <a:solidFill>
-                  <a:srgbClr val="3A2A1A"/>
-                </a:solidFill>
-                <a:latin typeface="Microsoft YaHei"/>
-                <a:ea typeface="微软雅黑"/>
-              </a:rPr>
-              <a:t>运行二处3号机五值庞立成及时发现并处置CCS B泵异常情况，成功避免设备损坏风险。庞立成不轻易放过任何隐患，尽职履责，对设备参数保持敏感，发现异常后第一时间响应，处置果断，行动高效，避免设备损坏和事件升级，用实际行动履行了对核安全的承诺。</a:t>
-            </a:r>
-          </a:p>
-        </p:txBody>
-      </p:sp>
-      <p:sp>
-        <p:nvSpPr>
-          <p:cNvPr id="41" name="热区4">
+          <p:cNvPr id="29" name="热区4">
             <a:hlinkClick action="ppaction://hlinksldjump" r:id="rId9"/>
           </p:cNvPr>
           <p:cNvSpPr/>
@@ -7130,8 +6578,8 @@
         </p:nvSpPr>
         <p:spPr>
           <a:xfrm>
-            <a:off x="19494000" y="5400000"/>
-            <a:ext cx="5400000" cy="11430000"/>
+            <a:off x="19350000" y="7560000"/>
+            <a:ext cx="5580000" cy="5832000"/>
           </a:xfrm>
           <a:prstGeom prst="rect">
             <a:avLst/>
@@ -7155,18 +6603,18 @@
       </p:sp>
       <p:sp>
         <p:nvSpPr>
-          <p:cNvPr id="42" name="卡框5"/>
-          <p:cNvSpPr/>
-          <p:nvPr/>
-        </p:nvSpPr>
-        <p:spPr>
-          <a:xfrm>
-            <a:off x="25506000" y="5400000"/>
-            <a:ext cx="5400000" cy="5328000"/>
+          <p:cNvPr id="30" name="卡框5"/>
+          <p:cNvSpPr/>
+          <p:nvPr/>
+        </p:nvSpPr>
+        <p:spPr>
+          <a:xfrm>
+            <a:off x="25470000" y="7560000"/>
+            <a:ext cx="5580000" cy="5832000"/>
           </a:xfrm>
           <a:prstGeom prst="roundRect">
             <a:avLst>
-              <a:gd name="adj" fmla="val 4054"/>
+              <a:gd name="adj" fmla="val 3870"/>
             </a:avLst>
           </a:prstGeom>
           <a:gradFill rotWithShape="1">
@@ -7203,14 +6651,14 @@
       </p:sp>
       <p:sp>
         <p:nvSpPr>
-          <p:cNvPr id="43" name="衬纸5"/>
-          <p:cNvSpPr/>
-          <p:nvPr/>
-        </p:nvSpPr>
-        <p:spPr>
-          <a:xfrm>
-            <a:off x="25596000" y="5490000"/>
-            <a:ext cx="5220000" cy="3960000"/>
+          <p:cNvPr id="31" name="衬纸5"/>
+          <p:cNvSpPr/>
+          <p:nvPr/>
+        </p:nvSpPr>
+        <p:spPr>
+          <a:xfrm>
+            <a:off x="25560000" y="7650000"/>
+            <a:ext cx="5400000" cy="4104000"/>
           </a:xfrm>
           <a:prstGeom prst="rect">
             <a:avLst/>
@@ -7232,7 +6680,7 @@
       </p:sp>
       <p:pic>
         <p:nvPicPr>
-          <p:cNvPr id="44" name="!!p5" descr="image.jpg"/>
+          <p:cNvPr id="32" name="!!p5" descr="image.jpg"/>
           <p:cNvPicPr>
             <a:picLocks noChangeAspect="1"/>
           </p:cNvPicPr>
@@ -7247,8 +6695,8 @@
         </p:blipFill>
         <p:spPr>
           <a:xfrm>
-            <a:off x="25686000" y="5580000"/>
-            <a:ext cx="5040000" cy="3780000"/>
+            <a:off x="25650000" y="7740000"/>
+            <a:ext cx="5220000" cy="3924000"/>
           </a:xfrm>
           <a:prstGeom prst="rect">
             <a:avLst/>
@@ -7257,14 +6705,14 @@
       </p:pic>
       <p:sp>
         <p:nvSpPr>
-          <p:cNvPr id="45" name="名牌底5"/>
-          <p:cNvSpPr/>
-          <p:nvPr/>
-        </p:nvSpPr>
-        <p:spPr>
-          <a:xfrm>
-            <a:off x="25596000" y="9450000"/>
-            <a:ext cx="5220000" cy="1188000"/>
+          <p:cNvPr id="33" name="名牌底5"/>
+          <p:cNvSpPr/>
+          <p:nvPr/>
+        </p:nvSpPr>
+        <p:spPr>
+          <a:xfrm>
+            <a:off x="25560000" y="11754000"/>
+            <a:ext cx="5400000" cy="1548000"/>
           </a:xfrm>
           <a:prstGeom prst="rect">
             <a:avLst/>
@@ -7294,14 +6742,14 @@
       </p:sp>
       <p:sp>
         <p:nvSpPr>
-          <p:cNvPr id="46" name="名牌金线5"/>
-          <p:cNvSpPr/>
-          <p:nvPr/>
-        </p:nvSpPr>
-        <p:spPr>
-          <a:xfrm>
-            <a:off x="25596000" y="9450000"/>
-            <a:ext cx="5220000" cy="54000"/>
+          <p:cNvPr id="34" name="名牌金线5"/>
+          <p:cNvSpPr/>
+          <p:nvPr/>
+        </p:nvSpPr>
+        <p:spPr>
+          <a:xfrm>
+            <a:off x="25560000" y="11754000"/>
+            <a:ext cx="5400000" cy="54000"/>
           </a:xfrm>
           <a:prstGeom prst="rect">
             <a:avLst/>
@@ -7323,14 +6771,14 @@
       </p:sp>
       <p:sp>
         <p:nvSpPr>
-          <p:cNvPr id="47" name="名牌5"/>
+          <p:cNvPr id="35" name="名牌5"/>
           <p:cNvSpPr txBox="1"/>
           <p:nvPr/>
         </p:nvSpPr>
         <p:spPr>
           <a:xfrm>
-            <a:off x="25596000" y="9504000"/>
-            <a:ext cx="5220000" cy="1134000"/>
+            <a:off x="25560000" y="11808000"/>
+            <a:ext cx="5400000" cy="1494000"/>
           </a:xfrm>
           <a:prstGeom prst="rect">
             <a:avLst/>
@@ -7345,7 +6793,7 @@
           <a:p>
             <a:pPr algn="ctr"/>
             <a:r>
-              <a:rPr sz="4535" b="1">
+              <a:rPr sz="5669" b="1">
                 <a:solidFill>
                   <a:srgbClr val="FFD27A"/>
                 </a:solidFill>
@@ -7358,7 +6806,7 @@
           <a:p>
             <a:pPr algn="ctr"/>
             <a:r>
-              <a:rPr sz="2692" b="0">
+              <a:rPr sz="3259" b="0">
                 <a:solidFill>
                   <a:srgbClr val="FFF1D6"/>
                 </a:solidFill>
@@ -7372,145 +6820,7 @@
       </p:sp>
       <p:sp>
         <p:nvSpPr>
-          <p:cNvPr id="48" name="文字框5"/>
-          <p:cNvSpPr/>
-          <p:nvPr/>
-        </p:nvSpPr>
-        <p:spPr>
-          <a:xfrm>
-            <a:off x="25506000" y="10980000"/>
-            <a:ext cx="5400000" cy="5850000"/>
-          </a:xfrm>
-          <a:prstGeom prst="roundRect">
-            <a:avLst>
-              <a:gd name="adj" fmla="val 4000"/>
-            </a:avLst>
-          </a:prstGeom>
-          <a:gradFill rotWithShape="1">
-            <a:gsLst>
-              <a:gs pos="0">
-                <a:srgbClr val="FFFDF7"/>
-              </a:gs>
-              <a:gs pos="100000">
-                <a:srgbClr val="FBF1DC"/>
-              </a:gs>
-            </a:gsLst>
-            <a:lin ang="5400000" scaled="0"/>
-          </a:gradFill>
-          <a:ln w="36000">
-            <a:solidFill>
-              <a:srgbClr val="E9C46A"/>
-            </a:solidFill>
-          </a:ln>
-        </p:spPr>
-        <p:txBody>
-          <a:bodyPr rtlCol="0" anchor="ctr"/>
-          <a:lstStyle/>
-          <a:p>
-            <a:pPr algn="ctr"/>
-          </a:p>
-        </p:txBody>
-      </p:sp>
-      <p:sp>
-        <p:nvSpPr>
-          <p:cNvPr id="49" name="文字框饰条5"/>
-          <p:cNvSpPr/>
-          <p:nvPr/>
-        </p:nvSpPr>
-        <p:spPr>
-          <a:xfrm>
-            <a:off x="25722000" y="16578000"/>
-            <a:ext cx="4968000" cy="90000"/>
-          </a:xfrm>
-          <a:prstGeom prst="rect">
-            <a:avLst/>
-          </a:prstGeom>
-          <a:gradFill rotWithShape="1">
-            <a:gsLst>
-              <a:gs pos="0">
-                <a:srgbClr val="C8161D"/>
-              </a:gs>
-              <a:gs pos="60000">
-                <a:srgbClr val="E0A43A"/>
-              </a:gs>
-              <a:gs pos="100000">
-                <a:srgbClr val="FFD27A"/>
-              </a:gs>
-            </a:gsLst>
-            <a:lin ang="0" scaled="0"/>
-          </a:gradFill>
-          <a:ln>
-            <a:noFill/>
-          </a:ln>
-        </p:spPr>
-        <p:txBody>
-          <a:bodyPr rtlCol="0" anchor="ctr"/>
-          <a:lstStyle/>
-          <a:p>
-            <a:pPr algn="ctr"/>
-          </a:p>
-        </p:txBody>
-      </p:sp>
-      <p:sp>
-        <p:nvSpPr>
-          <p:cNvPr id="50" name="文字5"/>
-          <p:cNvSpPr txBox="1"/>
-          <p:nvPr/>
-        </p:nvSpPr>
-        <p:spPr>
-          <a:xfrm>
-            <a:off x="25794000" y="11232000"/>
-            <a:ext cx="4824000" cy="5130000"/>
-          </a:xfrm>
-          <a:prstGeom prst="rect">
-            <a:avLst/>
-          </a:prstGeom>
-          <a:noFill/>
-        </p:spPr>
-        <p:txBody>
-          <a:bodyPr wrap="square" lIns="0" rIns="0" tIns="0" bIns="0" anchor="t">
-            <a:noAutofit/>
-          </a:bodyPr>
-          <a:lstStyle/>
-          <a:p>
-            <a:pPr algn="just">
-              <a:lnSpc>
-                <a:spcPts val="2976"/>
-              </a:lnSpc>
-            </a:pPr>
-            <a:r>
-              <a:rPr sz="1984" b="1">
-                <a:solidFill>
-                  <a:srgbClr val="B8121A"/>
-                </a:solidFill>
-                <a:latin typeface="Microsoft YaHei"/>
-                <a:ea typeface="微软雅黑"/>
-              </a:rPr>
-              <a:t>“发现低压氢气站门口静电消除器故障，暂停脚手架搭设”</a:t>
-            </a:r>
-          </a:p>
-          <a:p>
-            <a:pPr algn="just" marL="0" indent="504000">
-              <a:lnSpc>
-                <a:spcPts val="2976"/>
-              </a:lnSpc>
-            </a:pPr>
-            <a:r>
-              <a:rPr sz="1984" b="0">
-                <a:solidFill>
-                  <a:srgbClr val="3A2A1A"/>
-                </a:solidFill>
-                <a:latin typeface="Microsoft YaHei"/>
-                <a:ea typeface="微软雅黑"/>
-              </a:rPr>
-              <a:t>上海申亿脚手架班组以质疑的工作态度发现低压氢气站门口静电消除器故障，暂停脚手架搭设，避免了潜在作业风险。于海青班组在此次作业准备中，坚持以质疑的工作态度审视每一个安全环节，不放过任何一项不符合条件的因素，有效避免了潜在的作业风险，展现了于海青班组严谨务实的工作作风和时刻将核安全放在首位的责任意识。他们的做法，是健康核安全文化在一线落地的真实写照。</a:t>
-            </a:r>
-          </a:p>
-        </p:txBody>
-      </p:sp>
-      <p:sp>
-        <p:nvSpPr>
-          <p:cNvPr id="51" name="热区5">
+          <p:cNvPr id="36" name="热区5">
             <a:hlinkClick action="ppaction://hlinksldjump" r:id="rId11"/>
           </p:cNvPr>
           <p:cNvSpPr/>
@@ -7518,8 +6828,8 @@
         </p:nvSpPr>
         <p:spPr>
           <a:xfrm>
-            <a:off x="25506000" y="5400000"/>
-            <a:ext cx="5400000" cy="11430000"/>
+            <a:off x="25470000" y="7560000"/>
+            <a:ext cx="5580000" cy="5832000"/>
           </a:xfrm>
           <a:prstGeom prst="rect">
             <a:avLst/>
@@ -7543,18 +6853,18 @@
       </p:sp>
       <p:sp>
         <p:nvSpPr>
-          <p:cNvPr id="52" name="卡框6"/>
-          <p:cNvSpPr/>
-          <p:nvPr/>
-        </p:nvSpPr>
-        <p:spPr>
-          <a:xfrm>
-            <a:off x="31518000" y="5400000"/>
-            <a:ext cx="5400000" cy="5328000"/>
+          <p:cNvPr id="37" name="卡框6"/>
+          <p:cNvSpPr/>
+          <p:nvPr/>
+        </p:nvSpPr>
+        <p:spPr>
+          <a:xfrm>
+            <a:off x="31590000" y="7560000"/>
+            <a:ext cx="5580000" cy="5832000"/>
           </a:xfrm>
           <a:prstGeom prst="roundRect">
             <a:avLst>
-              <a:gd name="adj" fmla="val 4054"/>
+              <a:gd name="adj" fmla="val 3870"/>
             </a:avLst>
           </a:prstGeom>
           <a:gradFill rotWithShape="1">
@@ -7591,14 +6901,14 @@
       </p:sp>
       <p:sp>
         <p:nvSpPr>
-          <p:cNvPr id="53" name="衬纸6"/>
-          <p:cNvSpPr/>
-          <p:nvPr/>
-        </p:nvSpPr>
-        <p:spPr>
-          <a:xfrm>
-            <a:off x="31608000" y="5490000"/>
-            <a:ext cx="5220000" cy="3960000"/>
+          <p:cNvPr id="38" name="衬纸6"/>
+          <p:cNvSpPr/>
+          <p:nvPr/>
+        </p:nvSpPr>
+        <p:spPr>
+          <a:xfrm>
+            <a:off x="31680000" y="7650000"/>
+            <a:ext cx="5400000" cy="4104000"/>
           </a:xfrm>
           <a:prstGeom prst="rect">
             <a:avLst/>
@@ -7620,7 +6930,7 @@
       </p:sp>
       <p:pic>
         <p:nvPicPr>
-          <p:cNvPr id="54" name="!!p6" descr="image.jpg"/>
+          <p:cNvPr id="39" name="!!p6" descr="image.jpg"/>
           <p:cNvPicPr>
             <a:picLocks noChangeAspect="1"/>
           </p:cNvPicPr>
@@ -7635,8 +6945,8 @@
         </p:blipFill>
         <p:spPr>
           <a:xfrm>
-            <a:off x="31698000" y="5580000"/>
-            <a:ext cx="5040000" cy="3780000"/>
+            <a:off x="31770000" y="7740000"/>
+            <a:ext cx="5220000" cy="3924000"/>
           </a:xfrm>
           <a:prstGeom prst="rect">
             <a:avLst/>
@@ -7645,14 +6955,14 @@
       </p:pic>
       <p:sp>
         <p:nvSpPr>
-          <p:cNvPr id="55" name="名牌底6"/>
-          <p:cNvSpPr/>
-          <p:nvPr/>
-        </p:nvSpPr>
-        <p:spPr>
-          <a:xfrm>
-            <a:off x="31608000" y="9450000"/>
-            <a:ext cx="5220000" cy="1188000"/>
+          <p:cNvPr id="40" name="名牌底6"/>
+          <p:cNvSpPr/>
+          <p:nvPr/>
+        </p:nvSpPr>
+        <p:spPr>
+          <a:xfrm>
+            <a:off x="31680000" y="11754000"/>
+            <a:ext cx="5400000" cy="1548000"/>
           </a:xfrm>
           <a:prstGeom prst="rect">
             <a:avLst/>
@@ -7682,14 +6992,14 @@
       </p:sp>
       <p:sp>
         <p:nvSpPr>
-          <p:cNvPr id="56" name="名牌金线6"/>
-          <p:cNvSpPr/>
-          <p:nvPr/>
-        </p:nvSpPr>
-        <p:spPr>
-          <a:xfrm>
-            <a:off x="31608000" y="9450000"/>
-            <a:ext cx="5220000" cy="54000"/>
+          <p:cNvPr id="41" name="名牌金线6"/>
+          <p:cNvSpPr/>
+          <p:nvPr/>
+        </p:nvSpPr>
+        <p:spPr>
+          <a:xfrm>
+            <a:off x="31680000" y="11754000"/>
+            <a:ext cx="5400000" cy="54000"/>
           </a:xfrm>
           <a:prstGeom prst="rect">
             <a:avLst/>
@@ -7711,14 +7021,14 @@
       </p:sp>
       <p:sp>
         <p:nvSpPr>
-          <p:cNvPr id="57" name="名牌6"/>
+          <p:cNvPr id="42" name="名牌6"/>
           <p:cNvSpPr txBox="1"/>
           <p:nvPr/>
         </p:nvSpPr>
         <p:spPr>
           <a:xfrm>
-            <a:off x="31608000" y="9504000"/>
-            <a:ext cx="5220000" cy="1134000"/>
+            <a:off x="31680000" y="11808000"/>
+            <a:ext cx="5400000" cy="1494000"/>
           </a:xfrm>
           <a:prstGeom prst="rect">
             <a:avLst/>
@@ -7733,7 +7043,7 @@
           <a:p>
             <a:pPr algn="ctr"/>
             <a:r>
-              <a:rPr sz="4535" b="1">
+              <a:rPr sz="5669" b="1">
                 <a:solidFill>
                   <a:srgbClr val="FFD27A"/>
                 </a:solidFill>
@@ -7746,7 +7056,7 @@
           <a:p>
             <a:pPr algn="ctr"/>
             <a:r>
-              <a:rPr sz="2692" b="0">
+              <a:rPr sz="3259" b="0">
                 <a:solidFill>
                   <a:srgbClr val="FFF1D6"/>
                 </a:solidFill>
@@ -7760,145 +7070,7 @@
       </p:sp>
       <p:sp>
         <p:nvSpPr>
-          <p:cNvPr id="58" name="文字框6"/>
-          <p:cNvSpPr/>
-          <p:nvPr/>
-        </p:nvSpPr>
-        <p:spPr>
-          <a:xfrm>
-            <a:off x="31518000" y="10980000"/>
-            <a:ext cx="5400000" cy="5850000"/>
-          </a:xfrm>
-          <a:prstGeom prst="roundRect">
-            <a:avLst>
-              <a:gd name="adj" fmla="val 4000"/>
-            </a:avLst>
-          </a:prstGeom>
-          <a:gradFill rotWithShape="1">
-            <a:gsLst>
-              <a:gs pos="0">
-                <a:srgbClr val="FFFDF7"/>
-              </a:gs>
-              <a:gs pos="100000">
-                <a:srgbClr val="FBF1DC"/>
-              </a:gs>
-            </a:gsLst>
-            <a:lin ang="5400000" scaled="0"/>
-          </a:gradFill>
-          <a:ln w="36000">
-            <a:solidFill>
-              <a:srgbClr val="E9C46A"/>
-            </a:solidFill>
-          </a:ln>
-        </p:spPr>
-        <p:txBody>
-          <a:bodyPr rtlCol="0" anchor="ctr"/>
-          <a:lstStyle/>
-          <a:p>
-            <a:pPr algn="ctr"/>
-          </a:p>
-        </p:txBody>
-      </p:sp>
-      <p:sp>
-        <p:nvSpPr>
-          <p:cNvPr id="59" name="文字框饰条6"/>
-          <p:cNvSpPr/>
-          <p:nvPr/>
-        </p:nvSpPr>
-        <p:spPr>
-          <a:xfrm>
-            <a:off x="31734000" y="16578000"/>
-            <a:ext cx="4968000" cy="90000"/>
-          </a:xfrm>
-          <a:prstGeom prst="rect">
-            <a:avLst/>
-          </a:prstGeom>
-          <a:gradFill rotWithShape="1">
-            <a:gsLst>
-              <a:gs pos="0">
-                <a:srgbClr val="C8161D"/>
-              </a:gs>
-              <a:gs pos="60000">
-                <a:srgbClr val="E0A43A"/>
-              </a:gs>
-              <a:gs pos="100000">
-                <a:srgbClr val="FFD27A"/>
-              </a:gs>
-            </a:gsLst>
-            <a:lin ang="0" scaled="0"/>
-          </a:gradFill>
-          <a:ln>
-            <a:noFill/>
-          </a:ln>
-        </p:spPr>
-        <p:txBody>
-          <a:bodyPr rtlCol="0" anchor="ctr"/>
-          <a:lstStyle/>
-          <a:p>
-            <a:pPr algn="ctr"/>
-          </a:p>
-        </p:txBody>
-      </p:sp>
-      <p:sp>
-        <p:nvSpPr>
-          <p:cNvPr id="60" name="文字6"/>
-          <p:cNvSpPr txBox="1"/>
-          <p:nvPr/>
-        </p:nvSpPr>
-        <p:spPr>
-          <a:xfrm>
-            <a:off x="31806000" y="11232000"/>
-            <a:ext cx="4824000" cy="5130000"/>
-          </a:xfrm>
-          <a:prstGeom prst="rect">
-            <a:avLst/>
-          </a:prstGeom>
-          <a:noFill/>
-        </p:spPr>
-        <p:txBody>
-          <a:bodyPr wrap="square" lIns="0" rIns="0" tIns="0" bIns="0" anchor="t">
-            <a:noAutofit/>
-          </a:bodyPr>
-          <a:lstStyle/>
-          <a:p>
-            <a:pPr algn="just">
-              <a:lnSpc>
-                <a:spcPts val="3401"/>
-              </a:lnSpc>
-            </a:pPr>
-            <a:r>
-              <a:rPr sz="2267" b="1">
-                <a:solidFill>
-                  <a:srgbClr val="B8121A"/>
-                </a:solidFill>
-                <a:latin typeface="Microsoft YaHei"/>
-                <a:ea typeface="微软雅黑"/>
-              </a:rPr>
-              <a:t>“就地发现2号机低压缸轴封汽腔定位螺栓螺母松脱”</a:t>
-            </a:r>
-          </a:p>
-          <a:p>
-            <a:pPr algn="just" marL="0" indent="576000">
-              <a:lnSpc>
-                <a:spcPts val="3401"/>
-              </a:lnSpc>
-            </a:pPr>
-            <a:r>
-              <a:rPr sz="2267" b="0">
-                <a:solidFill>
-                  <a:srgbClr val="3A2A1A"/>
-                </a:solidFill>
-                <a:latin typeface="Microsoft YaHei"/>
-                <a:ea typeface="微软雅黑"/>
-              </a:rPr>
-              <a:t>运行一处2号机五值潘绍卓就地发现2号机低压缸轴封汽腔定位螺栓螺母松脱。潘绍卓发现现场重要设备安全稳定运行的安全隐患，及时跟踪处理，避免小缺陷演变成为重大的设备损坏事件，凭借扎实的现场工作经验与主人翁的责任担当，用心坚守机组安全运行最后的防线。</a:t>
-            </a:r>
-          </a:p>
-        </p:txBody>
-      </p:sp>
-      <p:sp>
-        <p:nvSpPr>
-          <p:cNvPr id="61" name="热区6">
+          <p:cNvPr id="43" name="热区6">
             <a:hlinkClick action="ppaction://hlinksldjump" r:id="rId13"/>
           </p:cNvPr>
           <p:cNvSpPr/>
@@ -7906,8 +7078,8 @@
         </p:nvSpPr>
         <p:spPr>
           <a:xfrm>
-            <a:off x="31518000" y="5400000"/>
-            <a:ext cx="5400000" cy="11430000"/>
+            <a:off x="31590000" y="7560000"/>
+            <a:ext cx="5580000" cy="5832000"/>
           </a:xfrm>
           <a:prstGeom prst="rect">
             <a:avLst/>
@@ -7931,18 +7103,18 @@
       </p:sp>
       <p:sp>
         <p:nvSpPr>
-          <p:cNvPr id="62" name="卡框7"/>
-          <p:cNvSpPr/>
-          <p:nvPr/>
-        </p:nvSpPr>
-        <p:spPr>
-          <a:xfrm>
-            <a:off x="37530000" y="5400000"/>
-            <a:ext cx="5400000" cy="5328000"/>
+          <p:cNvPr id="44" name="卡框7"/>
+          <p:cNvSpPr/>
+          <p:nvPr/>
+        </p:nvSpPr>
+        <p:spPr>
+          <a:xfrm>
+            <a:off x="37710000" y="7560000"/>
+            <a:ext cx="5580000" cy="5832000"/>
           </a:xfrm>
           <a:prstGeom prst="roundRect">
             <a:avLst>
-              <a:gd name="adj" fmla="val 4054"/>
+              <a:gd name="adj" fmla="val 3870"/>
             </a:avLst>
           </a:prstGeom>
           <a:gradFill rotWithShape="1">
@@ -7979,14 +7151,14 @@
       </p:sp>
       <p:sp>
         <p:nvSpPr>
-          <p:cNvPr id="63" name="衬纸7"/>
-          <p:cNvSpPr/>
-          <p:nvPr/>
-        </p:nvSpPr>
-        <p:spPr>
-          <a:xfrm>
-            <a:off x="37620000" y="5490000"/>
-            <a:ext cx="5220000" cy="3960000"/>
+          <p:cNvPr id="45" name="衬纸7"/>
+          <p:cNvSpPr/>
+          <p:nvPr/>
+        </p:nvSpPr>
+        <p:spPr>
+          <a:xfrm>
+            <a:off x="37800000" y="7650000"/>
+            <a:ext cx="5400000" cy="4104000"/>
           </a:xfrm>
           <a:prstGeom prst="rect">
             <a:avLst/>
@@ -8008,7 +7180,7 @@
       </p:sp>
       <p:pic>
         <p:nvPicPr>
-          <p:cNvPr id="64" name="!!p7" descr="image.jpg"/>
+          <p:cNvPr id="46" name="!!p7" descr="image.jpg"/>
           <p:cNvPicPr>
             <a:picLocks noChangeAspect="1"/>
           </p:cNvPicPr>
@@ -8023,8 +7195,8 @@
         </p:blipFill>
         <p:spPr>
           <a:xfrm>
-            <a:off x="37710000" y="5580000"/>
-            <a:ext cx="5040000" cy="3780000"/>
+            <a:off x="37890000" y="7740000"/>
+            <a:ext cx="5220000" cy="3924000"/>
           </a:xfrm>
           <a:prstGeom prst="rect">
             <a:avLst/>
@@ -8033,14 +7205,14 @@
       </p:pic>
       <p:sp>
         <p:nvSpPr>
-          <p:cNvPr id="65" name="名牌底7"/>
-          <p:cNvSpPr/>
-          <p:nvPr/>
-        </p:nvSpPr>
-        <p:spPr>
-          <a:xfrm>
-            <a:off x="37620000" y="9450000"/>
-            <a:ext cx="5220000" cy="1188000"/>
+          <p:cNvPr id="47" name="名牌底7"/>
+          <p:cNvSpPr/>
+          <p:nvPr/>
+        </p:nvSpPr>
+        <p:spPr>
+          <a:xfrm>
+            <a:off x="37800000" y="11754000"/>
+            <a:ext cx="5400000" cy="1548000"/>
           </a:xfrm>
           <a:prstGeom prst="rect">
             <a:avLst/>
@@ -8070,14 +7242,14 @@
       </p:sp>
       <p:sp>
         <p:nvSpPr>
-          <p:cNvPr id="66" name="名牌金线7"/>
-          <p:cNvSpPr/>
-          <p:nvPr/>
-        </p:nvSpPr>
-        <p:spPr>
-          <a:xfrm>
-            <a:off x="37620000" y="9450000"/>
-            <a:ext cx="5220000" cy="54000"/>
+          <p:cNvPr id="48" name="名牌金线7"/>
+          <p:cNvSpPr/>
+          <p:nvPr/>
+        </p:nvSpPr>
+        <p:spPr>
+          <a:xfrm>
+            <a:off x="37800000" y="11754000"/>
+            <a:ext cx="5400000" cy="54000"/>
           </a:xfrm>
           <a:prstGeom prst="rect">
             <a:avLst/>
@@ -8099,14 +7271,14 @@
       </p:sp>
       <p:sp>
         <p:nvSpPr>
-          <p:cNvPr id="67" name="名牌7"/>
+          <p:cNvPr id="49" name="名牌7"/>
           <p:cNvSpPr txBox="1"/>
           <p:nvPr/>
         </p:nvSpPr>
         <p:spPr>
           <a:xfrm>
-            <a:off x="37620000" y="9504000"/>
-            <a:ext cx="5220000" cy="1134000"/>
+            <a:off x="37800000" y="11808000"/>
+            <a:ext cx="5400000" cy="1494000"/>
           </a:xfrm>
           <a:prstGeom prst="rect">
             <a:avLst/>
@@ -8121,7 +7293,7 @@
           <a:p>
             <a:pPr algn="ctr"/>
             <a:r>
-              <a:rPr sz="4535" b="1">
+              <a:rPr sz="5669" b="1">
                 <a:solidFill>
                   <a:srgbClr val="FFD27A"/>
                 </a:solidFill>
@@ -8134,7 +7306,7 @@
           <a:p>
             <a:pPr algn="ctr"/>
             <a:r>
-              <a:rPr sz="2692" b="0">
+              <a:rPr sz="3259" b="0">
                 <a:solidFill>
                   <a:srgbClr val="FFF1D6"/>
                 </a:solidFill>
@@ -8148,145 +7320,7 @@
       </p:sp>
       <p:sp>
         <p:nvSpPr>
-          <p:cNvPr id="68" name="文字框7"/>
-          <p:cNvSpPr/>
-          <p:nvPr/>
-        </p:nvSpPr>
-        <p:spPr>
-          <a:xfrm>
-            <a:off x="37530000" y="10980000"/>
-            <a:ext cx="5400000" cy="5850000"/>
-          </a:xfrm>
-          <a:prstGeom prst="roundRect">
-            <a:avLst>
-              <a:gd name="adj" fmla="val 4000"/>
-            </a:avLst>
-          </a:prstGeom>
-          <a:gradFill rotWithShape="1">
-            <a:gsLst>
-              <a:gs pos="0">
-                <a:srgbClr val="FFFDF7"/>
-              </a:gs>
-              <a:gs pos="100000">
-                <a:srgbClr val="FBF1DC"/>
-              </a:gs>
-            </a:gsLst>
-            <a:lin ang="5400000" scaled="0"/>
-          </a:gradFill>
-          <a:ln w="36000">
-            <a:solidFill>
-              <a:srgbClr val="E9C46A"/>
-            </a:solidFill>
-          </a:ln>
-        </p:spPr>
-        <p:txBody>
-          <a:bodyPr rtlCol="0" anchor="ctr"/>
-          <a:lstStyle/>
-          <a:p>
-            <a:pPr algn="ctr"/>
-          </a:p>
-        </p:txBody>
-      </p:sp>
-      <p:sp>
-        <p:nvSpPr>
-          <p:cNvPr id="69" name="文字框饰条7"/>
-          <p:cNvSpPr/>
-          <p:nvPr/>
-        </p:nvSpPr>
-        <p:spPr>
-          <a:xfrm>
-            <a:off x="37746000" y="16578000"/>
-            <a:ext cx="4968000" cy="90000"/>
-          </a:xfrm>
-          <a:prstGeom prst="rect">
-            <a:avLst/>
-          </a:prstGeom>
-          <a:gradFill rotWithShape="1">
-            <a:gsLst>
-              <a:gs pos="0">
-                <a:srgbClr val="C8161D"/>
-              </a:gs>
-              <a:gs pos="60000">
-                <a:srgbClr val="E0A43A"/>
-              </a:gs>
-              <a:gs pos="100000">
-                <a:srgbClr val="FFD27A"/>
-              </a:gs>
-            </a:gsLst>
-            <a:lin ang="0" scaled="0"/>
-          </a:gradFill>
-          <a:ln>
-            <a:noFill/>
-          </a:ln>
-        </p:spPr>
-        <p:txBody>
-          <a:bodyPr rtlCol="0" anchor="ctr"/>
-          <a:lstStyle/>
-          <a:p>
-            <a:pPr algn="ctr"/>
-          </a:p>
-        </p:txBody>
-      </p:sp>
-      <p:sp>
-        <p:nvSpPr>
-          <p:cNvPr id="70" name="文字7"/>
-          <p:cNvSpPr txBox="1"/>
-          <p:nvPr/>
-        </p:nvSpPr>
-        <p:spPr>
-          <a:xfrm>
-            <a:off x="37818000" y="11232000"/>
-            <a:ext cx="4824000" cy="5130000"/>
-          </a:xfrm>
-          <a:prstGeom prst="rect">
-            <a:avLst/>
-          </a:prstGeom>
-          <a:noFill/>
-        </p:spPr>
-        <p:txBody>
-          <a:bodyPr wrap="square" lIns="0" rIns="0" tIns="0" bIns="0" anchor="t">
-            <a:noAutofit/>
-          </a:bodyPr>
-          <a:lstStyle/>
-          <a:p>
-            <a:pPr algn="just">
-              <a:lnSpc>
-                <a:spcPts val="3401"/>
-              </a:lnSpc>
-            </a:pPr>
-            <a:r>
-              <a:rPr sz="2267" b="1">
-                <a:solidFill>
-                  <a:srgbClr val="B8121A"/>
-                </a:solidFill>
-                <a:latin typeface="Microsoft YaHei"/>
-                <a:ea typeface="微软雅黑"/>
-              </a:rPr>
-              <a:t>“及时识别放射性废物包装剂量率测量错误的安全隐患”</a:t>
-            </a:r>
-          </a:p>
-          <a:p>
-            <a:pPr algn="just" marL="0" indent="576000">
-              <a:lnSpc>
-                <a:spcPts val="3401"/>
-              </a:lnSpc>
-            </a:pPr>
-            <a:r>
-              <a:rPr sz="2267" b="0">
-                <a:solidFill>
-                  <a:srgbClr val="3A2A1A"/>
-                </a:solidFill>
-                <a:latin typeface="Microsoft YaHei"/>
-                <a:ea typeface="微软雅黑"/>
-              </a:rPr>
-              <a:t>成鹏飞及时识别放射性废物包装剂量率测量错误的安全隐患。成鹏飞日常工作中坚持以质疑的工作态度和严慎细实的工作方法对待每项任务，始终将“安全第一、质量第一”的安全理念落到实处。他以高度责任心和专业技能，体现了公司对核安全的高度重视，为全体员工树立了行为标杆。</a:t>
-            </a:r>
-          </a:p>
-        </p:txBody>
-      </p:sp>
-      <p:sp>
-        <p:nvSpPr>
-          <p:cNvPr id="71" name="热区7">
+          <p:cNvPr id="50" name="热区7">
             <a:hlinkClick action="ppaction://hlinksldjump" r:id="rId15"/>
           </p:cNvPr>
           <p:cNvSpPr/>
@@ -8294,8 +7328,8 @@
         </p:nvSpPr>
         <p:spPr>
           <a:xfrm>
-            <a:off x="37530000" y="5400000"/>
-            <a:ext cx="5400000" cy="11430000"/>
+            <a:off x="37710000" y="7560000"/>
+            <a:ext cx="5580000" cy="5832000"/>
           </a:xfrm>
           <a:prstGeom prst="rect">
             <a:avLst/>
@@ -8319,18 +7353,18 @@
       </p:sp>
       <p:sp>
         <p:nvSpPr>
-          <p:cNvPr id="72" name="卡框8"/>
-          <p:cNvSpPr/>
-          <p:nvPr/>
-        </p:nvSpPr>
-        <p:spPr>
-          <a:xfrm>
-            <a:off x="43542000" y="5400000"/>
-            <a:ext cx="5400000" cy="5328000"/>
+          <p:cNvPr id="51" name="卡框8"/>
+          <p:cNvSpPr/>
+          <p:nvPr/>
+        </p:nvSpPr>
+        <p:spPr>
+          <a:xfrm>
+            <a:off x="43830000" y="7560000"/>
+            <a:ext cx="5580000" cy="5832000"/>
           </a:xfrm>
           <a:prstGeom prst="roundRect">
             <a:avLst>
-              <a:gd name="adj" fmla="val 4054"/>
+              <a:gd name="adj" fmla="val 3870"/>
             </a:avLst>
           </a:prstGeom>
           <a:gradFill rotWithShape="1">
@@ -8367,14 +7401,14 @@
       </p:sp>
       <p:sp>
         <p:nvSpPr>
-          <p:cNvPr id="73" name="衬纸8"/>
-          <p:cNvSpPr/>
-          <p:nvPr/>
-        </p:nvSpPr>
-        <p:spPr>
-          <a:xfrm>
-            <a:off x="43632000" y="5490000"/>
-            <a:ext cx="5220000" cy="3960000"/>
+          <p:cNvPr id="52" name="衬纸8"/>
+          <p:cNvSpPr/>
+          <p:nvPr/>
+        </p:nvSpPr>
+        <p:spPr>
+          <a:xfrm>
+            <a:off x="43920000" y="7650000"/>
+            <a:ext cx="5400000" cy="4104000"/>
           </a:xfrm>
           <a:prstGeom prst="rect">
             <a:avLst/>
@@ -8396,7 +7430,7 @@
       </p:sp>
       <p:pic>
         <p:nvPicPr>
-          <p:cNvPr id="74" name="!!p8" descr="image.jpg"/>
+          <p:cNvPr id="53" name="!!p8" descr="image.jpg"/>
           <p:cNvPicPr>
             <a:picLocks noChangeAspect="1"/>
           </p:cNvPicPr>
@@ -8411,8 +7445,8 @@
         </p:blipFill>
         <p:spPr>
           <a:xfrm>
-            <a:off x="43722000" y="5580000"/>
-            <a:ext cx="5040000" cy="3780000"/>
+            <a:off x="44010000" y="7740000"/>
+            <a:ext cx="5220000" cy="3924000"/>
           </a:xfrm>
           <a:prstGeom prst="rect">
             <a:avLst/>
@@ -8421,14 +7455,14 @@
       </p:pic>
       <p:sp>
         <p:nvSpPr>
-          <p:cNvPr id="75" name="名牌底8"/>
-          <p:cNvSpPr/>
-          <p:nvPr/>
-        </p:nvSpPr>
-        <p:spPr>
-          <a:xfrm>
-            <a:off x="43632000" y="9450000"/>
-            <a:ext cx="5220000" cy="1188000"/>
+          <p:cNvPr id="54" name="名牌底8"/>
+          <p:cNvSpPr/>
+          <p:nvPr/>
+        </p:nvSpPr>
+        <p:spPr>
+          <a:xfrm>
+            <a:off x="43920000" y="11754000"/>
+            <a:ext cx="5400000" cy="1548000"/>
           </a:xfrm>
           <a:prstGeom prst="rect">
             <a:avLst/>
@@ -8458,14 +7492,14 @@
       </p:sp>
       <p:sp>
         <p:nvSpPr>
-          <p:cNvPr id="76" name="名牌金线8"/>
-          <p:cNvSpPr/>
-          <p:nvPr/>
-        </p:nvSpPr>
-        <p:spPr>
-          <a:xfrm>
-            <a:off x="43632000" y="9450000"/>
-            <a:ext cx="5220000" cy="54000"/>
+          <p:cNvPr id="55" name="名牌金线8"/>
+          <p:cNvSpPr/>
+          <p:nvPr/>
+        </p:nvSpPr>
+        <p:spPr>
+          <a:xfrm>
+            <a:off x="43920000" y="11754000"/>
+            <a:ext cx="5400000" cy="54000"/>
           </a:xfrm>
           <a:prstGeom prst="rect">
             <a:avLst/>
@@ -8487,14 +7521,14 @@
       </p:sp>
       <p:sp>
         <p:nvSpPr>
-          <p:cNvPr id="77" name="名牌8"/>
+          <p:cNvPr id="56" name="名牌8"/>
           <p:cNvSpPr txBox="1"/>
           <p:nvPr/>
         </p:nvSpPr>
         <p:spPr>
           <a:xfrm>
-            <a:off x="43632000" y="9504000"/>
-            <a:ext cx="5220000" cy="1134000"/>
+            <a:off x="43920000" y="11808000"/>
+            <a:ext cx="5400000" cy="1494000"/>
           </a:xfrm>
           <a:prstGeom prst="rect">
             <a:avLst/>
@@ -8509,7 +7543,7 @@
           <a:p>
             <a:pPr algn="ctr"/>
             <a:r>
-              <a:rPr sz="4535" b="1">
+              <a:rPr sz="5669" b="1">
                 <a:solidFill>
                   <a:srgbClr val="FFD27A"/>
                 </a:solidFill>
@@ -8522,7 +7556,7 @@
           <a:p>
             <a:pPr algn="ctr"/>
             <a:r>
-              <a:rPr sz="2692" b="0">
+              <a:rPr sz="3259" b="0">
                 <a:solidFill>
                   <a:srgbClr val="FFF1D6"/>
                 </a:solidFill>
@@ -8536,145 +7570,7 @@
       </p:sp>
       <p:sp>
         <p:nvSpPr>
-          <p:cNvPr id="78" name="文字框8"/>
-          <p:cNvSpPr/>
-          <p:nvPr/>
-        </p:nvSpPr>
-        <p:spPr>
-          <a:xfrm>
-            <a:off x="43542000" y="10980000"/>
-            <a:ext cx="5400000" cy="5850000"/>
-          </a:xfrm>
-          <a:prstGeom prst="roundRect">
-            <a:avLst>
-              <a:gd name="adj" fmla="val 4000"/>
-            </a:avLst>
-          </a:prstGeom>
-          <a:gradFill rotWithShape="1">
-            <a:gsLst>
-              <a:gs pos="0">
-                <a:srgbClr val="FFFDF7"/>
-              </a:gs>
-              <a:gs pos="100000">
-                <a:srgbClr val="FBF1DC"/>
-              </a:gs>
-            </a:gsLst>
-            <a:lin ang="5400000" scaled="0"/>
-          </a:gradFill>
-          <a:ln w="36000">
-            <a:solidFill>
-              <a:srgbClr val="E9C46A"/>
-            </a:solidFill>
-          </a:ln>
-        </p:spPr>
-        <p:txBody>
-          <a:bodyPr rtlCol="0" anchor="ctr"/>
-          <a:lstStyle/>
-          <a:p>
-            <a:pPr algn="ctr"/>
-          </a:p>
-        </p:txBody>
-      </p:sp>
-      <p:sp>
-        <p:nvSpPr>
-          <p:cNvPr id="79" name="文字框饰条8"/>
-          <p:cNvSpPr/>
-          <p:nvPr/>
-        </p:nvSpPr>
-        <p:spPr>
-          <a:xfrm>
-            <a:off x="43758000" y="16578000"/>
-            <a:ext cx="4968000" cy="90000"/>
-          </a:xfrm>
-          <a:prstGeom prst="rect">
-            <a:avLst/>
-          </a:prstGeom>
-          <a:gradFill rotWithShape="1">
-            <a:gsLst>
-              <a:gs pos="0">
-                <a:srgbClr val="C8161D"/>
-              </a:gs>
-              <a:gs pos="60000">
-                <a:srgbClr val="E0A43A"/>
-              </a:gs>
-              <a:gs pos="100000">
-                <a:srgbClr val="FFD27A"/>
-              </a:gs>
-            </a:gsLst>
-            <a:lin ang="0" scaled="0"/>
-          </a:gradFill>
-          <a:ln>
-            <a:noFill/>
-          </a:ln>
-        </p:spPr>
-        <p:txBody>
-          <a:bodyPr rtlCol="0" anchor="ctr"/>
-          <a:lstStyle/>
-          <a:p>
-            <a:pPr algn="ctr"/>
-          </a:p>
-        </p:txBody>
-      </p:sp>
-      <p:sp>
-        <p:nvSpPr>
-          <p:cNvPr id="80" name="文字8"/>
-          <p:cNvSpPr txBox="1"/>
-          <p:nvPr/>
-        </p:nvSpPr>
-        <p:spPr>
-          <a:xfrm>
-            <a:off x="43830000" y="11232000"/>
-            <a:ext cx="4824000" cy="5130000"/>
-          </a:xfrm>
-          <a:prstGeom prst="rect">
-            <a:avLst/>
-          </a:prstGeom>
-          <a:noFill/>
-        </p:spPr>
-        <p:txBody>
-          <a:bodyPr wrap="square" lIns="0" rIns="0" tIns="0" bIns="0" anchor="t">
-            <a:noAutofit/>
-          </a:bodyPr>
-          <a:lstStyle/>
-          <a:p>
-            <a:pPr algn="just">
-              <a:lnSpc>
-                <a:spcPts val="3614"/>
-              </a:lnSpc>
-            </a:pPr>
-            <a:r>
-              <a:rPr sz="2409" b="1">
-                <a:solidFill>
-                  <a:srgbClr val="B8121A"/>
-                </a:solidFill>
-                <a:latin typeface="Microsoft YaHei"/>
-                <a:ea typeface="微软雅黑"/>
-              </a:rPr>
-              <a:t>“深入思考，充分质疑，消除主给水泵安全隐患”</a:t>
-            </a:r>
-          </a:p>
-          <a:p>
-            <a:pPr algn="just" marL="0" indent="612000">
-              <a:lnSpc>
-                <a:spcPts val="3614"/>
-              </a:lnSpc>
-            </a:pPr>
-            <a:r>
-              <a:rPr sz="2409" b="0">
-                <a:solidFill>
-                  <a:srgbClr val="3A2A1A"/>
-                </a:solidFill>
-                <a:latin typeface="Microsoft YaHei"/>
-                <a:ea typeface="微软雅黑"/>
-              </a:rPr>
-              <a:t>何韶然深入思考，充分质疑，消除主给水泵安全隐患。何韶然不轻易放过任何隐患，不盲目接受现有逻辑设计，在发现调试机组存在隐患后主动反馈一期生产机组，实现了运行经验指导调试和调试经验反哺运行的双向联动，用实际行动践行了核安全文化核心理念。</a:t>
-            </a:r>
-          </a:p>
-        </p:txBody>
-      </p:sp>
-      <p:sp>
-        <p:nvSpPr>
-          <p:cNvPr id="81" name="热区8">
+          <p:cNvPr id="57" name="热区8">
             <a:hlinkClick action="ppaction://hlinksldjump" r:id="rId17"/>
           </p:cNvPr>
           <p:cNvSpPr/>
@@ -8682,8 +7578,8 @@
         </p:nvSpPr>
         <p:spPr>
           <a:xfrm>
-            <a:off x="43542000" y="5400000"/>
-            <a:ext cx="5400000" cy="11430000"/>
+            <a:off x="43830000" y="7560000"/>
+            <a:ext cx="5580000" cy="5832000"/>
           </a:xfrm>
           <a:prstGeom prst="rect">
             <a:avLst/>
@@ -8707,7 +7603,7 @@
       </p:sp>
       <p:sp>
         <p:nvSpPr>
-          <p:cNvPr id="82" name="下一页底"/>
+          <p:cNvPr id="58" name="下一页底"/>
           <p:cNvSpPr/>
           <p:nvPr/>
         </p:nvSpPr>
@@ -8742,7 +7638,7 @@
       </p:sp>
       <p:sp>
         <p:nvSpPr>
-          <p:cNvPr id="83" name="下一页字"/>
+          <p:cNvPr id="59" name="下一页字"/>
           <p:cNvSpPr txBox="1"/>
           <p:nvPr/>
         </p:nvSpPr>
@@ -8778,7 +7674,7 @@
       </p:sp>
       <p:sp>
         <p:nvSpPr>
-          <p:cNvPr id="84" name="下一页">
+          <p:cNvPr id="60" name="下一页">
             <a:hlinkClick action="ppaction://hlinksldjump" r:id="rId18"/>
           </p:cNvPr>
           <p:cNvSpPr/>
@@ -8847,12 +7743,12 @@
         </p:nvSpPr>
         <p:spPr>
           <a:xfrm>
-            <a:off x="1458000" y="5400000"/>
-            <a:ext cx="5400000" cy="5328000"/>
+            <a:off x="990000" y="7560000"/>
+            <a:ext cx="5580000" cy="5832000"/>
           </a:xfrm>
           <a:prstGeom prst="roundRect">
             <a:avLst>
-              <a:gd name="adj" fmla="val 4054"/>
+              <a:gd name="adj" fmla="val 3870"/>
             </a:avLst>
           </a:prstGeom>
           <a:gradFill rotWithShape="1">
@@ -8895,8 +7791,8 @@
         </p:nvSpPr>
         <p:spPr>
           <a:xfrm>
-            <a:off x="1548000" y="5490000"/>
-            <a:ext cx="5220000" cy="3960000"/>
+            <a:off x="1080000" y="7650000"/>
+            <a:ext cx="5400000" cy="4104000"/>
           </a:xfrm>
           <a:prstGeom prst="rect">
             <a:avLst/>
@@ -8933,8 +7829,8 @@
         </p:blipFill>
         <p:spPr>
           <a:xfrm>
-            <a:off x="1638000" y="5580000"/>
-            <a:ext cx="5040000" cy="3780000"/>
+            <a:off x="1170000" y="7740000"/>
+            <a:ext cx="5220000" cy="3924000"/>
           </a:xfrm>
           <a:prstGeom prst="rect">
             <a:avLst/>
@@ -8949,8 +7845,8 @@
         </p:nvSpPr>
         <p:spPr>
           <a:xfrm>
-            <a:off x="1548000" y="9450000"/>
-            <a:ext cx="5220000" cy="1188000"/>
+            <a:off x="1080000" y="11754000"/>
+            <a:ext cx="5400000" cy="1548000"/>
           </a:xfrm>
           <a:prstGeom prst="rect">
             <a:avLst/>
@@ -8986,8 +7882,8 @@
         </p:nvSpPr>
         <p:spPr>
           <a:xfrm>
-            <a:off x="1548000" y="9450000"/>
-            <a:ext cx="5220000" cy="54000"/>
+            <a:off x="1080000" y="11754000"/>
+            <a:ext cx="5400000" cy="54000"/>
           </a:xfrm>
           <a:prstGeom prst="rect">
             <a:avLst/>
@@ -9015,8 +7911,8 @@
         </p:nvSpPr>
         <p:spPr>
           <a:xfrm>
-            <a:off x="1548000" y="9504000"/>
-            <a:ext cx="5220000" cy="1134000"/>
+            <a:off x="1080000" y="11808000"/>
+            <a:ext cx="5400000" cy="1494000"/>
           </a:xfrm>
           <a:prstGeom prst="rect">
             <a:avLst/>
@@ -9031,7 +7927,7 @@
           <a:p>
             <a:pPr algn="ctr"/>
             <a:r>
-              <a:rPr sz="4535" b="1">
+              <a:rPr sz="5669" b="1">
                 <a:solidFill>
                   <a:srgbClr val="FFD27A"/>
                 </a:solidFill>
@@ -9044,7 +7940,7 @@
           <a:p>
             <a:pPr algn="ctr"/>
             <a:r>
-              <a:rPr sz="2692" b="0">
+              <a:rPr sz="3259" b="0">
                 <a:solidFill>
                   <a:srgbClr val="FFF1D6"/>
                 </a:solidFill>
@@ -9058,128 +7954,7 @@
       </p:sp>
       <p:sp>
         <p:nvSpPr>
-          <p:cNvPr id="8" name="文字框9"/>
-          <p:cNvSpPr/>
-          <p:nvPr/>
-        </p:nvSpPr>
-        <p:spPr>
-          <a:xfrm>
-            <a:off x="1458000" y="10980000"/>
-            <a:ext cx="5400000" cy="5850000"/>
-          </a:xfrm>
-          <a:prstGeom prst="roundRect">
-            <a:avLst>
-              <a:gd name="adj" fmla="val 4000"/>
-            </a:avLst>
-          </a:prstGeom>
-          <a:gradFill rotWithShape="1">
-            <a:gsLst>
-              <a:gs pos="0">
-                <a:srgbClr val="FFFDF7"/>
-              </a:gs>
-              <a:gs pos="100000">
-                <a:srgbClr val="FBF1DC"/>
-              </a:gs>
-            </a:gsLst>
-            <a:lin ang="5400000" scaled="0"/>
-          </a:gradFill>
-          <a:ln w="36000">
-            <a:solidFill>
-              <a:srgbClr val="E9C46A"/>
-            </a:solidFill>
-          </a:ln>
-        </p:spPr>
-        <p:txBody>
-          <a:bodyPr rtlCol="0" anchor="ctr"/>
-          <a:lstStyle/>
-          <a:p>
-            <a:pPr algn="ctr"/>
-          </a:p>
-        </p:txBody>
-      </p:sp>
-      <p:sp>
-        <p:nvSpPr>
-          <p:cNvPr id="9" name="文字框饰条9"/>
-          <p:cNvSpPr/>
-          <p:nvPr/>
-        </p:nvSpPr>
-        <p:spPr>
-          <a:xfrm>
-            <a:off x="1674000" y="16578000"/>
-            <a:ext cx="4968000" cy="90000"/>
-          </a:xfrm>
-          <a:prstGeom prst="rect">
-            <a:avLst/>
-          </a:prstGeom>
-          <a:gradFill rotWithShape="1">
-            <a:gsLst>
-              <a:gs pos="0">
-                <a:srgbClr val="C8161D"/>
-              </a:gs>
-              <a:gs pos="60000">
-                <a:srgbClr val="E0A43A"/>
-              </a:gs>
-              <a:gs pos="100000">
-                <a:srgbClr val="FFD27A"/>
-              </a:gs>
-            </a:gsLst>
-            <a:lin ang="0" scaled="0"/>
-          </a:gradFill>
-          <a:ln>
-            <a:noFill/>
-          </a:ln>
-        </p:spPr>
-        <p:txBody>
-          <a:bodyPr rtlCol="0" anchor="ctr"/>
-          <a:lstStyle/>
-          <a:p>
-            <a:pPr algn="ctr"/>
-          </a:p>
-        </p:txBody>
-      </p:sp>
-      <p:sp>
-        <p:nvSpPr>
-          <p:cNvPr id="10" name="文字9"/>
-          <p:cNvSpPr txBox="1"/>
-          <p:nvPr/>
-        </p:nvSpPr>
-        <p:spPr>
-          <a:xfrm>
-            <a:off x="1746000" y="11232000"/>
-            <a:ext cx="4824000" cy="5130000"/>
-          </a:xfrm>
-          <a:prstGeom prst="rect">
-            <a:avLst/>
-          </a:prstGeom>
-          <a:noFill/>
-        </p:spPr>
-        <p:txBody>
-          <a:bodyPr wrap="square" lIns="0" rIns="0" tIns="0" bIns="0" anchor="ctr">
-            <a:noAutofit/>
-          </a:bodyPr>
-          <a:lstStyle/>
-          <a:p>
-            <a:pPr algn="ctr">
-              <a:lnSpc>
-                <a:spcPts val="4677"/>
-              </a:lnSpc>
-            </a:pPr>
-            <a:r>
-              <a:rPr sz="3118" b="0">
-                <a:solidFill>
-                  <a:srgbClr val="3A2A1A"/>
-                </a:solidFill>
-                <a:latin typeface="Microsoft YaHei"/>
-                <a:ea typeface="微软雅黑"/>
-              </a:rPr>
-              <a:t>正面行为介绍待补充。</a:t>
-            </a:r>
-          </a:p>
-        </p:txBody>
-      </p:sp>
-      <p:sp>
-        <p:nvSpPr>
-          <p:cNvPr id="11" name="热区9">
+          <p:cNvPr id="8" name="热区9">
             <a:hlinkClick action="ppaction://hlinksldjump" r:id="rId3"/>
           </p:cNvPr>
           <p:cNvSpPr/>
@@ -9187,8 +7962,8 @@
         </p:nvSpPr>
         <p:spPr>
           <a:xfrm>
-            <a:off x="1458000" y="5400000"/>
-            <a:ext cx="5400000" cy="11430000"/>
+            <a:off x="990000" y="7560000"/>
+            <a:ext cx="5580000" cy="5832000"/>
           </a:xfrm>
           <a:prstGeom prst="rect">
             <a:avLst/>
@@ -9212,18 +7987,18 @@
       </p:sp>
       <p:sp>
         <p:nvSpPr>
-          <p:cNvPr id="12" name="卡框10"/>
-          <p:cNvSpPr/>
-          <p:nvPr/>
-        </p:nvSpPr>
-        <p:spPr>
-          <a:xfrm>
-            <a:off x="7470000" y="5400000"/>
-            <a:ext cx="5400000" cy="5328000"/>
+          <p:cNvPr id="9" name="卡框10"/>
+          <p:cNvSpPr/>
+          <p:nvPr/>
+        </p:nvSpPr>
+        <p:spPr>
+          <a:xfrm>
+            <a:off x="7110000" y="7560000"/>
+            <a:ext cx="5580000" cy="5832000"/>
           </a:xfrm>
           <a:prstGeom prst="roundRect">
             <a:avLst>
-              <a:gd name="adj" fmla="val 4054"/>
+              <a:gd name="adj" fmla="val 3870"/>
             </a:avLst>
           </a:prstGeom>
           <a:gradFill rotWithShape="1">
@@ -9260,14 +8035,14 @@
       </p:sp>
       <p:sp>
         <p:nvSpPr>
-          <p:cNvPr id="13" name="衬纸10"/>
-          <p:cNvSpPr/>
-          <p:nvPr/>
-        </p:nvSpPr>
-        <p:spPr>
-          <a:xfrm>
-            <a:off x="7560000" y="5490000"/>
-            <a:ext cx="5220000" cy="3960000"/>
+          <p:cNvPr id="10" name="衬纸10"/>
+          <p:cNvSpPr/>
+          <p:nvPr/>
+        </p:nvSpPr>
+        <p:spPr>
+          <a:xfrm>
+            <a:off x="7200000" y="7650000"/>
+            <a:ext cx="5400000" cy="4104000"/>
           </a:xfrm>
           <a:prstGeom prst="rect">
             <a:avLst/>
@@ -9289,7 +8064,7 @@
       </p:sp>
       <p:pic>
         <p:nvPicPr>
-          <p:cNvPr id="14" name="!!p10" descr="image.jpg"/>
+          <p:cNvPr id="11" name="!!p10" descr="image.jpg"/>
           <p:cNvPicPr>
             <a:picLocks noChangeAspect="1"/>
           </p:cNvPicPr>
@@ -9304,8 +8079,8 @@
         </p:blipFill>
         <p:spPr>
           <a:xfrm>
-            <a:off x="7650000" y="5580000"/>
-            <a:ext cx="5040000" cy="3780000"/>
+            <a:off x="7290000" y="7740000"/>
+            <a:ext cx="5220000" cy="3924000"/>
           </a:xfrm>
           <a:prstGeom prst="rect">
             <a:avLst/>
@@ -9314,14 +8089,14 @@
       </p:pic>
       <p:sp>
         <p:nvSpPr>
-          <p:cNvPr id="15" name="名牌底10"/>
-          <p:cNvSpPr/>
-          <p:nvPr/>
-        </p:nvSpPr>
-        <p:spPr>
-          <a:xfrm>
-            <a:off x="7560000" y="9450000"/>
-            <a:ext cx="5220000" cy="1188000"/>
+          <p:cNvPr id="12" name="名牌底10"/>
+          <p:cNvSpPr/>
+          <p:nvPr/>
+        </p:nvSpPr>
+        <p:spPr>
+          <a:xfrm>
+            <a:off x="7200000" y="11754000"/>
+            <a:ext cx="5400000" cy="1548000"/>
           </a:xfrm>
           <a:prstGeom prst="rect">
             <a:avLst/>
@@ -9351,14 +8126,14 @@
       </p:sp>
       <p:sp>
         <p:nvSpPr>
-          <p:cNvPr id="16" name="名牌金线10"/>
-          <p:cNvSpPr/>
-          <p:nvPr/>
-        </p:nvSpPr>
-        <p:spPr>
-          <a:xfrm>
-            <a:off x="7560000" y="9450000"/>
-            <a:ext cx="5220000" cy="54000"/>
+          <p:cNvPr id="13" name="名牌金线10"/>
+          <p:cNvSpPr/>
+          <p:nvPr/>
+        </p:nvSpPr>
+        <p:spPr>
+          <a:xfrm>
+            <a:off x="7200000" y="11754000"/>
+            <a:ext cx="5400000" cy="54000"/>
           </a:xfrm>
           <a:prstGeom prst="rect">
             <a:avLst/>
@@ -9380,14 +8155,14 @@
       </p:sp>
       <p:sp>
         <p:nvSpPr>
-          <p:cNvPr id="17" name="名牌10"/>
+          <p:cNvPr id="14" name="名牌10"/>
           <p:cNvSpPr txBox="1"/>
           <p:nvPr/>
         </p:nvSpPr>
         <p:spPr>
           <a:xfrm>
-            <a:off x="7560000" y="9504000"/>
-            <a:ext cx="5220000" cy="1134000"/>
+            <a:off x="7200000" y="11808000"/>
+            <a:ext cx="5400000" cy="1494000"/>
           </a:xfrm>
           <a:prstGeom prst="rect">
             <a:avLst/>
@@ -9402,7 +8177,7 @@
           <a:p>
             <a:pPr algn="ctr"/>
             <a:r>
-              <a:rPr sz="4535" b="1">
+              <a:rPr sz="5669" b="1">
                 <a:solidFill>
                   <a:srgbClr val="FFD27A"/>
                 </a:solidFill>
@@ -9415,7 +8190,7 @@
           <a:p>
             <a:pPr algn="ctr"/>
             <a:r>
-              <a:rPr sz="2692" b="0">
+              <a:rPr sz="3259" b="0">
                 <a:solidFill>
                   <a:srgbClr val="FFF1D6"/>
                 </a:solidFill>
@@ -9429,128 +8204,7 @@
       </p:sp>
       <p:sp>
         <p:nvSpPr>
-          <p:cNvPr id="18" name="文字框10"/>
-          <p:cNvSpPr/>
-          <p:nvPr/>
-        </p:nvSpPr>
-        <p:spPr>
-          <a:xfrm>
-            <a:off x="7470000" y="10980000"/>
-            <a:ext cx="5400000" cy="5850000"/>
-          </a:xfrm>
-          <a:prstGeom prst="roundRect">
-            <a:avLst>
-              <a:gd name="adj" fmla="val 4000"/>
-            </a:avLst>
-          </a:prstGeom>
-          <a:gradFill rotWithShape="1">
-            <a:gsLst>
-              <a:gs pos="0">
-                <a:srgbClr val="FFFDF7"/>
-              </a:gs>
-              <a:gs pos="100000">
-                <a:srgbClr val="FBF1DC"/>
-              </a:gs>
-            </a:gsLst>
-            <a:lin ang="5400000" scaled="0"/>
-          </a:gradFill>
-          <a:ln w="36000">
-            <a:solidFill>
-              <a:srgbClr val="E9C46A"/>
-            </a:solidFill>
-          </a:ln>
-        </p:spPr>
-        <p:txBody>
-          <a:bodyPr rtlCol="0" anchor="ctr"/>
-          <a:lstStyle/>
-          <a:p>
-            <a:pPr algn="ctr"/>
-          </a:p>
-        </p:txBody>
-      </p:sp>
-      <p:sp>
-        <p:nvSpPr>
-          <p:cNvPr id="19" name="文字框饰条10"/>
-          <p:cNvSpPr/>
-          <p:nvPr/>
-        </p:nvSpPr>
-        <p:spPr>
-          <a:xfrm>
-            <a:off x="7686000" y="16578000"/>
-            <a:ext cx="4968000" cy="90000"/>
-          </a:xfrm>
-          <a:prstGeom prst="rect">
-            <a:avLst/>
-          </a:prstGeom>
-          <a:gradFill rotWithShape="1">
-            <a:gsLst>
-              <a:gs pos="0">
-                <a:srgbClr val="C8161D"/>
-              </a:gs>
-              <a:gs pos="60000">
-                <a:srgbClr val="E0A43A"/>
-              </a:gs>
-              <a:gs pos="100000">
-                <a:srgbClr val="FFD27A"/>
-              </a:gs>
-            </a:gsLst>
-            <a:lin ang="0" scaled="0"/>
-          </a:gradFill>
-          <a:ln>
-            <a:noFill/>
-          </a:ln>
-        </p:spPr>
-        <p:txBody>
-          <a:bodyPr rtlCol="0" anchor="ctr"/>
-          <a:lstStyle/>
-          <a:p>
-            <a:pPr algn="ctr"/>
-          </a:p>
-        </p:txBody>
-      </p:sp>
-      <p:sp>
-        <p:nvSpPr>
-          <p:cNvPr id="20" name="文字10"/>
-          <p:cNvSpPr txBox="1"/>
-          <p:nvPr/>
-        </p:nvSpPr>
-        <p:spPr>
-          <a:xfrm>
-            <a:off x="7758000" y="11232000"/>
-            <a:ext cx="4824000" cy="5130000"/>
-          </a:xfrm>
-          <a:prstGeom prst="rect">
-            <a:avLst/>
-          </a:prstGeom>
-          <a:noFill/>
-        </p:spPr>
-        <p:txBody>
-          <a:bodyPr wrap="square" lIns="0" rIns="0" tIns="0" bIns="0" anchor="ctr">
-            <a:noAutofit/>
-          </a:bodyPr>
-          <a:lstStyle/>
-          <a:p>
-            <a:pPr algn="ctr">
-              <a:lnSpc>
-                <a:spcPts val="4677"/>
-              </a:lnSpc>
-            </a:pPr>
-            <a:r>
-              <a:rPr sz="3118" b="0">
-                <a:solidFill>
-                  <a:srgbClr val="3A2A1A"/>
-                </a:solidFill>
-                <a:latin typeface="Microsoft YaHei"/>
-                <a:ea typeface="微软雅黑"/>
-              </a:rPr>
-              <a:t>正面行为介绍待补充。</a:t>
-            </a:r>
-          </a:p>
-        </p:txBody>
-      </p:sp>
-      <p:sp>
-        <p:nvSpPr>
-          <p:cNvPr id="21" name="热区10">
+          <p:cNvPr id="15" name="热区10">
             <a:hlinkClick action="ppaction://hlinksldjump" r:id="rId4"/>
           </p:cNvPr>
           <p:cNvSpPr/>
@@ -9558,8 +8212,8 @@
         </p:nvSpPr>
         <p:spPr>
           <a:xfrm>
-            <a:off x="7470000" y="5400000"/>
-            <a:ext cx="5400000" cy="11430000"/>
+            <a:off x="7110000" y="7560000"/>
+            <a:ext cx="5580000" cy="5832000"/>
           </a:xfrm>
           <a:prstGeom prst="rect">
             <a:avLst/>
@@ -9583,18 +8237,18 @@
       </p:sp>
       <p:sp>
         <p:nvSpPr>
-          <p:cNvPr id="22" name="卡框11"/>
-          <p:cNvSpPr/>
-          <p:nvPr/>
-        </p:nvSpPr>
-        <p:spPr>
-          <a:xfrm>
-            <a:off x="13482000" y="5400000"/>
-            <a:ext cx="5400000" cy="5328000"/>
+          <p:cNvPr id="16" name="卡框11"/>
+          <p:cNvSpPr/>
+          <p:nvPr/>
+        </p:nvSpPr>
+        <p:spPr>
+          <a:xfrm>
+            <a:off x="13230000" y="7560000"/>
+            <a:ext cx="5580000" cy="5832000"/>
           </a:xfrm>
           <a:prstGeom prst="roundRect">
             <a:avLst>
-              <a:gd name="adj" fmla="val 4054"/>
+              <a:gd name="adj" fmla="val 3870"/>
             </a:avLst>
           </a:prstGeom>
           <a:gradFill rotWithShape="1">
@@ -9631,14 +8285,14 @@
       </p:sp>
       <p:sp>
         <p:nvSpPr>
-          <p:cNvPr id="23" name="衬纸11"/>
-          <p:cNvSpPr/>
-          <p:nvPr/>
-        </p:nvSpPr>
-        <p:spPr>
-          <a:xfrm>
-            <a:off x="13572000" y="5490000"/>
-            <a:ext cx="5220000" cy="3960000"/>
+          <p:cNvPr id="17" name="衬纸11"/>
+          <p:cNvSpPr/>
+          <p:nvPr/>
+        </p:nvSpPr>
+        <p:spPr>
+          <a:xfrm>
+            <a:off x="13320000" y="7650000"/>
+            <a:ext cx="5400000" cy="4104000"/>
           </a:xfrm>
           <a:prstGeom prst="rect">
             <a:avLst/>
@@ -9660,7 +8314,7 @@
       </p:sp>
       <p:pic>
         <p:nvPicPr>
-          <p:cNvPr id="24" name="!!p11" descr="image.jpg"/>
+          <p:cNvPr id="18" name="!!p11" descr="image.jpg"/>
           <p:cNvPicPr>
             <a:picLocks noChangeAspect="1"/>
           </p:cNvPicPr>
@@ -9675,8 +8329,8 @@
         </p:blipFill>
         <p:spPr>
           <a:xfrm>
-            <a:off x="13662000" y="5580000"/>
-            <a:ext cx="5040000" cy="3780000"/>
+            <a:off x="13410000" y="7740000"/>
+            <a:ext cx="5220000" cy="3924000"/>
           </a:xfrm>
           <a:prstGeom prst="rect">
             <a:avLst/>
@@ -9685,14 +8339,14 @@
       </p:pic>
       <p:sp>
         <p:nvSpPr>
-          <p:cNvPr id="25" name="名牌底11"/>
-          <p:cNvSpPr/>
-          <p:nvPr/>
-        </p:nvSpPr>
-        <p:spPr>
-          <a:xfrm>
-            <a:off x="13572000" y="9450000"/>
-            <a:ext cx="5220000" cy="1188000"/>
+          <p:cNvPr id="19" name="名牌底11"/>
+          <p:cNvSpPr/>
+          <p:nvPr/>
+        </p:nvSpPr>
+        <p:spPr>
+          <a:xfrm>
+            <a:off x="13320000" y="11754000"/>
+            <a:ext cx="5400000" cy="1548000"/>
           </a:xfrm>
           <a:prstGeom prst="rect">
             <a:avLst/>
@@ -9722,14 +8376,14 @@
       </p:sp>
       <p:sp>
         <p:nvSpPr>
-          <p:cNvPr id="26" name="名牌金线11"/>
-          <p:cNvSpPr/>
-          <p:nvPr/>
-        </p:nvSpPr>
-        <p:spPr>
-          <a:xfrm>
-            <a:off x="13572000" y="9450000"/>
-            <a:ext cx="5220000" cy="54000"/>
+          <p:cNvPr id="20" name="名牌金线11"/>
+          <p:cNvSpPr/>
+          <p:nvPr/>
+        </p:nvSpPr>
+        <p:spPr>
+          <a:xfrm>
+            <a:off x="13320000" y="11754000"/>
+            <a:ext cx="5400000" cy="54000"/>
           </a:xfrm>
           <a:prstGeom prst="rect">
             <a:avLst/>
@@ -9751,14 +8405,14 @@
       </p:sp>
       <p:sp>
         <p:nvSpPr>
-          <p:cNvPr id="27" name="名牌11"/>
+          <p:cNvPr id="21" name="名牌11"/>
           <p:cNvSpPr txBox="1"/>
           <p:nvPr/>
         </p:nvSpPr>
         <p:spPr>
           <a:xfrm>
-            <a:off x="13572000" y="9504000"/>
-            <a:ext cx="5220000" cy="1134000"/>
+            <a:off x="13320000" y="11808000"/>
+            <a:ext cx="5400000" cy="1494000"/>
           </a:xfrm>
           <a:prstGeom prst="rect">
             <a:avLst/>
@@ -9773,7 +8427,7 @@
           <a:p>
             <a:pPr algn="ctr"/>
             <a:r>
-              <a:rPr sz="4535" b="1">
+              <a:rPr sz="5669" b="1">
                 <a:solidFill>
                   <a:srgbClr val="FFD27A"/>
                 </a:solidFill>
@@ -9786,7 +8440,7 @@
           <a:p>
             <a:pPr algn="ctr"/>
             <a:r>
-              <a:rPr sz="2692" b="0">
+              <a:rPr sz="3259" b="0">
                 <a:solidFill>
                   <a:srgbClr val="FFF1D6"/>
                 </a:solidFill>
@@ -9800,128 +8454,7 @@
       </p:sp>
       <p:sp>
         <p:nvSpPr>
-          <p:cNvPr id="28" name="文字框11"/>
-          <p:cNvSpPr/>
-          <p:nvPr/>
-        </p:nvSpPr>
-        <p:spPr>
-          <a:xfrm>
-            <a:off x="13482000" y="10980000"/>
-            <a:ext cx="5400000" cy="5850000"/>
-          </a:xfrm>
-          <a:prstGeom prst="roundRect">
-            <a:avLst>
-              <a:gd name="adj" fmla="val 4000"/>
-            </a:avLst>
-          </a:prstGeom>
-          <a:gradFill rotWithShape="1">
-            <a:gsLst>
-              <a:gs pos="0">
-                <a:srgbClr val="FFFDF7"/>
-              </a:gs>
-              <a:gs pos="100000">
-                <a:srgbClr val="FBF1DC"/>
-              </a:gs>
-            </a:gsLst>
-            <a:lin ang="5400000" scaled="0"/>
-          </a:gradFill>
-          <a:ln w="36000">
-            <a:solidFill>
-              <a:srgbClr val="E9C46A"/>
-            </a:solidFill>
-          </a:ln>
-        </p:spPr>
-        <p:txBody>
-          <a:bodyPr rtlCol="0" anchor="ctr"/>
-          <a:lstStyle/>
-          <a:p>
-            <a:pPr algn="ctr"/>
-          </a:p>
-        </p:txBody>
-      </p:sp>
-      <p:sp>
-        <p:nvSpPr>
-          <p:cNvPr id="29" name="文字框饰条11"/>
-          <p:cNvSpPr/>
-          <p:nvPr/>
-        </p:nvSpPr>
-        <p:spPr>
-          <a:xfrm>
-            <a:off x="13698000" y="16578000"/>
-            <a:ext cx="4968000" cy="90000"/>
-          </a:xfrm>
-          <a:prstGeom prst="rect">
-            <a:avLst/>
-          </a:prstGeom>
-          <a:gradFill rotWithShape="1">
-            <a:gsLst>
-              <a:gs pos="0">
-                <a:srgbClr val="C8161D"/>
-              </a:gs>
-              <a:gs pos="60000">
-                <a:srgbClr val="E0A43A"/>
-              </a:gs>
-              <a:gs pos="100000">
-                <a:srgbClr val="FFD27A"/>
-              </a:gs>
-            </a:gsLst>
-            <a:lin ang="0" scaled="0"/>
-          </a:gradFill>
-          <a:ln>
-            <a:noFill/>
-          </a:ln>
-        </p:spPr>
-        <p:txBody>
-          <a:bodyPr rtlCol="0" anchor="ctr"/>
-          <a:lstStyle/>
-          <a:p>
-            <a:pPr algn="ctr"/>
-          </a:p>
-        </p:txBody>
-      </p:sp>
-      <p:sp>
-        <p:nvSpPr>
-          <p:cNvPr id="30" name="文字11"/>
-          <p:cNvSpPr txBox="1"/>
-          <p:nvPr/>
-        </p:nvSpPr>
-        <p:spPr>
-          <a:xfrm>
-            <a:off x="13770000" y="11232000"/>
-            <a:ext cx="4824000" cy="5130000"/>
-          </a:xfrm>
-          <a:prstGeom prst="rect">
-            <a:avLst/>
-          </a:prstGeom>
-          <a:noFill/>
-        </p:spPr>
-        <p:txBody>
-          <a:bodyPr wrap="square" lIns="0" rIns="0" tIns="0" bIns="0" anchor="ctr">
-            <a:noAutofit/>
-          </a:bodyPr>
-          <a:lstStyle/>
-          <a:p>
-            <a:pPr algn="ctr">
-              <a:lnSpc>
-                <a:spcPts val="4677"/>
-              </a:lnSpc>
-            </a:pPr>
-            <a:r>
-              <a:rPr sz="3118" b="0">
-                <a:solidFill>
-                  <a:srgbClr val="3A2A1A"/>
-                </a:solidFill>
-                <a:latin typeface="Microsoft YaHei"/>
-                <a:ea typeface="微软雅黑"/>
-              </a:rPr>
-              <a:t>正面行为介绍待补充。</a:t>
-            </a:r>
-          </a:p>
-        </p:txBody>
-      </p:sp>
-      <p:sp>
-        <p:nvSpPr>
-          <p:cNvPr id="31" name="热区11">
+          <p:cNvPr id="22" name="热区11">
             <a:hlinkClick action="ppaction://hlinksldjump" r:id="rId5"/>
           </p:cNvPr>
           <p:cNvSpPr/>
@@ -9929,8 +8462,8 @@
         </p:nvSpPr>
         <p:spPr>
           <a:xfrm>
-            <a:off x="13482000" y="5400000"/>
-            <a:ext cx="5400000" cy="11430000"/>
+            <a:off x="13230000" y="7560000"/>
+            <a:ext cx="5580000" cy="5832000"/>
           </a:xfrm>
           <a:prstGeom prst="rect">
             <a:avLst/>
@@ -9954,18 +8487,18 @@
       </p:sp>
       <p:sp>
         <p:nvSpPr>
-          <p:cNvPr id="32" name="卡框12"/>
-          <p:cNvSpPr/>
-          <p:nvPr/>
-        </p:nvSpPr>
-        <p:spPr>
-          <a:xfrm>
-            <a:off x="19494000" y="5400000"/>
-            <a:ext cx="5400000" cy="5328000"/>
+          <p:cNvPr id="23" name="卡框12"/>
+          <p:cNvSpPr/>
+          <p:nvPr/>
+        </p:nvSpPr>
+        <p:spPr>
+          <a:xfrm>
+            <a:off x="19350000" y="7560000"/>
+            <a:ext cx="5580000" cy="5832000"/>
           </a:xfrm>
           <a:prstGeom prst="roundRect">
             <a:avLst>
-              <a:gd name="adj" fmla="val 4054"/>
+              <a:gd name="adj" fmla="val 3870"/>
             </a:avLst>
           </a:prstGeom>
           <a:gradFill rotWithShape="1">
@@ -10002,14 +8535,14 @@
       </p:sp>
       <p:sp>
         <p:nvSpPr>
-          <p:cNvPr id="33" name="衬纸12"/>
-          <p:cNvSpPr/>
-          <p:nvPr/>
-        </p:nvSpPr>
-        <p:spPr>
-          <a:xfrm>
-            <a:off x="19584000" y="5490000"/>
-            <a:ext cx="5220000" cy="3960000"/>
+          <p:cNvPr id="24" name="衬纸12"/>
+          <p:cNvSpPr/>
+          <p:nvPr/>
+        </p:nvSpPr>
+        <p:spPr>
+          <a:xfrm>
+            <a:off x="19440000" y="7650000"/>
+            <a:ext cx="5400000" cy="4104000"/>
           </a:xfrm>
           <a:prstGeom prst="rect">
             <a:avLst/>
@@ -10031,7 +8564,7 @@
       </p:sp>
       <p:pic>
         <p:nvPicPr>
-          <p:cNvPr id="34" name="!!p12" descr="image.jpg"/>
+          <p:cNvPr id="25" name="!!p12" descr="image.jpg"/>
           <p:cNvPicPr>
             <a:picLocks noChangeAspect="1"/>
           </p:cNvPicPr>
@@ -10046,8 +8579,8 @@
         </p:blipFill>
         <p:spPr>
           <a:xfrm>
-            <a:off x="19674000" y="5580000"/>
-            <a:ext cx="5040000" cy="3780000"/>
+            <a:off x="19530000" y="7740000"/>
+            <a:ext cx="5220000" cy="3924000"/>
           </a:xfrm>
           <a:prstGeom prst="rect">
             <a:avLst/>
@@ -10056,14 +8589,14 @@
       </p:pic>
       <p:sp>
         <p:nvSpPr>
-          <p:cNvPr id="35" name="名牌底12"/>
-          <p:cNvSpPr/>
-          <p:nvPr/>
-        </p:nvSpPr>
-        <p:spPr>
-          <a:xfrm>
-            <a:off x="19584000" y="9450000"/>
-            <a:ext cx="5220000" cy="1188000"/>
+          <p:cNvPr id="26" name="名牌底12"/>
+          <p:cNvSpPr/>
+          <p:nvPr/>
+        </p:nvSpPr>
+        <p:spPr>
+          <a:xfrm>
+            <a:off x="19440000" y="11754000"/>
+            <a:ext cx="5400000" cy="1548000"/>
           </a:xfrm>
           <a:prstGeom prst="rect">
             <a:avLst/>
@@ -10093,14 +8626,14 @@
       </p:sp>
       <p:sp>
         <p:nvSpPr>
-          <p:cNvPr id="36" name="名牌金线12"/>
-          <p:cNvSpPr/>
-          <p:nvPr/>
-        </p:nvSpPr>
-        <p:spPr>
-          <a:xfrm>
-            <a:off x="19584000" y="9450000"/>
-            <a:ext cx="5220000" cy="54000"/>
+          <p:cNvPr id="27" name="名牌金线12"/>
+          <p:cNvSpPr/>
+          <p:nvPr/>
+        </p:nvSpPr>
+        <p:spPr>
+          <a:xfrm>
+            <a:off x="19440000" y="11754000"/>
+            <a:ext cx="5400000" cy="54000"/>
           </a:xfrm>
           <a:prstGeom prst="rect">
             <a:avLst/>
@@ -10122,14 +8655,14 @@
       </p:sp>
       <p:sp>
         <p:nvSpPr>
-          <p:cNvPr id="37" name="名牌12"/>
+          <p:cNvPr id="28" name="名牌12"/>
           <p:cNvSpPr txBox="1"/>
           <p:nvPr/>
         </p:nvSpPr>
         <p:spPr>
           <a:xfrm>
-            <a:off x="19584000" y="9504000"/>
-            <a:ext cx="5220000" cy="1134000"/>
+            <a:off x="19440000" y="11808000"/>
+            <a:ext cx="5400000" cy="1494000"/>
           </a:xfrm>
           <a:prstGeom prst="rect">
             <a:avLst/>
@@ -10144,7 +8677,7 @@
           <a:p>
             <a:pPr algn="ctr"/>
             <a:r>
-              <a:rPr sz="4535" b="1">
+              <a:rPr sz="5669" b="1">
                 <a:solidFill>
                   <a:srgbClr val="FFD27A"/>
                 </a:solidFill>
@@ -10157,7 +8690,7 @@
           <a:p>
             <a:pPr algn="ctr"/>
             <a:r>
-              <a:rPr sz="2692" b="0">
+              <a:rPr sz="3259" b="0">
                 <a:solidFill>
                   <a:srgbClr val="FFF1D6"/>
                 </a:solidFill>
@@ -10171,128 +8704,7 @@
       </p:sp>
       <p:sp>
         <p:nvSpPr>
-          <p:cNvPr id="38" name="文字框12"/>
-          <p:cNvSpPr/>
-          <p:nvPr/>
-        </p:nvSpPr>
-        <p:spPr>
-          <a:xfrm>
-            <a:off x="19494000" y="10980000"/>
-            <a:ext cx="5400000" cy="5850000"/>
-          </a:xfrm>
-          <a:prstGeom prst="roundRect">
-            <a:avLst>
-              <a:gd name="adj" fmla="val 4000"/>
-            </a:avLst>
-          </a:prstGeom>
-          <a:gradFill rotWithShape="1">
-            <a:gsLst>
-              <a:gs pos="0">
-                <a:srgbClr val="FFFDF7"/>
-              </a:gs>
-              <a:gs pos="100000">
-                <a:srgbClr val="FBF1DC"/>
-              </a:gs>
-            </a:gsLst>
-            <a:lin ang="5400000" scaled="0"/>
-          </a:gradFill>
-          <a:ln w="36000">
-            <a:solidFill>
-              <a:srgbClr val="E9C46A"/>
-            </a:solidFill>
-          </a:ln>
-        </p:spPr>
-        <p:txBody>
-          <a:bodyPr rtlCol="0" anchor="ctr"/>
-          <a:lstStyle/>
-          <a:p>
-            <a:pPr algn="ctr"/>
-          </a:p>
-        </p:txBody>
-      </p:sp>
-      <p:sp>
-        <p:nvSpPr>
-          <p:cNvPr id="39" name="文字框饰条12"/>
-          <p:cNvSpPr/>
-          <p:nvPr/>
-        </p:nvSpPr>
-        <p:spPr>
-          <a:xfrm>
-            <a:off x="19710000" y="16578000"/>
-            <a:ext cx="4968000" cy="90000"/>
-          </a:xfrm>
-          <a:prstGeom prst="rect">
-            <a:avLst/>
-          </a:prstGeom>
-          <a:gradFill rotWithShape="1">
-            <a:gsLst>
-              <a:gs pos="0">
-                <a:srgbClr val="C8161D"/>
-              </a:gs>
-              <a:gs pos="60000">
-                <a:srgbClr val="E0A43A"/>
-              </a:gs>
-              <a:gs pos="100000">
-                <a:srgbClr val="FFD27A"/>
-              </a:gs>
-            </a:gsLst>
-            <a:lin ang="0" scaled="0"/>
-          </a:gradFill>
-          <a:ln>
-            <a:noFill/>
-          </a:ln>
-        </p:spPr>
-        <p:txBody>
-          <a:bodyPr rtlCol="0" anchor="ctr"/>
-          <a:lstStyle/>
-          <a:p>
-            <a:pPr algn="ctr"/>
-          </a:p>
-        </p:txBody>
-      </p:sp>
-      <p:sp>
-        <p:nvSpPr>
-          <p:cNvPr id="40" name="文字12"/>
-          <p:cNvSpPr txBox="1"/>
-          <p:nvPr/>
-        </p:nvSpPr>
-        <p:spPr>
-          <a:xfrm>
-            <a:off x="19782000" y="11232000"/>
-            <a:ext cx="4824000" cy="5130000"/>
-          </a:xfrm>
-          <a:prstGeom prst="rect">
-            <a:avLst/>
-          </a:prstGeom>
-          <a:noFill/>
-        </p:spPr>
-        <p:txBody>
-          <a:bodyPr wrap="square" lIns="0" rIns="0" tIns="0" bIns="0" anchor="ctr">
-            <a:noAutofit/>
-          </a:bodyPr>
-          <a:lstStyle/>
-          <a:p>
-            <a:pPr algn="ctr">
-              <a:lnSpc>
-                <a:spcPts val="4677"/>
-              </a:lnSpc>
-            </a:pPr>
-            <a:r>
-              <a:rPr sz="3118" b="0">
-                <a:solidFill>
-                  <a:srgbClr val="3A2A1A"/>
-                </a:solidFill>
-                <a:latin typeface="Microsoft YaHei"/>
-                <a:ea typeface="微软雅黑"/>
-              </a:rPr>
-              <a:t>正面行为介绍待补充。</a:t>
-            </a:r>
-          </a:p>
-        </p:txBody>
-      </p:sp>
-      <p:sp>
-        <p:nvSpPr>
-          <p:cNvPr id="41" name="热区12">
+          <p:cNvPr id="29" name="热区12">
             <a:hlinkClick action="ppaction://hlinksldjump" r:id="rId6"/>
           </p:cNvPr>
           <p:cNvSpPr/>
@@ -10300,8 +8712,8 @@
         </p:nvSpPr>
         <p:spPr>
           <a:xfrm>
-            <a:off x="19494000" y="5400000"/>
-            <a:ext cx="5400000" cy="11430000"/>
+            <a:off x="19350000" y="7560000"/>
+            <a:ext cx="5580000" cy="5832000"/>
           </a:xfrm>
           <a:prstGeom prst="rect">
             <a:avLst/>
@@ -10325,18 +8737,18 @@
       </p:sp>
       <p:sp>
         <p:nvSpPr>
-          <p:cNvPr id="42" name="卡框13"/>
-          <p:cNvSpPr/>
-          <p:nvPr/>
-        </p:nvSpPr>
-        <p:spPr>
-          <a:xfrm>
-            <a:off x="25506000" y="5400000"/>
-            <a:ext cx="5400000" cy="5328000"/>
+          <p:cNvPr id="30" name="卡框13"/>
+          <p:cNvSpPr/>
+          <p:nvPr/>
+        </p:nvSpPr>
+        <p:spPr>
+          <a:xfrm>
+            <a:off x="25470000" y="7560000"/>
+            <a:ext cx="5580000" cy="5832000"/>
           </a:xfrm>
           <a:prstGeom prst="roundRect">
             <a:avLst>
-              <a:gd name="adj" fmla="val 4054"/>
+              <a:gd name="adj" fmla="val 3870"/>
             </a:avLst>
           </a:prstGeom>
           <a:gradFill rotWithShape="1">
@@ -10373,14 +8785,14 @@
       </p:sp>
       <p:sp>
         <p:nvSpPr>
-          <p:cNvPr id="43" name="衬纸13"/>
-          <p:cNvSpPr/>
-          <p:nvPr/>
-        </p:nvSpPr>
-        <p:spPr>
-          <a:xfrm>
-            <a:off x="25596000" y="5490000"/>
-            <a:ext cx="5220000" cy="3960000"/>
+          <p:cNvPr id="31" name="衬纸13"/>
+          <p:cNvSpPr/>
+          <p:nvPr/>
+        </p:nvSpPr>
+        <p:spPr>
+          <a:xfrm>
+            <a:off x="25560000" y="7650000"/>
+            <a:ext cx="5400000" cy="4104000"/>
           </a:xfrm>
           <a:prstGeom prst="rect">
             <a:avLst/>
@@ -10402,7 +8814,7 @@
       </p:sp>
       <p:pic>
         <p:nvPicPr>
-          <p:cNvPr id="44" name="!!p13" descr="image.jpg"/>
+          <p:cNvPr id="32" name="!!p13" descr="image.jpg"/>
           <p:cNvPicPr>
             <a:picLocks noChangeAspect="1"/>
           </p:cNvPicPr>
@@ -10417,8 +8829,8 @@
         </p:blipFill>
         <p:spPr>
           <a:xfrm>
-            <a:off x="25686000" y="5580000"/>
-            <a:ext cx="5040000" cy="3780000"/>
+            <a:off x="25650000" y="7740000"/>
+            <a:ext cx="5220000" cy="3924000"/>
           </a:xfrm>
           <a:prstGeom prst="rect">
             <a:avLst/>
@@ -10427,14 +8839,14 @@
       </p:pic>
       <p:sp>
         <p:nvSpPr>
-          <p:cNvPr id="45" name="名牌底13"/>
-          <p:cNvSpPr/>
-          <p:nvPr/>
-        </p:nvSpPr>
-        <p:spPr>
-          <a:xfrm>
-            <a:off x="25596000" y="9450000"/>
-            <a:ext cx="5220000" cy="1188000"/>
+          <p:cNvPr id="33" name="名牌底13"/>
+          <p:cNvSpPr/>
+          <p:nvPr/>
+        </p:nvSpPr>
+        <p:spPr>
+          <a:xfrm>
+            <a:off x="25560000" y="11754000"/>
+            <a:ext cx="5400000" cy="1548000"/>
           </a:xfrm>
           <a:prstGeom prst="rect">
             <a:avLst/>
@@ -10464,14 +8876,14 @@
       </p:sp>
       <p:sp>
         <p:nvSpPr>
-          <p:cNvPr id="46" name="名牌金线13"/>
-          <p:cNvSpPr/>
-          <p:nvPr/>
-        </p:nvSpPr>
-        <p:spPr>
-          <a:xfrm>
-            <a:off x="25596000" y="9450000"/>
-            <a:ext cx="5220000" cy="54000"/>
+          <p:cNvPr id="34" name="名牌金线13"/>
+          <p:cNvSpPr/>
+          <p:nvPr/>
+        </p:nvSpPr>
+        <p:spPr>
+          <a:xfrm>
+            <a:off x="25560000" y="11754000"/>
+            <a:ext cx="5400000" cy="54000"/>
           </a:xfrm>
           <a:prstGeom prst="rect">
             <a:avLst/>
@@ -10493,14 +8905,14 @@
       </p:sp>
       <p:sp>
         <p:nvSpPr>
-          <p:cNvPr id="47" name="名牌13"/>
+          <p:cNvPr id="35" name="名牌13"/>
           <p:cNvSpPr txBox="1"/>
           <p:nvPr/>
         </p:nvSpPr>
         <p:spPr>
           <a:xfrm>
-            <a:off x="25596000" y="9504000"/>
-            <a:ext cx="5220000" cy="1134000"/>
+            <a:off x="25560000" y="11808000"/>
+            <a:ext cx="5400000" cy="1494000"/>
           </a:xfrm>
           <a:prstGeom prst="rect">
             <a:avLst/>
@@ -10515,7 +8927,7 @@
           <a:p>
             <a:pPr algn="ctr"/>
             <a:r>
-              <a:rPr sz="4535" b="1">
+              <a:rPr sz="5669" b="1">
                 <a:solidFill>
                   <a:srgbClr val="FFD27A"/>
                 </a:solidFill>
@@ -10528,7 +8940,7 @@
           <a:p>
             <a:pPr algn="ctr"/>
             <a:r>
-              <a:rPr sz="2692" b="0">
+              <a:rPr sz="3259" b="0">
                 <a:solidFill>
                   <a:srgbClr val="FFF1D6"/>
                 </a:solidFill>
@@ -10542,128 +8954,7 @@
       </p:sp>
       <p:sp>
         <p:nvSpPr>
-          <p:cNvPr id="48" name="文字框13"/>
-          <p:cNvSpPr/>
-          <p:nvPr/>
-        </p:nvSpPr>
-        <p:spPr>
-          <a:xfrm>
-            <a:off x="25506000" y="10980000"/>
-            <a:ext cx="5400000" cy="5850000"/>
-          </a:xfrm>
-          <a:prstGeom prst="roundRect">
-            <a:avLst>
-              <a:gd name="adj" fmla="val 4000"/>
-            </a:avLst>
-          </a:prstGeom>
-          <a:gradFill rotWithShape="1">
-            <a:gsLst>
-              <a:gs pos="0">
-                <a:srgbClr val="FFFDF7"/>
-              </a:gs>
-              <a:gs pos="100000">
-                <a:srgbClr val="FBF1DC"/>
-              </a:gs>
-            </a:gsLst>
-            <a:lin ang="5400000" scaled="0"/>
-          </a:gradFill>
-          <a:ln w="36000">
-            <a:solidFill>
-              <a:srgbClr val="E9C46A"/>
-            </a:solidFill>
-          </a:ln>
-        </p:spPr>
-        <p:txBody>
-          <a:bodyPr rtlCol="0" anchor="ctr"/>
-          <a:lstStyle/>
-          <a:p>
-            <a:pPr algn="ctr"/>
-          </a:p>
-        </p:txBody>
-      </p:sp>
-      <p:sp>
-        <p:nvSpPr>
-          <p:cNvPr id="49" name="文字框饰条13"/>
-          <p:cNvSpPr/>
-          <p:nvPr/>
-        </p:nvSpPr>
-        <p:spPr>
-          <a:xfrm>
-            <a:off x="25722000" y="16578000"/>
-            <a:ext cx="4968000" cy="90000"/>
-          </a:xfrm>
-          <a:prstGeom prst="rect">
-            <a:avLst/>
-          </a:prstGeom>
-          <a:gradFill rotWithShape="1">
-            <a:gsLst>
-              <a:gs pos="0">
-                <a:srgbClr val="C8161D"/>
-              </a:gs>
-              <a:gs pos="60000">
-                <a:srgbClr val="E0A43A"/>
-              </a:gs>
-              <a:gs pos="100000">
-                <a:srgbClr val="FFD27A"/>
-              </a:gs>
-            </a:gsLst>
-            <a:lin ang="0" scaled="0"/>
-          </a:gradFill>
-          <a:ln>
-            <a:noFill/>
-          </a:ln>
-        </p:spPr>
-        <p:txBody>
-          <a:bodyPr rtlCol="0" anchor="ctr"/>
-          <a:lstStyle/>
-          <a:p>
-            <a:pPr algn="ctr"/>
-          </a:p>
-        </p:txBody>
-      </p:sp>
-      <p:sp>
-        <p:nvSpPr>
-          <p:cNvPr id="50" name="文字13"/>
-          <p:cNvSpPr txBox="1"/>
-          <p:nvPr/>
-        </p:nvSpPr>
-        <p:spPr>
-          <a:xfrm>
-            <a:off x="25794000" y="11232000"/>
-            <a:ext cx="4824000" cy="5130000"/>
-          </a:xfrm>
-          <a:prstGeom prst="rect">
-            <a:avLst/>
-          </a:prstGeom>
-          <a:noFill/>
-        </p:spPr>
-        <p:txBody>
-          <a:bodyPr wrap="square" lIns="0" rIns="0" tIns="0" bIns="0" anchor="ctr">
-            <a:noAutofit/>
-          </a:bodyPr>
-          <a:lstStyle/>
-          <a:p>
-            <a:pPr algn="ctr">
-              <a:lnSpc>
-                <a:spcPts val="4677"/>
-              </a:lnSpc>
-            </a:pPr>
-            <a:r>
-              <a:rPr sz="3118" b="0">
-                <a:solidFill>
-                  <a:srgbClr val="3A2A1A"/>
-                </a:solidFill>
-                <a:latin typeface="Microsoft YaHei"/>
-                <a:ea typeface="微软雅黑"/>
-              </a:rPr>
-              <a:t>正面行为介绍待补充。</a:t>
-            </a:r>
-          </a:p>
-        </p:txBody>
-      </p:sp>
-      <p:sp>
-        <p:nvSpPr>
-          <p:cNvPr id="51" name="热区13">
+          <p:cNvPr id="36" name="热区13">
             <a:hlinkClick action="ppaction://hlinksldjump" r:id="rId7"/>
           </p:cNvPr>
           <p:cNvSpPr/>
@@ -10671,8 +8962,8 @@
         </p:nvSpPr>
         <p:spPr>
           <a:xfrm>
-            <a:off x="25506000" y="5400000"/>
-            <a:ext cx="5400000" cy="11430000"/>
+            <a:off x="25470000" y="7560000"/>
+            <a:ext cx="5580000" cy="5832000"/>
           </a:xfrm>
           <a:prstGeom prst="rect">
             <a:avLst/>
@@ -10696,18 +8987,18 @@
       </p:sp>
       <p:sp>
         <p:nvSpPr>
-          <p:cNvPr id="52" name="卡框14"/>
-          <p:cNvSpPr/>
-          <p:nvPr/>
-        </p:nvSpPr>
-        <p:spPr>
-          <a:xfrm>
-            <a:off x="31518000" y="5400000"/>
-            <a:ext cx="5400000" cy="5328000"/>
+          <p:cNvPr id="37" name="卡框14"/>
+          <p:cNvSpPr/>
+          <p:nvPr/>
+        </p:nvSpPr>
+        <p:spPr>
+          <a:xfrm>
+            <a:off x="31590000" y="7560000"/>
+            <a:ext cx="5580000" cy="5832000"/>
           </a:xfrm>
           <a:prstGeom prst="roundRect">
             <a:avLst>
-              <a:gd name="adj" fmla="val 4054"/>
+              <a:gd name="adj" fmla="val 3870"/>
             </a:avLst>
           </a:prstGeom>
           <a:gradFill rotWithShape="1">
@@ -10744,14 +9035,14 @@
       </p:sp>
       <p:sp>
         <p:nvSpPr>
-          <p:cNvPr id="53" name="衬纸14"/>
-          <p:cNvSpPr/>
-          <p:nvPr/>
-        </p:nvSpPr>
-        <p:spPr>
-          <a:xfrm>
-            <a:off x="31608000" y="5490000"/>
-            <a:ext cx="5220000" cy="3960000"/>
+          <p:cNvPr id="38" name="衬纸14"/>
+          <p:cNvSpPr/>
+          <p:nvPr/>
+        </p:nvSpPr>
+        <p:spPr>
+          <a:xfrm>
+            <a:off x="31680000" y="7650000"/>
+            <a:ext cx="5400000" cy="4104000"/>
           </a:xfrm>
           <a:prstGeom prst="rect">
             <a:avLst/>
@@ -10773,7 +9064,7 @@
       </p:sp>
       <p:pic>
         <p:nvPicPr>
-          <p:cNvPr id="54" name="!!p14" descr="image.jpg"/>
+          <p:cNvPr id="39" name="!!p14" descr="image.jpg"/>
           <p:cNvPicPr>
             <a:picLocks noChangeAspect="1"/>
           </p:cNvPicPr>
@@ -10788,8 +9079,8 @@
         </p:blipFill>
         <p:spPr>
           <a:xfrm>
-            <a:off x="31698000" y="5580000"/>
-            <a:ext cx="5040000" cy="3780000"/>
+            <a:off x="31770000" y="7740000"/>
+            <a:ext cx="5220000" cy="3924000"/>
           </a:xfrm>
           <a:prstGeom prst="rect">
             <a:avLst/>
@@ -10798,14 +9089,14 @@
       </p:pic>
       <p:sp>
         <p:nvSpPr>
-          <p:cNvPr id="55" name="名牌底14"/>
-          <p:cNvSpPr/>
-          <p:nvPr/>
-        </p:nvSpPr>
-        <p:spPr>
-          <a:xfrm>
-            <a:off x="31608000" y="9450000"/>
-            <a:ext cx="5220000" cy="1188000"/>
+          <p:cNvPr id="40" name="名牌底14"/>
+          <p:cNvSpPr/>
+          <p:nvPr/>
+        </p:nvSpPr>
+        <p:spPr>
+          <a:xfrm>
+            <a:off x="31680000" y="11754000"/>
+            <a:ext cx="5400000" cy="1548000"/>
           </a:xfrm>
           <a:prstGeom prst="rect">
             <a:avLst/>
@@ -10835,14 +9126,14 @@
       </p:sp>
       <p:sp>
         <p:nvSpPr>
-          <p:cNvPr id="56" name="名牌金线14"/>
-          <p:cNvSpPr/>
-          <p:nvPr/>
-        </p:nvSpPr>
-        <p:spPr>
-          <a:xfrm>
-            <a:off x="31608000" y="9450000"/>
-            <a:ext cx="5220000" cy="54000"/>
+          <p:cNvPr id="41" name="名牌金线14"/>
+          <p:cNvSpPr/>
+          <p:nvPr/>
+        </p:nvSpPr>
+        <p:spPr>
+          <a:xfrm>
+            <a:off x="31680000" y="11754000"/>
+            <a:ext cx="5400000" cy="54000"/>
           </a:xfrm>
           <a:prstGeom prst="rect">
             <a:avLst/>
@@ -10864,14 +9155,14 @@
       </p:sp>
       <p:sp>
         <p:nvSpPr>
-          <p:cNvPr id="57" name="名牌14"/>
+          <p:cNvPr id="42" name="名牌14"/>
           <p:cNvSpPr txBox="1"/>
           <p:nvPr/>
         </p:nvSpPr>
         <p:spPr>
           <a:xfrm>
-            <a:off x="31608000" y="9504000"/>
-            <a:ext cx="5220000" cy="1134000"/>
+            <a:off x="31680000" y="11808000"/>
+            <a:ext cx="5400000" cy="1494000"/>
           </a:xfrm>
           <a:prstGeom prst="rect">
             <a:avLst/>
@@ -10886,7 +9177,7 @@
           <a:p>
             <a:pPr algn="ctr"/>
             <a:r>
-              <a:rPr sz="4535" b="1">
+              <a:rPr sz="5669" b="1">
                 <a:solidFill>
                   <a:srgbClr val="FFD27A"/>
                 </a:solidFill>
@@ -10899,7 +9190,7 @@
           <a:p>
             <a:pPr algn="ctr"/>
             <a:r>
-              <a:rPr sz="2692" b="0">
+              <a:rPr sz="3259" b="0">
                 <a:solidFill>
                   <a:srgbClr val="FFF1D6"/>
                 </a:solidFill>
@@ -10913,128 +9204,7 @@
       </p:sp>
       <p:sp>
         <p:nvSpPr>
-          <p:cNvPr id="58" name="文字框14"/>
-          <p:cNvSpPr/>
-          <p:nvPr/>
-        </p:nvSpPr>
-        <p:spPr>
-          <a:xfrm>
-            <a:off x="31518000" y="10980000"/>
-            <a:ext cx="5400000" cy="5850000"/>
-          </a:xfrm>
-          <a:prstGeom prst="roundRect">
-            <a:avLst>
-              <a:gd name="adj" fmla="val 4000"/>
-            </a:avLst>
-          </a:prstGeom>
-          <a:gradFill rotWithShape="1">
-            <a:gsLst>
-              <a:gs pos="0">
-                <a:srgbClr val="FFFDF7"/>
-              </a:gs>
-              <a:gs pos="100000">
-                <a:srgbClr val="FBF1DC"/>
-              </a:gs>
-            </a:gsLst>
-            <a:lin ang="5400000" scaled="0"/>
-          </a:gradFill>
-          <a:ln w="36000">
-            <a:solidFill>
-              <a:srgbClr val="E9C46A"/>
-            </a:solidFill>
-          </a:ln>
-        </p:spPr>
-        <p:txBody>
-          <a:bodyPr rtlCol="0" anchor="ctr"/>
-          <a:lstStyle/>
-          <a:p>
-            <a:pPr algn="ctr"/>
-          </a:p>
-        </p:txBody>
-      </p:sp>
-      <p:sp>
-        <p:nvSpPr>
-          <p:cNvPr id="59" name="文字框饰条14"/>
-          <p:cNvSpPr/>
-          <p:nvPr/>
-        </p:nvSpPr>
-        <p:spPr>
-          <a:xfrm>
-            <a:off x="31734000" y="16578000"/>
-            <a:ext cx="4968000" cy="90000"/>
-          </a:xfrm>
-          <a:prstGeom prst="rect">
-            <a:avLst/>
-          </a:prstGeom>
-          <a:gradFill rotWithShape="1">
-            <a:gsLst>
-              <a:gs pos="0">
-                <a:srgbClr val="C8161D"/>
-              </a:gs>
-              <a:gs pos="60000">
-                <a:srgbClr val="E0A43A"/>
-              </a:gs>
-              <a:gs pos="100000">
-                <a:srgbClr val="FFD27A"/>
-              </a:gs>
-            </a:gsLst>
-            <a:lin ang="0" scaled="0"/>
-          </a:gradFill>
-          <a:ln>
-            <a:noFill/>
-          </a:ln>
-        </p:spPr>
-        <p:txBody>
-          <a:bodyPr rtlCol="0" anchor="ctr"/>
-          <a:lstStyle/>
-          <a:p>
-            <a:pPr algn="ctr"/>
-          </a:p>
-        </p:txBody>
-      </p:sp>
-      <p:sp>
-        <p:nvSpPr>
-          <p:cNvPr id="60" name="文字14"/>
-          <p:cNvSpPr txBox="1"/>
-          <p:nvPr/>
-        </p:nvSpPr>
-        <p:spPr>
-          <a:xfrm>
-            <a:off x="31806000" y="11232000"/>
-            <a:ext cx="4824000" cy="5130000"/>
-          </a:xfrm>
-          <a:prstGeom prst="rect">
-            <a:avLst/>
-          </a:prstGeom>
-          <a:noFill/>
-        </p:spPr>
-        <p:txBody>
-          <a:bodyPr wrap="square" lIns="0" rIns="0" tIns="0" bIns="0" anchor="ctr">
-            <a:noAutofit/>
-          </a:bodyPr>
-          <a:lstStyle/>
-          <a:p>
-            <a:pPr algn="ctr">
-              <a:lnSpc>
-                <a:spcPts val="4677"/>
-              </a:lnSpc>
-            </a:pPr>
-            <a:r>
-              <a:rPr sz="3118" b="0">
-                <a:solidFill>
-                  <a:srgbClr val="3A2A1A"/>
-                </a:solidFill>
-                <a:latin typeface="Microsoft YaHei"/>
-                <a:ea typeface="微软雅黑"/>
-              </a:rPr>
-              <a:t>正面行为介绍待补充。</a:t>
-            </a:r>
-          </a:p>
-        </p:txBody>
-      </p:sp>
-      <p:sp>
-        <p:nvSpPr>
-          <p:cNvPr id="61" name="热区14">
+          <p:cNvPr id="43" name="热区14">
             <a:hlinkClick action="ppaction://hlinksldjump" r:id="rId8"/>
           </p:cNvPr>
           <p:cNvSpPr/>
@@ -11042,8 +9212,8 @@
         </p:nvSpPr>
         <p:spPr>
           <a:xfrm>
-            <a:off x="31518000" y="5400000"/>
-            <a:ext cx="5400000" cy="11430000"/>
+            <a:off x="31590000" y="7560000"/>
+            <a:ext cx="5580000" cy="5832000"/>
           </a:xfrm>
           <a:prstGeom prst="rect">
             <a:avLst/>
@@ -11067,18 +9237,18 @@
       </p:sp>
       <p:sp>
         <p:nvSpPr>
-          <p:cNvPr id="62" name="卡框15"/>
-          <p:cNvSpPr/>
-          <p:nvPr/>
-        </p:nvSpPr>
-        <p:spPr>
-          <a:xfrm>
-            <a:off x="37530000" y="5400000"/>
-            <a:ext cx="5400000" cy="5328000"/>
+          <p:cNvPr id="44" name="卡框15"/>
+          <p:cNvSpPr/>
+          <p:nvPr/>
+        </p:nvSpPr>
+        <p:spPr>
+          <a:xfrm>
+            <a:off x="37710000" y="7560000"/>
+            <a:ext cx="5580000" cy="5832000"/>
           </a:xfrm>
           <a:prstGeom prst="roundRect">
             <a:avLst>
-              <a:gd name="adj" fmla="val 4054"/>
+              <a:gd name="adj" fmla="val 3870"/>
             </a:avLst>
           </a:prstGeom>
           <a:gradFill rotWithShape="1">
@@ -11115,14 +9285,14 @@
       </p:sp>
       <p:sp>
         <p:nvSpPr>
-          <p:cNvPr id="63" name="衬纸15"/>
-          <p:cNvSpPr/>
-          <p:nvPr/>
-        </p:nvSpPr>
-        <p:spPr>
-          <a:xfrm>
-            <a:off x="37620000" y="5490000"/>
-            <a:ext cx="5220000" cy="3960000"/>
+          <p:cNvPr id="45" name="衬纸15"/>
+          <p:cNvSpPr/>
+          <p:nvPr/>
+        </p:nvSpPr>
+        <p:spPr>
+          <a:xfrm>
+            <a:off x="37800000" y="7650000"/>
+            <a:ext cx="5400000" cy="4104000"/>
           </a:xfrm>
           <a:prstGeom prst="rect">
             <a:avLst/>
@@ -11144,7 +9314,7 @@
       </p:sp>
       <p:pic>
         <p:nvPicPr>
-          <p:cNvPr id="64" name="!!p15" descr="image.jpg"/>
+          <p:cNvPr id="46" name="!!p15" descr="image.jpg"/>
           <p:cNvPicPr>
             <a:picLocks noChangeAspect="1"/>
           </p:cNvPicPr>
@@ -11159,8 +9329,8 @@
         </p:blipFill>
         <p:spPr>
           <a:xfrm>
-            <a:off x="37710000" y="5580000"/>
-            <a:ext cx="5040000" cy="3780000"/>
+            <a:off x="37890000" y="7740000"/>
+            <a:ext cx="5220000" cy="3924000"/>
           </a:xfrm>
           <a:prstGeom prst="rect">
             <a:avLst/>
@@ -11169,14 +9339,14 @@
       </p:pic>
       <p:sp>
         <p:nvSpPr>
-          <p:cNvPr id="65" name="名牌底15"/>
-          <p:cNvSpPr/>
-          <p:nvPr/>
-        </p:nvSpPr>
-        <p:spPr>
-          <a:xfrm>
-            <a:off x="37620000" y="9450000"/>
-            <a:ext cx="5220000" cy="1188000"/>
+          <p:cNvPr id="47" name="名牌底15"/>
+          <p:cNvSpPr/>
+          <p:nvPr/>
+        </p:nvSpPr>
+        <p:spPr>
+          <a:xfrm>
+            <a:off x="37800000" y="11754000"/>
+            <a:ext cx="5400000" cy="1548000"/>
           </a:xfrm>
           <a:prstGeom prst="rect">
             <a:avLst/>
@@ -11206,14 +9376,14 @@
       </p:sp>
       <p:sp>
         <p:nvSpPr>
-          <p:cNvPr id="66" name="名牌金线15"/>
-          <p:cNvSpPr/>
-          <p:nvPr/>
-        </p:nvSpPr>
-        <p:spPr>
-          <a:xfrm>
-            <a:off x="37620000" y="9450000"/>
-            <a:ext cx="5220000" cy="54000"/>
+          <p:cNvPr id="48" name="名牌金线15"/>
+          <p:cNvSpPr/>
+          <p:nvPr/>
+        </p:nvSpPr>
+        <p:spPr>
+          <a:xfrm>
+            <a:off x="37800000" y="11754000"/>
+            <a:ext cx="5400000" cy="54000"/>
           </a:xfrm>
           <a:prstGeom prst="rect">
             <a:avLst/>
@@ -11235,14 +9405,14 @@
       </p:sp>
       <p:sp>
         <p:nvSpPr>
-          <p:cNvPr id="67" name="名牌15"/>
+          <p:cNvPr id="49" name="名牌15"/>
           <p:cNvSpPr txBox="1"/>
           <p:nvPr/>
         </p:nvSpPr>
         <p:spPr>
           <a:xfrm>
-            <a:off x="37620000" y="9504000"/>
-            <a:ext cx="5220000" cy="1134000"/>
+            <a:off x="37800000" y="11808000"/>
+            <a:ext cx="5400000" cy="1494000"/>
           </a:xfrm>
           <a:prstGeom prst="rect">
             <a:avLst/>
@@ -11257,7 +9427,7 @@
           <a:p>
             <a:pPr algn="ctr"/>
             <a:r>
-              <a:rPr sz="4535" b="1">
+              <a:rPr sz="5669" b="1">
                 <a:solidFill>
                   <a:srgbClr val="FFD27A"/>
                 </a:solidFill>
@@ -11270,7 +9440,7 @@
           <a:p>
             <a:pPr algn="ctr"/>
             <a:r>
-              <a:rPr sz="2692" b="0">
+              <a:rPr sz="3259" b="0">
                 <a:solidFill>
                   <a:srgbClr val="FFF1D6"/>
                 </a:solidFill>
@@ -11284,128 +9454,7 @@
       </p:sp>
       <p:sp>
         <p:nvSpPr>
-          <p:cNvPr id="68" name="文字框15"/>
-          <p:cNvSpPr/>
-          <p:nvPr/>
-        </p:nvSpPr>
-        <p:spPr>
-          <a:xfrm>
-            <a:off x="37530000" y="10980000"/>
-            <a:ext cx="5400000" cy="5850000"/>
-          </a:xfrm>
-          <a:prstGeom prst="roundRect">
-            <a:avLst>
-              <a:gd name="adj" fmla="val 4000"/>
-            </a:avLst>
-          </a:prstGeom>
-          <a:gradFill rotWithShape="1">
-            <a:gsLst>
-              <a:gs pos="0">
-                <a:srgbClr val="FFFDF7"/>
-              </a:gs>
-              <a:gs pos="100000">
-                <a:srgbClr val="FBF1DC"/>
-              </a:gs>
-            </a:gsLst>
-            <a:lin ang="5400000" scaled="0"/>
-          </a:gradFill>
-          <a:ln w="36000">
-            <a:solidFill>
-              <a:srgbClr val="E9C46A"/>
-            </a:solidFill>
-          </a:ln>
-        </p:spPr>
-        <p:txBody>
-          <a:bodyPr rtlCol="0" anchor="ctr"/>
-          <a:lstStyle/>
-          <a:p>
-            <a:pPr algn="ctr"/>
-          </a:p>
-        </p:txBody>
-      </p:sp>
-      <p:sp>
-        <p:nvSpPr>
-          <p:cNvPr id="69" name="文字框饰条15"/>
-          <p:cNvSpPr/>
-          <p:nvPr/>
-        </p:nvSpPr>
-        <p:spPr>
-          <a:xfrm>
-            <a:off x="37746000" y="16578000"/>
-            <a:ext cx="4968000" cy="90000"/>
-          </a:xfrm>
-          <a:prstGeom prst="rect">
-            <a:avLst/>
-          </a:prstGeom>
-          <a:gradFill rotWithShape="1">
-            <a:gsLst>
-              <a:gs pos="0">
-                <a:srgbClr val="C8161D"/>
-              </a:gs>
-              <a:gs pos="60000">
-                <a:srgbClr val="E0A43A"/>
-              </a:gs>
-              <a:gs pos="100000">
-                <a:srgbClr val="FFD27A"/>
-              </a:gs>
-            </a:gsLst>
-            <a:lin ang="0" scaled="0"/>
-          </a:gradFill>
-          <a:ln>
-            <a:noFill/>
-          </a:ln>
-        </p:spPr>
-        <p:txBody>
-          <a:bodyPr rtlCol="0" anchor="ctr"/>
-          <a:lstStyle/>
-          <a:p>
-            <a:pPr algn="ctr"/>
-          </a:p>
-        </p:txBody>
-      </p:sp>
-      <p:sp>
-        <p:nvSpPr>
-          <p:cNvPr id="70" name="文字15"/>
-          <p:cNvSpPr txBox="1"/>
-          <p:nvPr/>
-        </p:nvSpPr>
-        <p:spPr>
-          <a:xfrm>
-            <a:off x="37818000" y="11232000"/>
-            <a:ext cx="4824000" cy="5130000"/>
-          </a:xfrm>
-          <a:prstGeom prst="rect">
-            <a:avLst/>
-          </a:prstGeom>
-          <a:noFill/>
-        </p:spPr>
-        <p:txBody>
-          <a:bodyPr wrap="square" lIns="0" rIns="0" tIns="0" bIns="0" anchor="ctr">
-            <a:noAutofit/>
-          </a:bodyPr>
-          <a:lstStyle/>
-          <a:p>
-            <a:pPr algn="ctr">
-              <a:lnSpc>
-                <a:spcPts val="4677"/>
-              </a:lnSpc>
-            </a:pPr>
-            <a:r>
-              <a:rPr sz="3118" b="0">
-                <a:solidFill>
-                  <a:srgbClr val="3A2A1A"/>
-                </a:solidFill>
-                <a:latin typeface="Microsoft YaHei"/>
-                <a:ea typeface="微软雅黑"/>
-              </a:rPr>
-              <a:t>正面行为介绍待补充。</a:t>
-            </a:r>
-          </a:p>
-        </p:txBody>
-      </p:sp>
-      <p:sp>
-        <p:nvSpPr>
-          <p:cNvPr id="71" name="热区15">
+          <p:cNvPr id="50" name="热区15">
             <a:hlinkClick action="ppaction://hlinksldjump" r:id="rId9"/>
           </p:cNvPr>
           <p:cNvSpPr/>
@@ -11413,8 +9462,8 @@
         </p:nvSpPr>
         <p:spPr>
           <a:xfrm>
-            <a:off x="37530000" y="5400000"/>
-            <a:ext cx="5400000" cy="11430000"/>
+            <a:off x="37710000" y="7560000"/>
+            <a:ext cx="5580000" cy="5832000"/>
           </a:xfrm>
           <a:prstGeom prst="rect">
             <a:avLst/>
@@ -11438,18 +9487,18 @@
       </p:sp>
       <p:sp>
         <p:nvSpPr>
-          <p:cNvPr id="72" name="卡框16"/>
-          <p:cNvSpPr/>
-          <p:nvPr/>
-        </p:nvSpPr>
-        <p:spPr>
-          <a:xfrm>
-            <a:off x="43542000" y="5400000"/>
-            <a:ext cx="5400000" cy="5328000"/>
+          <p:cNvPr id="51" name="卡框16"/>
+          <p:cNvSpPr/>
+          <p:nvPr/>
+        </p:nvSpPr>
+        <p:spPr>
+          <a:xfrm>
+            <a:off x="43830000" y="7560000"/>
+            <a:ext cx="5580000" cy="5832000"/>
           </a:xfrm>
           <a:prstGeom prst="roundRect">
             <a:avLst>
-              <a:gd name="adj" fmla="val 4054"/>
+              <a:gd name="adj" fmla="val 3870"/>
             </a:avLst>
           </a:prstGeom>
           <a:gradFill rotWithShape="1">
@@ -11486,14 +9535,14 @@
       </p:sp>
       <p:sp>
         <p:nvSpPr>
-          <p:cNvPr id="73" name="衬纸16"/>
-          <p:cNvSpPr/>
-          <p:nvPr/>
-        </p:nvSpPr>
-        <p:spPr>
-          <a:xfrm>
-            <a:off x="43632000" y="5490000"/>
-            <a:ext cx="5220000" cy="3960000"/>
+          <p:cNvPr id="52" name="衬纸16"/>
+          <p:cNvSpPr/>
+          <p:nvPr/>
+        </p:nvSpPr>
+        <p:spPr>
+          <a:xfrm>
+            <a:off x="43920000" y="7650000"/>
+            <a:ext cx="5400000" cy="4104000"/>
           </a:xfrm>
           <a:prstGeom prst="rect">
             <a:avLst/>
@@ -11515,7 +9564,7 @@
       </p:sp>
       <p:pic>
         <p:nvPicPr>
-          <p:cNvPr id="74" name="!!p16" descr="image.jpg"/>
+          <p:cNvPr id="53" name="!!p16" descr="image.jpg"/>
           <p:cNvPicPr>
             <a:picLocks noChangeAspect="1"/>
           </p:cNvPicPr>
@@ -11530,8 +9579,8 @@
         </p:blipFill>
         <p:spPr>
           <a:xfrm>
-            <a:off x="43722000" y="5580000"/>
-            <a:ext cx="5040000" cy="3780000"/>
+            <a:off x="44010000" y="7740000"/>
+            <a:ext cx="5220000" cy="3924000"/>
           </a:xfrm>
           <a:prstGeom prst="rect">
             <a:avLst/>
@@ -11540,14 +9589,14 @@
       </p:pic>
       <p:sp>
         <p:nvSpPr>
-          <p:cNvPr id="75" name="名牌底16"/>
-          <p:cNvSpPr/>
-          <p:nvPr/>
-        </p:nvSpPr>
-        <p:spPr>
-          <a:xfrm>
-            <a:off x="43632000" y="9450000"/>
-            <a:ext cx="5220000" cy="1188000"/>
+          <p:cNvPr id="54" name="名牌底16"/>
+          <p:cNvSpPr/>
+          <p:nvPr/>
+        </p:nvSpPr>
+        <p:spPr>
+          <a:xfrm>
+            <a:off x="43920000" y="11754000"/>
+            <a:ext cx="5400000" cy="1548000"/>
           </a:xfrm>
           <a:prstGeom prst="rect">
             <a:avLst/>
@@ -11577,14 +9626,14 @@
       </p:sp>
       <p:sp>
         <p:nvSpPr>
-          <p:cNvPr id="76" name="名牌金线16"/>
-          <p:cNvSpPr/>
-          <p:nvPr/>
-        </p:nvSpPr>
-        <p:spPr>
-          <a:xfrm>
-            <a:off x="43632000" y="9450000"/>
-            <a:ext cx="5220000" cy="54000"/>
+          <p:cNvPr id="55" name="名牌金线16"/>
+          <p:cNvSpPr/>
+          <p:nvPr/>
+        </p:nvSpPr>
+        <p:spPr>
+          <a:xfrm>
+            <a:off x="43920000" y="11754000"/>
+            <a:ext cx="5400000" cy="54000"/>
           </a:xfrm>
           <a:prstGeom prst="rect">
             <a:avLst/>
@@ -11606,14 +9655,14 @@
       </p:sp>
       <p:sp>
         <p:nvSpPr>
-          <p:cNvPr id="77" name="名牌16"/>
+          <p:cNvPr id="56" name="名牌16"/>
           <p:cNvSpPr txBox="1"/>
           <p:nvPr/>
         </p:nvSpPr>
         <p:spPr>
           <a:xfrm>
-            <a:off x="43632000" y="9504000"/>
-            <a:ext cx="5220000" cy="1134000"/>
+            <a:off x="43920000" y="11808000"/>
+            <a:ext cx="5400000" cy="1494000"/>
           </a:xfrm>
           <a:prstGeom prst="rect">
             <a:avLst/>
@@ -11628,7 +9677,7 @@
           <a:p>
             <a:pPr algn="ctr"/>
             <a:r>
-              <a:rPr sz="4535" b="1">
+              <a:rPr sz="5669" b="1">
                 <a:solidFill>
                   <a:srgbClr val="FFD27A"/>
                 </a:solidFill>
@@ -11641,7 +9690,7 @@
           <a:p>
             <a:pPr algn="ctr"/>
             <a:r>
-              <a:rPr sz="2692" b="0">
+              <a:rPr sz="3259" b="0">
                 <a:solidFill>
                   <a:srgbClr val="FFF1D6"/>
                 </a:solidFill>
@@ -11655,128 +9704,7 @@
       </p:sp>
       <p:sp>
         <p:nvSpPr>
-          <p:cNvPr id="78" name="文字框16"/>
-          <p:cNvSpPr/>
-          <p:nvPr/>
-        </p:nvSpPr>
-        <p:spPr>
-          <a:xfrm>
-            <a:off x="43542000" y="10980000"/>
-            <a:ext cx="5400000" cy="5850000"/>
-          </a:xfrm>
-          <a:prstGeom prst="roundRect">
-            <a:avLst>
-              <a:gd name="adj" fmla="val 4000"/>
-            </a:avLst>
-          </a:prstGeom>
-          <a:gradFill rotWithShape="1">
-            <a:gsLst>
-              <a:gs pos="0">
-                <a:srgbClr val="FFFDF7"/>
-              </a:gs>
-              <a:gs pos="100000">
-                <a:srgbClr val="FBF1DC"/>
-              </a:gs>
-            </a:gsLst>
-            <a:lin ang="5400000" scaled="0"/>
-          </a:gradFill>
-          <a:ln w="36000">
-            <a:solidFill>
-              <a:srgbClr val="E9C46A"/>
-            </a:solidFill>
-          </a:ln>
-        </p:spPr>
-        <p:txBody>
-          <a:bodyPr rtlCol="0" anchor="ctr"/>
-          <a:lstStyle/>
-          <a:p>
-            <a:pPr algn="ctr"/>
-          </a:p>
-        </p:txBody>
-      </p:sp>
-      <p:sp>
-        <p:nvSpPr>
-          <p:cNvPr id="79" name="文字框饰条16"/>
-          <p:cNvSpPr/>
-          <p:nvPr/>
-        </p:nvSpPr>
-        <p:spPr>
-          <a:xfrm>
-            <a:off x="43758000" y="16578000"/>
-            <a:ext cx="4968000" cy="90000"/>
-          </a:xfrm>
-          <a:prstGeom prst="rect">
-            <a:avLst/>
-          </a:prstGeom>
-          <a:gradFill rotWithShape="1">
-            <a:gsLst>
-              <a:gs pos="0">
-                <a:srgbClr val="C8161D"/>
-              </a:gs>
-              <a:gs pos="60000">
-                <a:srgbClr val="E0A43A"/>
-              </a:gs>
-              <a:gs pos="100000">
-                <a:srgbClr val="FFD27A"/>
-              </a:gs>
-            </a:gsLst>
-            <a:lin ang="0" scaled="0"/>
-          </a:gradFill>
-          <a:ln>
-            <a:noFill/>
-          </a:ln>
-        </p:spPr>
-        <p:txBody>
-          <a:bodyPr rtlCol="0" anchor="ctr"/>
-          <a:lstStyle/>
-          <a:p>
-            <a:pPr algn="ctr"/>
-          </a:p>
-        </p:txBody>
-      </p:sp>
-      <p:sp>
-        <p:nvSpPr>
-          <p:cNvPr id="80" name="文字16"/>
-          <p:cNvSpPr txBox="1"/>
-          <p:nvPr/>
-        </p:nvSpPr>
-        <p:spPr>
-          <a:xfrm>
-            <a:off x="43830000" y="11232000"/>
-            <a:ext cx="4824000" cy="5130000"/>
-          </a:xfrm>
-          <a:prstGeom prst="rect">
-            <a:avLst/>
-          </a:prstGeom>
-          <a:noFill/>
-        </p:spPr>
-        <p:txBody>
-          <a:bodyPr wrap="square" lIns="0" rIns="0" tIns="0" bIns="0" anchor="ctr">
-            <a:noAutofit/>
-          </a:bodyPr>
-          <a:lstStyle/>
-          <a:p>
-            <a:pPr algn="ctr">
-              <a:lnSpc>
-                <a:spcPts val="4677"/>
-              </a:lnSpc>
-            </a:pPr>
-            <a:r>
-              <a:rPr sz="3118" b="0">
-                <a:solidFill>
-                  <a:srgbClr val="3A2A1A"/>
-                </a:solidFill>
-                <a:latin typeface="Microsoft YaHei"/>
-                <a:ea typeface="微软雅黑"/>
-              </a:rPr>
-              <a:t>正面行为介绍待补充。</a:t>
-            </a:r>
-          </a:p>
-        </p:txBody>
-      </p:sp>
-      <p:sp>
-        <p:nvSpPr>
-          <p:cNvPr id="81" name="热区16">
+          <p:cNvPr id="57" name="热区16">
             <a:hlinkClick action="ppaction://hlinksldjump" r:id="rId10"/>
           </p:cNvPr>
           <p:cNvSpPr/>
@@ -11784,8 +9712,8 @@
         </p:nvSpPr>
         <p:spPr>
           <a:xfrm>
-            <a:off x="43542000" y="5400000"/>
-            <a:ext cx="5400000" cy="11430000"/>
+            <a:off x="43830000" y="7560000"/>
+            <a:ext cx="5580000" cy="5832000"/>
           </a:xfrm>
           <a:prstGeom prst="rect">
             <a:avLst/>
@@ -11809,7 +9737,7 @@
       </p:sp>
       <p:sp>
         <p:nvSpPr>
-          <p:cNvPr id="82" name="上一页底"/>
+          <p:cNvPr id="58" name="上一页底"/>
           <p:cNvSpPr/>
           <p:nvPr/>
         </p:nvSpPr>
@@ -11844,7 +9772,7 @@
       </p:sp>
       <p:sp>
         <p:nvSpPr>
-          <p:cNvPr id="83" name="上一页字"/>
+          <p:cNvPr id="59" name="上一页字"/>
           <p:cNvSpPr txBox="1"/>
           <p:nvPr/>
         </p:nvSpPr>
@@ -11880,7 +9808,7 @@
       </p:sp>
       <p:sp>
         <p:nvSpPr>
-          <p:cNvPr id="84" name="上一页">
+          <p:cNvPr id="60" name="上一页">
             <a:hlinkClick action="ppaction://hlinksldjump" r:id="rId11"/>
           </p:cNvPr>
           <p:cNvSpPr/>
@@ -11913,7 +9841,7 @@
       </p:sp>
       <p:sp>
         <p:nvSpPr>
-          <p:cNvPr id="85" name="下一页底"/>
+          <p:cNvPr id="61" name="下一页底"/>
           <p:cNvSpPr/>
           <p:nvPr/>
         </p:nvSpPr>
@@ -11948,7 +9876,7 @@
       </p:sp>
       <p:sp>
         <p:nvSpPr>
-          <p:cNvPr id="86" name="下一页字"/>
+          <p:cNvPr id="62" name="下一页字"/>
           <p:cNvSpPr txBox="1"/>
           <p:nvPr/>
         </p:nvSpPr>
@@ -11984,7 +9912,7 @@
       </p:sp>
       <p:sp>
         <p:nvSpPr>
-          <p:cNvPr id="87" name="下一页">
+          <p:cNvPr id="63" name="下一页">
             <a:hlinkClick action="ppaction://hlinksldjump" r:id="rId12"/>
           </p:cNvPr>
           <p:cNvSpPr/>
@@ -22757,12 +20685,12 @@
         </p:nvSpPr>
         <p:spPr>
           <a:xfrm>
-            <a:off x="1458000" y="5400000"/>
-            <a:ext cx="5400000" cy="5328000"/>
+            <a:off x="990000" y="7560000"/>
+            <a:ext cx="5580000" cy="5832000"/>
           </a:xfrm>
           <a:prstGeom prst="roundRect">
             <a:avLst>
-              <a:gd name="adj" fmla="val 4054"/>
+              <a:gd name="adj" fmla="val 3870"/>
             </a:avLst>
           </a:prstGeom>
           <a:gradFill rotWithShape="1">
@@ -22805,8 +20733,8 @@
         </p:nvSpPr>
         <p:spPr>
           <a:xfrm>
-            <a:off x="1548000" y="5490000"/>
-            <a:ext cx="5220000" cy="3960000"/>
+            <a:off x="1080000" y="7650000"/>
+            <a:ext cx="5400000" cy="4104000"/>
           </a:xfrm>
           <a:prstGeom prst="rect">
             <a:avLst/>
@@ -22843,8 +20771,8 @@
         </p:blipFill>
         <p:spPr>
           <a:xfrm>
-            <a:off x="1638000" y="5580000"/>
-            <a:ext cx="5040000" cy="3780000"/>
+            <a:off x="1170000" y="7740000"/>
+            <a:ext cx="5220000" cy="3924000"/>
           </a:xfrm>
           <a:prstGeom prst="rect">
             <a:avLst/>
@@ -22859,8 +20787,8 @@
         </p:nvSpPr>
         <p:spPr>
           <a:xfrm>
-            <a:off x="1548000" y="9450000"/>
-            <a:ext cx="5220000" cy="1188000"/>
+            <a:off x="1080000" y="11754000"/>
+            <a:ext cx="5400000" cy="1548000"/>
           </a:xfrm>
           <a:prstGeom prst="rect">
             <a:avLst/>
@@ -22896,8 +20824,8 @@
         </p:nvSpPr>
         <p:spPr>
           <a:xfrm>
-            <a:off x="1548000" y="9450000"/>
-            <a:ext cx="5220000" cy="54000"/>
+            <a:off x="1080000" y="11754000"/>
+            <a:ext cx="5400000" cy="54000"/>
           </a:xfrm>
           <a:prstGeom prst="rect">
             <a:avLst/>
@@ -22925,8 +20853,8 @@
         </p:nvSpPr>
         <p:spPr>
           <a:xfrm>
-            <a:off x="1548000" y="9504000"/>
-            <a:ext cx="5220000" cy="1134000"/>
+            <a:off x="1080000" y="11808000"/>
+            <a:ext cx="5400000" cy="1494000"/>
           </a:xfrm>
           <a:prstGeom prst="rect">
             <a:avLst/>
@@ -22941,7 +20869,7 @@
           <a:p>
             <a:pPr algn="ctr"/>
             <a:r>
-              <a:rPr sz="4535" b="1">
+              <a:rPr sz="5669" b="1">
                 <a:solidFill>
                   <a:srgbClr val="FFD27A"/>
                 </a:solidFill>
@@ -22954,7 +20882,7 @@
           <a:p>
             <a:pPr algn="ctr"/>
             <a:r>
-              <a:rPr sz="2692" b="0">
+              <a:rPr sz="3259" b="0">
                 <a:solidFill>
                   <a:srgbClr val="FFF1D6"/>
                 </a:solidFill>
@@ -22968,128 +20896,7 @@
       </p:sp>
       <p:sp>
         <p:nvSpPr>
-          <p:cNvPr id="8" name="文字框17"/>
-          <p:cNvSpPr/>
-          <p:nvPr/>
-        </p:nvSpPr>
-        <p:spPr>
-          <a:xfrm>
-            <a:off x="1458000" y="10980000"/>
-            <a:ext cx="5400000" cy="5850000"/>
-          </a:xfrm>
-          <a:prstGeom prst="roundRect">
-            <a:avLst>
-              <a:gd name="adj" fmla="val 4000"/>
-            </a:avLst>
-          </a:prstGeom>
-          <a:gradFill rotWithShape="1">
-            <a:gsLst>
-              <a:gs pos="0">
-                <a:srgbClr val="FFFDF7"/>
-              </a:gs>
-              <a:gs pos="100000">
-                <a:srgbClr val="FBF1DC"/>
-              </a:gs>
-            </a:gsLst>
-            <a:lin ang="5400000" scaled="0"/>
-          </a:gradFill>
-          <a:ln w="36000">
-            <a:solidFill>
-              <a:srgbClr val="E9C46A"/>
-            </a:solidFill>
-          </a:ln>
-        </p:spPr>
-        <p:txBody>
-          <a:bodyPr rtlCol="0" anchor="ctr"/>
-          <a:lstStyle/>
-          <a:p>
-            <a:pPr algn="ctr"/>
-          </a:p>
-        </p:txBody>
-      </p:sp>
-      <p:sp>
-        <p:nvSpPr>
-          <p:cNvPr id="9" name="文字框饰条17"/>
-          <p:cNvSpPr/>
-          <p:nvPr/>
-        </p:nvSpPr>
-        <p:spPr>
-          <a:xfrm>
-            <a:off x="1674000" y="16578000"/>
-            <a:ext cx="4968000" cy="90000"/>
-          </a:xfrm>
-          <a:prstGeom prst="rect">
-            <a:avLst/>
-          </a:prstGeom>
-          <a:gradFill rotWithShape="1">
-            <a:gsLst>
-              <a:gs pos="0">
-                <a:srgbClr val="C8161D"/>
-              </a:gs>
-              <a:gs pos="60000">
-                <a:srgbClr val="E0A43A"/>
-              </a:gs>
-              <a:gs pos="100000">
-                <a:srgbClr val="FFD27A"/>
-              </a:gs>
-            </a:gsLst>
-            <a:lin ang="0" scaled="0"/>
-          </a:gradFill>
-          <a:ln>
-            <a:noFill/>
-          </a:ln>
-        </p:spPr>
-        <p:txBody>
-          <a:bodyPr rtlCol="0" anchor="ctr"/>
-          <a:lstStyle/>
-          <a:p>
-            <a:pPr algn="ctr"/>
-          </a:p>
-        </p:txBody>
-      </p:sp>
-      <p:sp>
-        <p:nvSpPr>
-          <p:cNvPr id="10" name="文字17"/>
-          <p:cNvSpPr txBox="1"/>
-          <p:nvPr/>
-        </p:nvSpPr>
-        <p:spPr>
-          <a:xfrm>
-            <a:off x="1746000" y="11232000"/>
-            <a:ext cx="4824000" cy="5130000"/>
-          </a:xfrm>
-          <a:prstGeom prst="rect">
-            <a:avLst/>
-          </a:prstGeom>
-          <a:noFill/>
-        </p:spPr>
-        <p:txBody>
-          <a:bodyPr wrap="square" lIns="0" rIns="0" tIns="0" bIns="0" anchor="ctr">
-            <a:noAutofit/>
-          </a:bodyPr>
-          <a:lstStyle/>
-          <a:p>
-            <a:pPr algn="ctr">
-              <a:lnSpc>
-                <a:spcPts val="4677"/>
-              </a:lnSpc>
-            </a:pPr>
-            <a:r>
-              <a:rPr sz="3118" b="0">
-                <a:solidFill>
-                  <a:srgbClr val="3A2A1A"/>
-                </a:solidFill>
-                <a:latin typeface="Microsoft YaHei"/>
-                <a:ea typeface="微软雅黑"/>
-              </a:rPr>
-              <a:t>正面行为介绍待补充。</a:t>
-            </a:r>
-          </a:p>
-        </p:txBody>
-      </p:sp>
-      <p:sp>
-        <p:nvSpPr>
-          <p:cNvPr id="11" name="热区17">
+          <p:cNvPr id="8" name="热区17">
             <a:hlinkClick action="ppaction://hlinksldjump" r:id="rId3"/>
           </p:cNvPr>
           <p:cNvSpPr/>
@@ -23097,8 +20904,8 @@
         </p:nvSpPr>
         <p:spPr>
           <a:xfrm>
-            <a:off x="1458000" y="5400000"/>
-            <a:ext cx="5400000" cy="11430000"/>
+            <a:off x="990000" y="7560000"/>
+            <a:ext cx="5580000" cy="5832000"/>
           </a:xfrm>
           <a:prstGeom prst="rect">
             <a:avLst/>
@@ -23122,18 +20929,18 @@
       </p:sp>
       <p:sp>
         <p:nvSpPr>
-          <p:cNvPr id="12" name="卡框18"/>
-          <p:cNvSpPr/>
-          <p:nvPr/>
-        </p:nvSpPr>
-        <p:spPr>
-          <a:xfrm>
-            <a:off x="7470000" y="5400000"/>
-            <a:ext cx="5400000" cy="5328000"/>
+          <p:cNvPr id="9" name="卡框18"/>
+          <p:cNvSpPr/>
+          <p:nvPr/>
+        </p:nvSpPr>
+        <p:spPr>
+          <a:xfrm>
+            <a:off x="7110000" y="7560000"/>
+            <a:ext cx="5580000" cy="5832000"/>
           </a:xfrm>
           <a:prstGeom prst="roundRect">
             <a:avLst>
-              <a:gd name="adj" fmla="val 4054"/>
+              <a:gd name="adj" fmla="val 3870"/>
             </a:avLst>
           </a:prstGeom>
           <a:gradFill rotWithShape="1">
@@ -23170,14 +20977,14 @@
       </p:sp>
       <p:sp>
         <p:nvSpPr>
-          <p:cNvPr id="13" name="衬纸18"/>
-          <p:cNvSpPr/>
-          <p:nvPr/>
-        </p:nvSpPr>
-        <p:spPr>
-          <a:xfrm>
-            <a:off x="7560000" y="5490000"/>
-            <a:ext cx="5220000" cy="3960000"/>
+          <p:cNvPr id="10" name="衬纸18"/>
+          <p:cNvSpPr/>
+          <p:nvPr/>
+        </p:nvSpPr>
+        <p:spPr>
+          <a:xfrm>
+            <a:off x="7200000" y="7650000"/>
+            <a:ext cx="5400000" cy="4104000"/>
           </a:xfrm>
           <a:prstGeom prst="rect">
             <a:avLst/>
@@ -23199,7 +21006,7 @@
       </p:sp>
       <p:pic>
         <p:nvPicPr>
-          <p:cNvPr id="14" name="!!p18" descr="image.jpg"/>
+          <p:cNvPr id="11" name="!!p18" descr="image.jpg"/>
           <p:cNvPicPr>
             <a:picLocks noChangeAspect="1"/>
           </p:cNvPicPr>
@@ -23214,8 +21021,8 @@
         </p:blipFill>
         <p:spPr>
           <a:xfrm>
-            <a:off x="7650000" y="5580000"/>
-            <a:ext cx="5040000" cy="3780000"/>
+            <a:off x="7290000" y="7740000"/>
+            <a:ext cx="5220000" cy="3924000"/>
           </a:xfrm>
           <a:prstGeom prst="rect">
             <a:avLst/>
@@ -23224,14 +21031,14 @@
       </p:pic>
       <p:sp>
         <p:nvSpPr>
-          <p:cNvPr id="15" name="名牌底18"/>
-          <p:cNvSpPr/>
-          <p:nvPr/>
-        </p:nvSpPr>
-        <p:spPr>
-          <a:xfrm>
-            <a:off x="7560000" y="9450000"/>
-            <a:ext cx="5220000" cy="1188000"/>
+          <p:cNvPr id="12" name="名牌底18"/>
+          <p:cNvSpPr/>
+          <p:nvPr/>
+        </p:nvSpPr>
+        <p:spPr>
+          <a:xfrm>
+            <a:off x="7200000" y="11754000"/>
+            <a:ext cx="5400000" cy="1548000"/>
           </a:xfrm>
           <a:prstGeom prst="rect">
             <a:avLst/>
@@ -23261,14 +21068,14 @@
       </p:sp>
       <p:sp>
         <p:nvSpPr>
-          <p:cNvPr id="16" name="名牌金线18"/>
-          <p:cNvSpPr/>
-          <p:nvPr/>
-        </p:nvSpPr>
-        <p:spPr>
-          <a:xfrm>
-            <a:off x="7560000" y="9450000"/>
-            <a:ext cx="5220000" cy="54000"/>
+          <p:cNvPr id="13" name="名牌金线18"/>
+          <p:cNvSpPr/>
+          <p:nvPr/>
+        </p:nvSpPr>
+        <p:spPr>
+          <a:xfrm>
+            <a:off x="7200000" y="11754000"/>
+            <a:ext cx="5400000" cy="54000"/>
           </a:xfrm>
           <a:prstGeom prst="rect">
             <a:avLst/>
@@ -23290,14 +21097,14 @@
       </p:sp>
       <p:sp>
         <p:nvSpPr>
-          <p:cNvPr id="17" name="名牌18"/>
+          <p:cNvPr id="14" name="名牌18"/>
           <p:cNvSpPr txBox="1"/>
           <p:nvPr/>
         </p:nvSpPr>
         <p:spPr>
           <a:xfrm>
-            <a:off x="7560000" y="9504000"/>
-            <a:ext cx="5220000" cy="1134000"/>
+            <a:off x="7200000" y="11808000"/>
+            <a:ext cx="5400000" cy="1494000"/>
           </a:xfrm>
           <a:prstGeom prst="rect">
             <a:avLst/>
@@ -23312,7 +21119,7 @@
           <a:p>
             <a:pPr algn="ctr"/>
             <a:r>
-              <a:rPr sz="4535" b="1">
+              <a:rPr sz="5669" b="1">
                 <a:solidFill>
                   <a:srgbClr val="FFD27A"/>
                 </a:solidFill>
@@ -23325,7 +21132,7 @@
           <a:p>
             <a:pPr algn="ctr"/>
             <a:r>
-              <a:rPr sz="2692" b="0">
+              <a:rPr sz="3259" b="0">
                 <a:solidFill>
                   <a:srgbClr val="FFF1D6"/>
                 </a:solidFill>
@@ -23339,128 +21146,7 @@
       </p:sp>
       <p:sp>
         <p:nvSpPr>
-          <p:cNvPr id="18" name="文字框18"/>
-          <p:cNvSpPr/>
-          <p:nvPr/>
-        </p:nvSpPr>
-        <p:spPr>
-          <a:xfrm>
-            <a:off x="7470000" y="10980000"/>
-            <a:ext cx="5400000" cy="5850000"/>
-          </a:xfrm>
-          <a:prstGeom prst="roundRect">
-            <a:avLst>
-              <a:gd name="adj" fmla="val 4000"/>
-            </a:avLst>
-          </a:prstGeom>
-          <a:gradFill rotWithShape="1">
-            <a:gsLst>
-              <a:gs pos="0">
-                <a:srgbClr val="FFFDF7"/>
-              </a:gs>
-              <a:gs pos="100000">
-                <a:srgbClr val="FBF1DC"/>
-              </a:gs>
-            </a:gsLst>
-            <a:lin ang="5400000" scaled="0"/>
-          </a:gradFill>
-          <a:ln w="36000">
-            <a:solidFill>
-              <a:srgbClr val="E9C46A"/>
-            </a:solidFill>
-          </a:ln>
-        </p:spPr>
-        <p:txBody>
-          <a:bodyPr rtlCol="0" anchor="ctr"/>
-          <a:lstStyle/>
-          <a:p>
-            <a:pPr algn="ctr"/>
-          </a:p>
-        </p:txBody>
-      </p:sp>
-      <p:sp>
-        <p:nvSpPr>
-          <p:cNvPr id="19" name="文字框饰条18"/>
-          <p:cNvSpPr/>
-          <p:nvPr/>
-        </p:nvSpPr>
-        <p:spPr>
-          <a:xfrm>
-            <a:off x="7686000" y="16578000"/>
-            <a:ext cx="4968000" cy="90000"/>
-          </a:xfrm>
-          <a:prstGeom prst="rect">
-            <a:avLst/>
-          </a:prstGeom>
-          <a:gradFill rotWithShape="1">
-            <a:gsLst>
-              <a:gs pos="0">
-                <a:srgbClr val="C8161D"/>
-              </a:gs>
-              <a:gs pos="60000">
-                <a:srgbClr val="E0A43A"/>
-              </a:gs>
-              <a:gs pos="100000">
-                <a:srgbClr val="FFD27A"/>
-              </a:gs>
-            </a:gsLst>
-            <a:lin ang="0" scaled="0"/>
-          </a:gradFill>
-          <a:ln>
-            <a:noFill/>
-          </a:ln>
-        </p:spPr>
-        <p:txBody>
-          <a:bodyPr rtlCol="0" anchor="ctr"/>
-          <a:lstStyle/>
-          <a:p>
-            <a:pPr algn="ctr"/>
-          </a:p>
-        </p:txBody>
-      </p:sp>
-      <p:sp>
-        <p:nvSpPr>
-          <p:cNvPr id="20" name="文字18"/>
-          <p:cNvSpPr txBox="1"/>
-          <p:nvPr/>
-        </p:nvSpPr>
-        <p:spPr>
-          <a:xfrm>
-            <a:off x="7758000" y="11232000"/>
-            <a:ext cx="4824000" cy="5130000"/>
-          </a:xfrm>
-          <a:prstGeom prst="rect">
-            <a:avLst/>
-          </a:prstGeom>
-          <a:noFill/>
-        </p:spPr>
-        <p:txBody>
-          <a:bodyPr wrap="square" lIns="0" rIns="0" tIns="0" bIns="0" anchor="ctr">
-            <a:noAutofit/>
-          </a:bodyPr>
-          <a:lstStyle/>
-          <a:p>
-            <a:pPr algn="ctr">
-              <a:lnSpc>
-                <a:spcPts val="4677"/>
-              </a:lnSpc>
-            </a:pPr>
-            <a:r>
-              <a:rPr sz="3118" b="0">
-                <a:solidFill>
-                  <a:srgbClr val="3A2A1A"/>
-                </a:solidFill>
-                <a:latin typeface="Microsoft YaHei"/>
-                <a:ea typeface="微软雅黑"/>
-              </a:rPr>
-              <a:t>正面行为介绍待补充。</a:t>
-            </a:r>
-          </a:p>
-        </p:txBody>
-      </p:sp>
-      <p:sp>
-        <p:nvSpPr>
-          <p:cNvPr id="21" name="热区18">
+          <p:cNvPr id="15" name="热区18">
             <a:hlinkClick action="ppaction://hlinksldjump" r:id="rId4"/>
           </p:cNvPr>
           <p:cNvSpPr/>
@@ -23468,8 +21154,8 @@
         </p:nvSpPr>
         <p:spPr>
           <a:xfrm>
-            <a:off x="7470000" y="5400000"/>
-            <a:ext cx="5400000" cy="11430000"/>
+            <a:off x="7110000" y="7560000"/>
+            <a:ext cx="5580000" cy="5832000"/>
           </a:xfrm>
           <a:prstGeom prst="rect">
             <a:avLst/>
@@ -23493,18 +21179,18 @@
       </p:sp>
       <p:sp>
         <p:nvSpPr>
-          <p:cNvPr id="22" name="卡框19"/>
-          <p:cNvSpPr/>
-          <p:nvPr/>
-        </p:nvSpPr>
-        <p:spPr>
-          <a:xfrm>
-            <a:off x="13482000" y="5400000"/>
-            <a:ext cx="5400000" cy="5328000"/>
+          <p:cNvPr id="16" name="卡框19"/>
+          <p:cNvSpPr/>
+          <p:nvPr/>
+        </p:nvSpPr>
+        <p:spPr>
+          <a:xfrm>
+            <a:off x="13230000" y="7560000"/>
+            <a:ext cx="5580000" cy="5832000"/>
           </a:xfrm>
           <a:prstGeom prst="roundRect">
             <a:avLst>
-              <a:gd name="adj" fmla="val 4054"/>
+              <a:gd name="adj" fmla="val 3870"/>
             </a:avLst>
           </a:prstGeom>
           <a:gradFill rotWithShape="1">
@@ -23541,14 +21227,14 @@
       </p:sp>
       <p:sp>
         <p:nvSpPr>
-          <p:cNvPr id="23" name="衬纸19"/>
-          <p:cNvSpPr/>
-          <p:nvPr/>
-        </p:nvSpPr>
-        <p:spPr>
-          <a:xfrm>
-            <a:off x="13572000" y="5490000"/>
-            <a:ext cx="5220000" cy="3960000"/>
+          <p:cNvPr id="17" name="衬纸19"/>
+          <p:cNvSpPr/>
+          <p:nvPr/>
+        </p:nvSpPr>
+        <p:spPr>
+          <a:xfrm>
+            <a:off x="13320000" y="7650000"/>
+            <a:ext cx="5400000" cy="4104000"/>
           </a:xfrm>
           <a:prstGeom prst="rect">
             <a:avLst/>
@@ -23570,7 +21256,7 @@
       </p:sp>
       <p:pic>
         <p:nvPicPr>
-          <p:cNvPr id="24" name="!!p19" descr="image.jpg"/>
+          <p:cNvPr id="18" name="!!p19" descr="image.jpg"/>
           <p:cNvPicPr>
             <a:picLocks noChangeAspect="1"/>
           </p:cNvPicPr>
@@ -23585,8 +21271,8 @@
         </p:blipFill>
         <p:spPr>
           <a:xfrm>
-            <a:off x="13662000" y="5580000"/>
-            <a:ext cx="5040000" cy="3780000"/>
+            <a:off x="13410000" y="7740000"/>
+            <a:ext cx="5220000" cy="3924000"/>
           </a:xfrm>
           <a:prstGeom prst="rect">
             <a:avLst/>
@@ -23595,14 +21281,14 @@
       </p:pic>
       <p:sp>
         <p:nvSpPr>
-          <p:cNvPr id="25" name="名牌底19"/>
-          <p:cNvSpPr/>
-          <p:nvPr/>
-        </p:nvSpPr>
-        <p:spPr>
-          <a:xfrm>
-            <a:off x="13572000" y="9450000"/>
-            <a:ext cx="5220000" cy="1188000"/>
+          <p:cNvPr id="19" name="名牌底19"/>
+          <p:cNvSpPr/>
+          <p:nvPr/>
+        </p:nvSpPr>
+        <p:spPr>
+          <a:xfrm>
+            <a:off x="13320000" y="11754000"/>
+            <a:ext cx="5400000" cy="1548000"/>
           </a:xfrm>
           <a:prstGeom prst="rect">
             <a:avLst/>
@@ -23632,14 +21318,14 @@
       </p:sp>
       <p:sp>
         <p:nvSpPr>
-          <p:cNvPr id="26" name="名牌金线19"/>
-          <p:cNvSpPr/>
-          <p:nvPr/>
-        </p:nvSpPr>
-        <p:spPr>
-          <a:xfrm>
-            <a:off x="13572000" y="9450000"/>
-            <a:ext cx="5220000" cy="54000"/>
+          <p:cNvPr id="20" name="名牌金线19"/>
+          <p:cNvSpPr/>
+          <p:nvPr/>
+        </p:nvSpPr>
+        <p:spPr>
+          <a:xfrm>
+            <a:off x="13320000" y="11754000"/>
+            <a:ext cx="5400000" cy="54000"/>
           </a:xfrm>
           <a:prstGeom prst="rect">
             <a:avLst/>
@@ -23661,14 +21347,14 @@
       </p:sp>
       <p:sp>
         <p:nvSpPr>
-          <p:cNvPr id="27" name="名牌19"/>
+          <p:cNvPr id="21" name="名牌19"/>
           <p:cNvSpPr txBox="1"/>
           <p:nvPr/>
         </p:nvSpPr>
         <p:spPr>
           <a:xfrm>
-            <a:off x="13572000" y="9504000"/>
-            <a:ext cx="5220000" cy="1134000"/>
+            <a:off x="13320000" y="11808000"/>
+            <a:ext cx="5400000" cy="1494000"/>
           </a:xfrm>
           <a:prstGeom prst="rect">
             <a:avLst/>
@@ -23683,7 +21369,7 @@
           <a:p>
             <a:pPr algn="ctr"/>
             <a:r>
-              <a:rPr sz="4535" b="1">
+              <a:rPr sz="5669" b="1">
                 <a:solidFill>
                   <a:srgbClr val="FFD27A"/>
                 </a:solidFill>
@@ -23696,7 +21382,7 @@
           <a:p>
             <a:pPr algn="ctr"/>
             <a:r>
-              <a:rPr sz="2692" b="0">
+              <a:rPr sz="3259" b="0">
                 <a:solidFill>
                   <a:srgbClr val="FFF1D6"/>
                 </a:solidFill>
@@ -23710,128 +21396,7 @@
       </p:sp>
       <p:sp>
         <p:nvSpPr>
-          <p:cNvPr id="28" name="文字框19"/>
-          <p:cNvSpPr/>
-          <p:nvPr/>
-        </p:nvSpPr>
-        <p:spPr>
-          <a:xfrm>
-            <a:off x="13482000" y="10980000"/>
-            <a:ext cx="5400000" cy="5850000"/>
-          </a:xfrm>
-          <a:prstGeom prst="roundRect">
-            <a:avLst>
-              <a:gd name="adj" fmla="val 4000"/>
-            </a:avLst>
-          </a:prstGeom>
-          <a:gradFill rotWithShape="1">
-            <a:gsLst>
-              <a:gs pos="0">
-                <a:srgbClr val="FFFDF7"/>
-              </a:gs>
-              <a:gs pos="100000">
-                <a:srgbClr val="FBF1DC"/>
-              </a:gs>
-            </a:gsLst>
-            <a:lin ang="5400000" scaled="0"/>
-          </a:gradFill>
-          <a:ln w="36000">
-            <a:solidFill>
-              <a:srgbClr val="E9C46A"/>
-            </a:solidFill>
-          </a:ln>
-        </p:spPr>
-        <p:txBody>
-          <a:bodyPr rtlCol="0" anchor="ctr"/>
-          <a:lstStyle/>
-          <a:p>
-            <a:pPr algn="ctr"/>
-          </a:p>
-        </p:txBody>
-      </p:sp>
-      <p:sp>
-        <p:nvSpPr>
-          <p:cNvPr id="29" name="文字框饰条19"/>
-          <p:cNvSpPr/>
-          <p:nvPr/>
-        </p:nvSpPr>
-        <p:spPr>
-          <a:xfrm>
-            <a:off x="13698000" y="16578000"/>
-            <a:ext cx="4968000" cy="90000"/>
-          </a:xfrm>
-          <a:prstGeom prst="rect">
-            <a:avLst/>
-          </a:prstGeom>
-          <a:gradFill rotWithShape="1">
-            <a:gsLst>
-              <a:gs pos="0">
-                <a:srgbClr val="C8161D"/>
-              </a:gs>
-              <a:gs pos="60000">
-                <a:srgbClr val="E0A43A"/>
-              </a:gs>
-              <a:gs pos="100000">
-                <a:srgbClr val="FFD27A"/>
-              </a:gs>
-            </a:gsLst>
-            <a:lin ang="0" scaled="0"/>
-          </a:gradFill>
-          <a:ln>
-            <a:noFill/>
-          </a:ln>
-        </p:spPr>
-        <p:txBody>
-          <a:bodyPr rtlCol="0" anchor="ctr"/>
-          <a:lstStyle/>
-          <a:p>
-            <a:pPr algn="ctr"/>
-          </a:p>
-        </p:txBody>
-      </p:sp>
-      <p:sp>
-        <p:nvSpPr>
-          <p:cNvPr id="30" name="文字19"/>
-          <p:cNvSpPr txBox="1"/>
-          <p:nvPr/>
-        </p:nvSpPr>
-        <p:spPr>
-          <a:xfrm>
-            <a:off x="13770000" y="11232000"/>
-            <a:ext cx="4824000" cy="5130000"/>
-          </a:xfrm>
-          <a:prstGeom prst="rect">
-            <a:avLst/>
-          </a:prstGeom>
-          <a:noFill/>
-        </p:spPr>
-        <p:txBody>
-          <a:bodyPr wrap="square" lIns="0" rIns="0" tIns="0" bIns="0" anchor="ctr">
-            <a:noAutofit/>
-          </a:bodyPr>
-          <a:lstStyle/>
-          <a:p>
-            <a:pPr algn="ctr">
-              <a:lnSpc>
-                <a:spcPts val="4677"/>
-              </a:lnSpc>
-            </a:pPr>
-            <a:r>
-              <a:rPr sz="3118" b="0">
-                <a:solidFill>
-                  <a:srgbClr val="3A2A1A"/>
-                </a:solidFill>
-                <a:latin typeface="Microsoft YaHei"/>
-                <a:ea typeface="微软雅黑"/>
-              </a:rPr>
-              <a:t>正面行为介绍待补充。</a:t>
-            </a:r>
-          </a:p>
-        </p:txBody>
-      </p:sp>
-      <p:sp>
-        <p:nvSpPr>
-          <p:cNvPr id="31" name="热区19">
+          <p:cNvPr id="22" name="热区19">
             <a:hlinkClick action="ppaction://hlinksldjump" r:id="rId5"/>
           </p:cNvPr>
           <p:cNvSpPr/>
@@ -23839,8 +21404,8 @@
         </p:nvSpPr>
         <p:spPr>
           <a:xfrm>
-            <a:off x="13482000" y="5400000"/>
-            <a:ext cx="5400000" cy="11430000"/>
+            <a:off x="13230000" y="7560000"/>
+            <a:ext cx="5580000" cy="5832000"/>
           </a:xfrm>
           <a:prstGeom prst="rect">
             <a:avLst/>
@@ -23864,18 +21429,18 @@
       </p:sp>
       <p:sp>
         <p:nvSpPr>
-          <p:cNvPr id="32" name="卡框20"/>
-          <p:cNvSpPr/>
-          <p:nvPr/>
-        </p:nvSpPr>
-        <p:spPr>
-          <a:xfrm>
-            <a:off x="19494000" y="5400000"/>
-            <a:ext cx="5400000" cy="5328000"/>
+          <p:cNvPr id="23" name="卡框20"/>
+          <p:cNvSpPr/>
+          <p:nvPr/>
+        </p:nvSpPr>
+        <p:spPr>
+          <a:xfrm>
+            <a:off x="19350000" y="7560000"/>
+            <a:ext cx="5580000" cy="5832000"/>
           </a:xfrm>
           <a:prstGeom prst="roundRect">
             <a:avLst>
-              <a:gd name="adj" fmla="val 4054"/>
+              <a:gd name="adj" fmla="val 3870"/>
             </a:avLst>
           </a:prstGeom>
           <a:gradFill rotWithShape="1">
@@ -23912,14 +21477,14 @@
       </p:sp>
       <p:sp>
         <p:nvSpPr>
-          <p:cNvPr id="33" name="衬纸20"/>
-          <p:cNvSpPr/>
-          <p:nvPr/>
-        </p:nvSpPr>
-        <p:spPr>
-          <a:xfrm>
-            <a:off x="19584000" y="5490000"/>
-            <a:ext cx="5220000" cy="3960000"/>
+          <p:cNvPr id="24" name="衬纸20"/>
+          <p:cNvSpPr/>
+          <p:nvPr/>
+        </p:nvSpPr>
+        <p:spPr>
+          <a:xfrm>
+            <a:off x="19440000" y="7650000"/>
+            <a:ext cx="5400000" cy="4104000"/>
           </a:xfrm>
           <a:prstGeom prst="rect">
             <a:avLst/>
@@ -23941,7 +21506,7 @@
       </p:sp>
       <p:pic>
         <p:nvPicPr>
-          <p:cNvPr id="34" name="!!p20" descr="image.jpg"/>
+          <p:cNvPr id="25" name="!!p20" descr="image.jpg"/>
           <p:cNvPicPr>
             <a:picLocks noChangeAspect="1"/>
           </p:cNvPicPr>
@@ -23956,8 +21521,8 @@
         </p:blipFill>
         <p:spPr>
           <a:xfrm>
-            <a:off x="19674000" y="5580000"/>
-            <a:ext cx="5040000" cy="3780000"/>
+            <a:off x="19530000" y="7740000"/>
+            <a:ext cx="5220000" cy="3924000"/>
           </a:xfrm>
           <a:prstGeom prst="rect">
             <a:avLst/>
@@ -23966,14 +21531,14 @@
       </p:pic>
       <p:sp>
         <p:nvSpPr>
-          <p:cNvPr id="35" name="名牌底20"/>
-          <p:cNvSpPr/>
-          <p:nvPr/>
-        </p:nvSpPr>
-        <p:spPr>
-          <a:xfrm>
-            <a:off x="19584000" y="9450000"/>
-            <a:ext cx="5220000" cy="1188000"/>
+          <p:cNvPr id="26" name="名牌底20"/>
+          <p:cNvSpPr/>
+          <p:nvPr/>
+        </p:nvSpPr>
+        <p:spPr>
+          <a:xfrm>
+            <a:off x="19440000" y="11754000"/>
+            <a:ext cx="5400000" cy="1548000"/>
           </a:xfrm>
           <a:prstGeom prst="rect">
             <a:avLst/>
@@ -24003,14 +21568,14 @@
       </p:sp>
       <p:sp>
         <p:nvSpPr>
-          <p:cNvPr id="36" name="名牌金线20"/>
-          <p:cNvSpPr/>
-          <p:nvPr/>
-        </p:nvSpPr>
-        <p:spPr>
-          <a:xfrm>
-            <a:off x="19584000" y="9450000"/>
-            <a:ext cx="5220000" cy="54000"/>
+          <p:cNvPr id="27" name="名牌金线20"/>
+          <p:cNvSpPr/>
+          <p:nvPr/>
+        </p:nvSpPr>
+        <p:spPr>
+          <a:xfrm>
+            <a:off x="19440000" y="11754000"/>
+            <a:ext cx="5400000" cy="54000"/>
           </a:xfrm>
           <a:prstGeom prst="rect">
             <a:avLst/>
@@ -24032,14 +21597,14 @@
       </p:sp>
       <p:sp>
         <p:nvSpPr>
-          <p:cNvPr id="37" name="名牌20"/>
+          <p:cNvPr id="28" name="名牌20"/>
           <p:cNvSpPr txBox="1"/>
           <p:nvPr/>
         </p:nvSpPr>
         <p:spPr>
           <a:xfrm>
-            <a:off x="19584000" y="9504000"/>
-            <a:ext cx="5220000" cy="1134000"/>
+            <a:off x="19440000" y="11808000"/>
+            <a:ext cx="5400000" cy="1494000"/>
           </a:xfrm>
           <a:prstGeom prst="rect">
             <a:avLst/>
@@ -24054,7 +21619,7 @@
           <a:p>
             <a:pPr algn="ctr"/>
             <a:r>
-              <a:rPr sz="4535" b="1">
+              <a:rPr sz="5669" b="1">
                 <a:solidFill>
                   <a:srgbClr val="FFD27A"/>
                 </a:solidFill>
@@ -24067,7 +21632,7 @@
           <a:p>
             <a:pPr algn="ctr"/>
             <a:r>
-              <a:rPr sz="2692" b="0">
+              <a:rPr sz="3259" b="0">
                 <a:solidFill>
                   <a:srgbClr val="FFF1D6"/>
                 </a:solidFill>
@@ -24081,128 +21646,7 @@
       </p:sp>
       <p:sp>
         <p:nvSpPr>
-          <p:cNvPr id="38" name="文字框20"/>
-          <p:cNvSpPr/>
-          <p:nvPr/>
-        </p:nvSpPr>
-        <p:spPr>
-          <a:xfrm>
-            <a:off x="19494000" y="10980000"/>
-            <a:ext cx="5400000" cy="5850000"/>
-          </a:xfrm>
-          <a:prstGeom prst="roundRect">
-            <a:avLst>
-              <a:gd name="adj" fmla="val 4000"/>
-            </a:avLst>
-          </a:prstGeom>
-          <a:gradFill rotWithShape="1">
-            <a:gsLst>
-              <a:gs pos="0">
-                <a:srgbClr val="FFFDF7"/>
-              </a:gs>
-              <a:gs pos="100000">
-                <a:srgbClr val="FBF1DC"/>
-              </a:gs>
-            </a:gsLst>
-            <a:lin ang="5400000" scaled="0"/>
-          </a:gradFill>
-          <a:ln w="36000">
-            <a:solidFill>
-              <a:srgbClr val="E9C46A"/>
-            </a:solidFill>
-          </a:ln>
-        </p:spPr>
-        <p:txBody>
-          <a:bodyPr rtlCol="0" anchor="ctr"/>
-          <a:lstStyle/>
-          <a:p>
-            <a:pPr algn="ctr"/>
-          </a:p>
-        </p:txBody>
-      </p:sp>
-      <p:sp>
-        <p:nvSpPr>
-          <p:cNvPr id="39" name="文字框饰条20"/>
-          <p:cNvSpPr/>
-          <p:nvPr/>
-        </p:nvSpPr>
-        <p:spPr>
-          <a:xfrm>
-            <a:off x="19710000" y="16578000"/>
-            <a:ext cx="4968000" cy="90000"/>
-          </a:xfrm>
-          <a:prstGeom prst="rect">
-            <a:avLst/>
-          </a:prstGeom>
-          <a:gradFill rotWithShape="1">
-            <a:gsLst>
-              <a:gs pos="0">
-                <a:srgbClr val="C8161D"/>
-              </a:gs>
-              <a:gs pos="60000">
-                <a:srgbClr val="E0A43A"/>
-              </a:gs>
-              <a:gs pos="100000">
-                <a:srgbClr val="FFD27A"/>
-              </a:gs>
-            </a:gsLst>
-            <a:lin ang="0" scaled="0"/>
-          </a:gradFill>
-          <a:ln>
-            <a:noFill/>
-          </a:ln>
-        </p:spPr>
-        <p:txBody>
-          <a:bodyPr rtlCol="0" anchor="ctr"/>
-          <a:lstStyle/>
-          <a:p>
-            <a:pPr algn="ctr"/>
-          </a:p>
-        </p:txBody>
-      </p:sp>
-      <p:sp>
-        <p:nvSpPr>
-          <p:cNvPr id="40" name="文字20"/>
-          <p:cNvSpPr txBox="1"/>
-          <p:nvPr/>
-        </p:nvSpPr>
-        <p:spPr>
-          <a:xfrm>
-            <a:off x="19782000" y="11232000"/>
-            <a:ext cx="4824000" cy="5130000"/>
-          </a:xfrm>
-          <a:prstGeom prst="rect">
-            <a:avLst/>
-          </a:prstGeom>
-          <a:noFill/>
-        </p:spPr>
-        <p:txBody>
-          <a:bodyPr wrap="square" lIns="0" rIns="0" tIns="0" bIns="0" anchor="ctr">
-            <a:noAutofit/>
-          </a:bodyPr>
-          <a:lstStyle/>
-          <a:p>
-            <a:pPr algn="ctr">
-              <a:lnSpc>
-                <a:spcPts val="4677"/>
-              </a:lnSpc>
-            </a:pPr>
-            <a:r>
-              <a:rPr sz="3118" b="0">
-                <a:solidFill>
-                  <a:srgbClr val="3A2A1A"/>
-                </a:solidFill>
-                <a:latin typeface="Microsoft YaHei"/>
-                <a:ea typeface="微软雅黑"/>
-              </a:rPr>
-              <a:t>正面行为介绍待补充。</a:t>
-            </a:r>
-          </a:p>
-        </p:txBody>
-      </p:sp>
-      <p:sp>
-        <p:nvSpPr>
-          <p:cNvPr id="41" name="热区20">
+          <p:cNvPr id="29" name="热区20">
             <a:hlinkClick action="ppaction://hlinksldjump" r:id="rId6"/>
           </p:cNvPr>
           <p:cNvSpPr/>
@@ -24210,8 +21654,8 @@
         </p:nvSpPr>
         <p:spPr>
           <a:xfrm>
-            <a:off x="19494000" y="5400000"/>
-            <a:ext cx="5400000" cy="11430000"/>
+            <a:off x="19350000" y="7560000"/>
+            <a:ext cx="5580000" cy="5832000"/>
           </a:xfrm>
           <a:prstGeom prst="rect">
             <a:avLst/>
@@ -24235,18 +21679,18 @@
       </p:sp>
       <p:sp>
         <p:nvSpPr>
-          <p:cNvPr id="42" name="卡框21"/>
-          <p:cNvSpPr/>
-          <p:nvPr/>
-        </p:nvSpPr>
-        <p:spPr>
-          <a:xfrm>
-            <a:off x="25506000" y="5400000"/>
-            <a:ext cx="5400000" cy="5328000"/>
+          <p:cNvPr id="30" name="卡框21"/>
+          <p:cNvSpPr/>
+          <p:nvPr/>
+        </p:nvSpPr>
+        <p:spPr>
+          <a:xfrm>
+            <a:off x="25470000" y="7560000"/>
+            <a:ext cx="5580000" cy="5832000"/>
           </a:xfrm>
           <a:prstGeom prst="roundRect">
             <a:avLst>
-              <a:gd name="adj" fmla="val 4054"/>
+              <a:gd name="adj" fmla="val 3870"/>
             </a:avLst>
           </a:prstGeom>
           <a:gradFill rotWithShape="1">
@@ -24283,14 +21727,14 @@
       </p:sp>
       <p:sp>
         <p:nvSpPr>
-          <p:cNvPr id="43" name="衬纸21"/>
-          <p:cNvSpPr/>
-          <p:nvPr/>
-        </p:nvSpPr>
-        <p:spPr>
-          <a:xfrm>
-            <a:off x="25596000" y="5490000"/>
-            <a:ext cx="5220000" cy="3960000"/>
+          <p:cNvPr id="31" name="衬纸21"/>
+          <p:cNvSpPr/>
+          <p:nvPr/>
+        </p:nvSpPr>
+        <p:spPr>
+          <a:xfrm>
+            <a:off x="25560000" y="7650000"/>
+            <a:ext cx="5400000" cy="4104000"/>
           </a:xfrm>
           <a:prstGeom prst="rect">
             <a:avLst/>
@@ -24312,7 +21756,7 @@
       </p:sp>
       <p:pic>
         <p:nvPicPr>
-          <p:cNvPr id="44" name="!!p21" descr="image.jpg"/>
+          <p:cNvPr id="32" name="!!p21" descr="image.jpg"/>
           <p:cNvPicPr>
             <a:picLocks noChangeAspect="1"/>
           </p:cNvPicPr>
@@ -24327,8 +21771,8 @@
         </p:blipFill>
         <p:spPr>
           <a:xfrm>
-            <a:off x="25686000" y="5580000"/>
-            <a:ext cx="5040000" cy="3780000"/>
+            <a:off x="25650000" y="7740000"/>
+            <a:ext cx="5220000" cy="3924000"/>
           </a:xfrm>
           <a:prstGeom prst="rect">
             <a:avLst/>
@@ -24337,14 +21781,14 @@
       </p:pic>
       <p:sp>
         <p:nvSpPr>
-          <p:cNvPr id="45" name="名牌底21"/>
-          <p:cNvSpPr/>
-          <p:nvPr/>
-        </p:nvSpPr>
-        <p:spPr>
-          <a:xfrm>
-            <a:off x="25596000" y="9450000"/>
-            <a:ext cx="5220000" cy="1188000"/>
+          <p:cNvPr id="33" name="名牌底21"/>
+          <p:cNvSpPr/>
+          <p:nvPr/>
+        </p:nvSpPr>
+        <p:spPr>
+          <a:xfrm>
+            <a:off x="25560000" y="11754000"/>
+            <a:ext cx="5400000" cy="1548000"/>
           </a:xfrm>
           <a:prstGeom prst="rect">
             <a:avLst/>
@@ -24374,14 +21818,14 @@
       </p:sp>
       <p:sp>
         <p:nvSpPr>
-          <p:cNvPr id="46" name="名牌金线21"/>
-          <p:cNvSpPr/>
-          <p:nvPr/>
-        </p:nvSpPr>
-        <p:spPr>
-          <a:xfrm>
-            <a:off x="25596000" y="9450000"/>
-            <a:ext cx="5220000" cy="54000"/>
+          <p:cNvPr id="34" name="名牌金线21"/>
+          <p:cNvSpPr/>
+          <p:nvPr/>
+        </p:nvSpPr>
+        <p:spPr>
+          <a:xfrm>
+            <a:off x="25560000" y="11754000"/>
+            <a:ext cx="5400000" cy="54000"/>
           </a:xfrm>
           <a:prstGeom prst="rect">
             <a:avLst/>
@@ -24403,14 +21847,14 @@
       </p:sp>
       <p:sp>
         <p:nvSpPr>
-          <p:cNvPr id="47" name="名牌21"/>
+          <p:cNvPr id="35" name="名牌21"/>
           <p:cNvSpPr txBox="1"/>
           <p:nvPr/>
         </p:nvSpPr>
         <p:spPr>
           <a:xfrm>
-            <a:off x="25596000" y="9504000"/>
-            <a:ext cx="5220000" cy="1134000"/>
+            <a:off x="25560000" y="11808000"/>
+            <a:ext cx="5400000" cy="1494000"/>
           </a:xfrm>
           <a:prstGeom prst="rect">
             <a:avLst/>
@@ -24425,7 +21869,7 @@
           <a:p>
             <a:pPr algn="ctr"/>
             <a:r>
-              <a:rPr sz="4535" b="1">
+              <a:rPr sz="5669" b="1">
                 <a:solidFill>
                   <a:srgbClr val="FFD27A"/>
                 </a:solidFill>
@@ -24438,7 +21882,7 @@
           <a:p>
             <a:pPr algn="ctr"/>
             <a:r>
-              <a:rPr sz="2692" b="0">
+              <a:rPr sz="3259" b="0">
                 <a:solidFill>
                   <a:srgbClr val="FFF1D6"/>
                 </a:solidFill>
@@ -24452,128 +21896,7 @@
       </p:sp>
       <p:sp>
         <p:nvSpPr>
-          <p:cNvPr id="48" name="文字框21"/>
-          <p:cNvSpPr/>
-          <p:nvPr/>
-        </p:nvSpPr>
-        <p:spPr>
-          <a:xfrm>
-            <a:off x="25506000" y="10980000"/>
-            <a:ext cx="5400000" cy="5850000"/>
-          </a:xfrm>
-          <a:prstGeom prst="roundRect">
-            <a:avLst>
-              <a:gd name="adj" fmla="val 4000"/>
-            </a:avLst>
-          </a:prstGeom>
-          <a:gradFill rotWithShape="1">
-            <a:gsLst>
-              <a:gs pos="0">
-                <a:srgbClr val="FFFDF7"/>
-              </a:gs>
-              <a:gs pos="100000">
-                <a:srgbClr val="FBF1DC"/>
-              </a:gs>
-            </a:gsLst>
-            <a:lin ang="5400000" scaled="0"/>
-          </a:gradFill>
-          <a:ln w="36000">
-            <a:solidFill>
-              <a:srgbClr val="E9C46A"/>
-            </a:solidFill>
-          </a:ln>
-        </p:spPr>
-        <p:txBody>
-          <a:bodyPr rtlCol="0" anchor="ctr"/>
-          <a:lstStyle/>
-          <a:p>
-            <a:pPr algn="ctr"/>
-          </a:p>
-        </p:txBody>
-      </p:sp>
-      <p:sp>
-        <p:nvSpPr>
-          <p:cNvPr id="49" name="文字框饰条21"/>
-          <p:cNvSpPr/>
-          <p:nvPr/>
-        </p:nvSpPr>
-        <p:spPr>
-          <a:xfrm>
-            <a:off x="25722000" y="16578000"/>
-            <a:ext cx="4968000" cy="90000"/>
-          </a:xfrm>
-          <a:prstGeom prst="rect">
-            <a:avLst/>
-          </a:prstGeom>
-          <a:gradFill rotWithShape="1">
-            <a:gsLst>
-              <a:gs pos="0">
-                <a:srgbClr val="C8161D"/>
-              </a:gs>
-              <a:gs pos="60000">
-                <a:srgbClr val="E0A43A"/>
-              </a:gs>
-              <a:gs pos="100000">
-                <a:srgbClr val="FFD27A"/>
-              </a:gs>
-            </a:gsLst>
-            <a:lin ang="0" scaled="0"/>
-          </a:gradFill>
-          <a:ln>
-            <a:noFill/>
-          </a:ln>
-        </p:spPr>
-        <p:txBody>
-          <a:bodyPr rtlCol="0" anchor="ctr"/>
-          <a:lstStyle/>
-          <a:p>
-            <a:pPr algn="ctr"/>
-          </a:p>
-        </p:txBody>
-      </p:sp>
-      <p:sp>
-        <p:nvSpPr>
-          <p:cNvPr id="50" name="文字21"/>
-          <p:cNvSpPr txBox="1"/>
-          <p:nvPr/>
-        </p:nvSpPr>
-        <p:spPr>
-          <a:xfrm>
-            <a:off x="25794000" y="11232000"/>
-            <a:ext cx="4824000" cy="5130000"/>
-          </a:xfrm>
-          <a:prstGeom prst="rect">
-            <a:avLst/>
-          </a:prstGeom>
-          <a:noFill/>
-        </p:spPr>
-        <p:txBody>
-          <a:bodyPr wrap="square" lIns="0" rIns="0" tIns="0" bIns="0" anchor="ctr">
-            <a:noAutofit/>
-          </a:bodyPr>
-          <a:lstStyle/>
-          <a:p>
-            <a:pPr algn="ctr">
-              <a:lnSpc>
-                <a:spcPts val="4677"/>
-              </a:lnSpc>
-            </a:pPr>
-            <a:r>
-              <a:rPr sz="3118" b="0">
-                <a:solidFill>
-                  <a:srgbClr val="3A2A1A"/>
-                </a:solidFill>
-                <a:latin typeface="Microsoft YaHei"/>
-                <a:ea typeface="微软雅黑"/>
-              </a:rPr>
-              <a:t>正面行为介绍待补充。</a:t>
-            </a:r>
-          </a:p>
-        </p:txBody>
-      </p:sp>
-      <p:sp>
-        <p:nvSpPr>
-          <p:cNvPr id="51" name="热区21">
+          <p:cNvPr id="36" name="热区21">
             <a:hlinkClick action="ppaction://hlinksldjump" r:id="rId7"/>
           </p:cNvPr>
           <p:cNvSpPr/>
@@ -24581,8 +21904,8 @@
         </p:nvSpPr>
         <p:spPr>
           <a:xfrm>
-            <a:off x="25506000" y="5400000"/>
-            <a:ext cx="5400000" cy="11430000"/>
+            <a:off x="25470000" y="7560000"/>
+            <a:ext cx="5580000" cy="5832000"/>
           </a:xfrm>
           <a:prstGeom prst="rect">
             <a:avLst/>
@@ -24606,18 +21929,18 @@
       </p:sp>
       <p:sp>
         <p:nvSpPr>
-          <p:cNvPr id="52" name="卡框22"/>
-          <p:cNvSpPr/>
-          <p:nvPr/>
-        </p:nvSpPr>
-        <p:spPr>
-          <a:xfrm>
-            <a:off x="31518000" y="5400000"/>
-            <a:ext cx="5400000" cy="5328000"/>
+          <p:cNvPr id="37" name="卡框22"/>
+          <p:cNvSpPr/>
+          <p:nvPr/>
+        </p:nvSpPr>
+        <p:spPr>
+          <a:xfrm>
+            <a:off x="31590000" y="7560000"/>
+            <a:ext cx="5580000" cy="5832000"/>
           </a:xfrm>
           <a:prstGeom prst="roundRect">
             <a:avLst>
-              <a:gd name="adj" fmla="val 4054"/>
+              <a:gd name="adj" fmla="val 3870"/>
             </a:avLst>
           </a:prstGeom>
           <a:gradFill rotWithShape="1">
@@ -24654,14 +21977,14 @@
       </p:sp>
       <p:sp>
         <p:nvSpPr>
-          <p:cNvPr id="53" name="衬纸22"/>
-          <p:cNvSpPr/>
-          <p:nvPr/>
-        </p:nvSpPr>
-        <p:spPr>
-          <a:xfrm>
-            <a:off x="31608000" y="5490000"/>
-            <a:ext cx="5220000" cy="3960000"/>
+          <p:cNvPr id="38" name="衬纸22"/>
+          <p:cNvSpPr/>
+          <p:nvPr/>
+        </p:nvSpPr>
+        <p:spPr>
+          <a:xfrm>
+            <a:off x="31680000" y="7650000"/>
+            <a:ext cx="5400000" cy="4104000"/>
           </a:xfrm>
           <a:prstGeom prst="rect">
             <a:avLst/>
@@ -24683,7 +22006,7 @@
       </p:sp>
       <p:pic>
         <p:nvPicPr>
-          <p:cNvPr id="54" name="!!p22" descr="image.jpg"/>
+          <p:cNvPr id="39" name="!!p22" descr="image.jpg"/>
           <p:cNvPicPr>
             <a:picLocks noChangeAspect="1"/>
           </p:cNvPicPr>
@@ -24698,8 +22021,8 @@
         </p:blipFill>
         <p:spPr>
           <a:xfrm>
-            <a:off x="31698000" y="5580000"/>
-            <a:ext cx="5040000" cy="3780000"/>
+            <a:off x="31770000" y="7740000"/>
+            <a:ext cx="5220000" cy="3924000"/>
           </a:xfrm>
           <a:prstGeom prst="rect">
             <a:avLst/>
@@ -24708,14 +22031,14 @@
       </p:pic>
       <p:sp>
         <p:nvSpPr>
-          <p:cNvPr id="55" name="名牌底22"/>
-          <p:cNvSpPr/>
-          <p:nvPr/>
-        </p:nvSpPr>
-        <p:spPr>
-          <a:xfrm>
-            <a:off x="31608000" y="9450000"/>
-            <a:ext cx="5220000" cy="1188000"/>
+          <p:cNvPr id="40" name="名牌底22"/>
+          <p:cNvSpPr/>
+          <p:nvPr/>
+        </p:nvSpPr>
+        <p:spPr>
+          <a:xfrm>
+            <a:off x="31680000" y="11754000"/>
+            <a:ext cx="5400000" cy="1548000"/>
           </a:xfrm>
           <a:prstGeom prst="rect">
             <a:avLst/>
@@ -24745,14 +22068,14 @@
       </p:sp>
       <p:sp>
         <p:nvSpPr>
-          <p:cNvPr id="56" name="名牌金线22"/>
-          <p:cNvSpPr/>
-          <p:nvPr/>
-        </p:nvSpPr>
-        <p:spPr>
-          <a:xfrm>
-            <a:off x="31608000" y="9450000"/>
-            <a:ext cx="5220000" cy="54000"/>
+          <p:cNvPr id="41" name="名牌金线22"/>
+          <p:cNvSpPr/>
+          <p:nvPr/>
+        </p:nvSpPr>
+        <p:spPr>
+          <a:xfrm>
+            <a:off x="31680000" y="11754000"/>
+            <a:ext cx="5400000" cy="54000"/>
           </a:xfrm>
           <a:prstGeom prst="rect">
             <a:avLst/>
@@ -24774,14 +22097,14 @@
       </p:sp>
       <p:sp>
         <p:nvSpPr>
-          <p:cNvPr id="57" name="名牌22"/>
+          <p:cNvPr id="42" name="名牌22"/>
           <p:cNvSpPr txBox="1"/>
           <p:nvPr/>
         </p:nvSpPr>
         <p:spPr>
           <a:xfrm>
-            <a:off x="31608000" y="9504000"/>
-            <a:ext cx="5220000" cy="1134000"/>
+            <a:off x="31680000" y="11808000"/>
+            <a:ext cx="5400000" cy="1494000"/>
           </a:xfrm>
           <a:prstGeom prst="rect">
             <a:avLst/>
@@ -24796,7 +22119,7 @@
           <a:p>
             <a:pPr algn="ctr"/>
             <a:r>
-              <a:rPr sz="4535" b="1">
+              <a:rPr sz="5669" b="1">
                 <a:solidFill>
                   <a:srgbClr val="FFD27A"/>
                 </a:solidFill>
@@ -24809,7 +22132,7 @@
           <a:p>
             <a:pPr algn="ctr"/>
             <a:r>
-              <a:rPr sz="2692" b="0">
+              <a:rPr sz="3259" b="0">
                 <a:solidFill>
                   <a:srgbClr val="FFF1D6"/>
                 </a:solidFill>
@@ -24823,128 +22146,7 @@
       </p:sp>
       <p:sp>
         <p:nvSpPr>
-          <p:cNvPr id="58" name="文字框22"/>
-          <p:cNvSpPr/>
-          <p:nvPr/>
-        </p:nvSpPr>
-        <p:spPr>
-          <a:xfrm>
-            <a:off x="31518000" y="10980000"/>
-            <a:ext cx="5400000" cy="5850000"/>
-          </a:xfrm>
-          <a:prstGeom prst="roundRect">
-            <a:avLst>
-              <a:gd name="adj" fmla="val 4000"/>
-            </a:avLst>
-          </a:prstGeom>
-          <a:gradFill rotWithShape="1">
-            <a:gsLst>
-              <a:gs pos="0">
-                <a:srgbClr val="FFFDF7"/>
-              </a:gs>
-              <a:gs pos="100000">
-                <a:srgbClr val="FBF1DC"/>
-              </a:gs>
-            </a:gsLst>
-            <a:lin ang="5400000" scaled="0"/>
-          </a:gradFill>
-          <a:ln w="36000">
-            <a:solidFill>
-              <a:srgbClr val="E9C46A"/>
-            </a:solidFill>
-          </a:ln>
-        </p:spPr>
-        <p:txBody>
-          <a:bodyPr rtlCol="0" anchor="ctr"/>
-          <a:lstStyle/>
-          <a:p>
-            <a:pPr algn="ctr"/>
-          </a:p>
-        </p:txBody>
-      </p:sp>
-      <p:sp>
-        <p:nvSpPr>
-          <p:cNvPr id="59" name="文字框饰条22"/>
-          <p:cNvSpPr/>
-          <p:nvPr/>
-        </p:nvSpPr>
-        <p:spPr>
-          <a:xfrm>
-            <a:off x="31734000" y="16578000"/>
-            <a:ext cx="4968000" cy="90000"/>
-          </a:xfrm>
-          <a:prstGeom prst="rect">
-            <a:avLst/>
-          </a:prstGeom>
-          <a:gradFill rotWithShape="1">
-            <a:gsLst>
-              <a:gs pos="0">
-                <a:srgbClr val="C8161D"/>
-              </a:gs>
-              <a:gs pos="60000">
-                <a:srgbClr val="E0A43A"/>
-              </a:gs>
-              <a:gs pos="100000">
-                <a:srgbClr val="FFD27A"/>
-              </a:gs>
-            </a:gsLst>
-            <a:lin ang="0" scaled="0"/>
-          </a:gradFill>
-          <a:ln>
-            <a:noFill/>
-          </a:ln>
-        </p:spPr>
-        <p:txBody>
-          <a:bodyPr rtlCol="0" anchor="ctr"/>
-          <a:lstStyle/>
-          <a:p>
-            <a:pPr algn="ctr"/>
-          </a:p>
-        </p:txBody>
-      </p:sp>
-      <p:sp>
-        <p:nvSpPr>
-          <p:cNvPr id="60" name="文字22"/>
-          <p:cNvSpPr txBox="1"/>
-          <p:nvPr/>
-        </p:nvSpPr>
-        <p:spPr>
-          <a:xfrm>
-            <a:off x="31806000" y="11232000"/>
-            <a:ext cx="4824000" cy="5130000"/>
-          </a:xfrm>
-          <a:prstGeom prst="rect">
-            <a:avLst/>
-          </a:prstGeom>
-          <a:noFill/>
-        </p:spPr>
-        <p:txBody>
-          <a:bodyPr wrap="square" lIns="0" rIns="0" tIns="0" bIns="0" anchor="ctr">
-            <a:noAutofit/>
-          </a:bodyPr>
-          <a:lstStyle/>
-          <a:p>
-            <a:pPr algn="ctr">
-              <a:lnSpc>
-                <a:spcPts val="4677"/>
-              </a:lnSpc>
-            </a:pPr>
-            <a:r>
-              <a:rPr sz="3118" b="0">
-                <a:solidFill>
-                  <a:srgbClr val="3A2A1A"/>
-                </a:solidFill>
-                <a:latin typeface="Microsoft YaHei"/>
-                <a:ea typeface="微软雅黑"/>
-              </a:rPr>
-              <a:t>正面行为介绍待补充。</a:t>
-            </a:r>
-          </a:p>
-        </p:txBody>
-      </p:sp>
-      <p:sp>
-        <p:nvSpPr>
-          <p:cNvPr id="61" name="热区22">
+          <p:cNvPr id="43" name="热区22">
             <a:hlinkClick action="ppaction://hlinksldjump" r:id="rId8"/>
           </p:cNvPr>
           <p:cNvSpPr/>
@@ -24952,8 +22154,8 @@
         </p:nvSpPr>
         <p:spPr>
           <a:xfrm>
-            <a:off x="31518000" y="5400000"/>
-            <a:ext cx="5400000" cy="11430000"/>
+            <a:off x="31590000" y="7560000"/>
+            <a:ext cx="5580000" cy="5832000"/>
           </a:xfrm>
           <a:prstGeom prst="rect">
             <a:avLst/>
@@ -24977,18 +22179,18 @@
       </p:sp>
       <p:sp>
         <p:nvSpPr>
-          <p:cNvPr id="62" name="卡框23"/>
-          <p:cNvSpPr/>
-          <p:nvPr/>
-        </p:nvSpPr>
-        <p:spPr>
-          <a:xfrm>
-            <a:off x="37530000" y="5400000"/>
-            <a:ext cx="5400000" cy="5328000"/>
+          <p:cNvPr id="44" name="卡框23"/>
+          <p:cNvSpPr/>
+          <p:nvPr/>
+        </p:nvSpPr>
+        <p:spPr>
+          <a:xfrm>
+            <a:off x="37710000" y="7560000"/>
+            <a:ext cx="5580000" cy="5832000"/>
           </a:xfrm>
           <a:prstGeom prst="roundRect">
             <a:avLst>
-              <a:gd name="adj" fmla="val 4054"/>
+              <a:gd name="adj" fmla="val 3870"/>
             </a:avLst>
           </a:prstGeom>
           <a:gradFill rotWithShape="1">
@@ -25025,14 +22227,14 @@
       </p:sp>
       <p:sp>
         <p:nvSpPr>
-          <p:cNvPr id="63" name="衬纸23"/>
-          <p:cNvSpPr/>
-          <p:nvPr/>
-        </p:nvSpPr>
-        <p:spPr>
-          <a:xfrm>
-            <a:off x="37620000" y="5490000"/>
-            <a:ext cx="5220000" cy="3960000"/>
+          <p:cNvPr id="45" name="衬纸23"/>
+          <p:cNvSpPr/>
+          <p:nvPr/>
+        </p:nvSpPr>
+        <p:spPr>
+          <a:xfrm>
+            <a:off x="37800000" y="7650000"/>
+            <a:ext cx="5400000" cy="4104000"/>
           </a:xfrm>
           <a:prstGeom prst="rect">
             <a:avLst/>
@@ -25054,7 +22256,7 @@
       </p:sp>
       <p:pic>
         <p:nvPicPr>
-          <p:cNvPr id="64" name="!!p23" descr="image.jpg"/>
+          <p:cNvPr id="46" name="!!p23" descr="image.jpg"/>
           <p:cNvPicPr>
             <a:picLocks noChangeAspect="1"/>
           </p:cNvPicPr>
@@ -25069,8 +22271,8 @@
         </p:blipFill>
         <p:spPr>
           <a:xfrm>
-            <a:off x="37710000" y="5580000"/>
-            <a:ext cx="5040000" cy="3780000"/>
+            <a:off x="37890000" y="7740000"/>
+            <a:ext cx="5220000" cy="3924000"/>
           </a:xfrm>
           <a:prstGeom prst="rect">
             <a:avLst/>
@@ -25079,14 +22281,14 @@
       </p:pic>
       <p:sp>
         <p:nvSpPr>
-          <p:cNvPr id="65" name="名牌底23"/>
-          <p:cNvSpPr/>
-          <p:nvPr/>
-        </p:nvSpPr>
-        <p:spPr>
-          <a:xfrm>
-            <a:off x="37620000" y="9450000"/>
-            <a:ext cx="5220000" cy="1188000"/>
+          <p:cNvPr id="47" name="名牌底23"/>
+          <p:cNvSpPr/>
+          <p:nvPr/>
+        </p:nvSpPr>
+        <p:spPr>
+          <a:xfrm>
+            <a:off x="37800000" y="11754000"/>
+            <a:ext cx="5400000" cy="1548000"/>
           </a:xfrm>
           <a:prstGeom prst="rect">
             <a:avLst/>
@@ -25116,14 +22318,14 @@
       </p:sp>
       <p:sp>
         <p:nvSpPr>
-          <p:cNvPr id="66" name="名牌金线23"/>
-          <p:cNvSpPr/>
-          <p:nvPr/>
-        </p:nvSpPr>
-        <p:spPr>
-          <a:xfrm>
-            <a:off x="37620000" y="9450000"/>
-            <a:ext cx="5220000" cy="54000"/>
+          <p:cNvPr id="48" name="名牌金线23"/>
+          <p:cNvSpPr/>
+          <p:nvPr/>
+        </p:nvSpPr>
+        <p:spPr>
+          <a:xfrm>
+            <a:off x="37800000" y="11754000"/>
+            <a:ext cx="5400000" cy="54000"/>
           </a:xfrm>
           <a:prstGeom prst="rect">
             <a:avLst/>
@@ -25145,14 +22347,14 @@
       </p:sp>
       <p:sp>
         <p:nvSpPr>
-          <p:cNvPr id="67" name="名牌23"/>
+          <p:cNvPr id="49" name="名牌23"/>
           <p:cNvSpPr txBox="1"/>
           <p:nvPr/>
         </p:nvSpPr>
         <p:spPr>
           <a:xfrm>
-            <a:off x="37620000" y="9504000"/>
-            <a:ext cx="5220000" cy="1134000"/>
+            <a:off x="37800000" y="11808000"/>
+            <a:ext cx="5400000" cy="1494000"/>
           </a:xfrm>
           <a:prstGeom prst="rect">
             <a:avLst/>
@@ -25167,7 +22369,7 @@
           <a:p>
             <a:pPr algn="ctr"/>
             <a:r>
-              <a:rPr sz="4535" b="1">
+              <a:rPr sz="5669" b="1">
                 <a:solidFill>
                   <a:srgbClr val="FFD27A"/>
                 </a:solidFill>
@@ -25180,7 +22382,7 @@
           <a:p>
             <a:pPr algn="ctr"/>
             <a:r>
-              <a:rPr sz="2692" b="0">
+              <a:rPr sz="3259" b="0">
                 <a:solidFill>
                   <a:srgbClr val="FFF1D6"/>
                 </a:solidFill>
@@ -25194,128 +22396,7 @@
       </p:sp>
       <p:sp>
         <p:nvSpPr>
-          <p:cNvPr id="68" name="文字框23"/>
-          <p:cNvSpPr/>
-          <p:nvPr/>
-        </p:nvSpPr>
-        <p:spPr>
-          <a:xfrm>
-            <a:off x="37530000" y="10980000"/>
-            <a:ext cx="5400000" cy="5850000"/>
-          </a:xfrm>
-          <a:prstGeom prst="roundRect">
-            <a:avLst>
-              <a:gd name="adj" fmla="val 4000"/>
-            </a:avLst>
-          </a:prstGeom>
-          <a:gradFill rotWithShape="1">
-            <a:gsLst>
-              <a:gs pos="0">
-                <a:srgbClr val="FFFDF7"/>
-              </a:gs>
-              <a:gs pos="100000">
-                <a:srgbClr val="FBF1DC"/>
-              </a:gs>
-            </a:gsLst>
-            <a:lin ang="5400000" scaled="0"/>
-          </a:gradFill>
-          <a:ln w="36000">
-            <a:solidFill>
-              <a:srgbClr val="E9C46A"/>
-            </a:solidFill>
-          </a:ln>
-        </p:spPr>
-        <p:txBody>
-          <a:bodyPr rtlCol="0" anchor="ctr"/>
-          <a:lstStyle/>
-          <a:p>
-            <a:pPr algn="ctr"/>
-          </a:p>
-        </p:txBody>
-      </p:sp>
-      <p:sp>
-        <p:nvSpPr>
-          <p:cNvPr id="69" name="文字框饰条23"/>
-          <p:cNvSpPr/>
-          <p:nvPr/>
-        </p:nvSpPr>
-        <p:spPr>
-          <a:xfrm>
-            <a:off x="37746000" y="16578000"/>
-            <a:ext cx="4968000" cy="90000"/>
-          </a:xfrm>
-          <a:prstGeom prst="rect">
-            <a:avLst/>
-          </a:prstGeom>
-          <a:gradFill rotWithShape="1">
-            <a:gsLst>
-              <a:gs pos="0">
-                <a:srgbClr val="C8161D"/>
-              </a:gs>
-              <a:gs pos="60000">
-                <a:srgbClr val="E0A43A"/>
-              </a:gs>
-              <a:gs pos="100000">
-                <a:srgbClr val="FFD27A"/>
-              </a:gs>
-            </a:gsLst>
-            <a:lin ang="0" scaled="0"/>
-          </a:gradFill>
-          <a:ln>
-            <a:noFill/>
-          </a:ln>
-        </p:spPr>
-        <p:txBody>
-          <a:bodyPr rtlCol="0" anchor="ctr"/>
-          <a:lstStyle/>
-          <a:p>
-            <a:pPr algn="ctr"/>
-          </a:p>
-        </p:txBody>
-      </p:sp>
-      <p:sp>
-        <p:nvSpPr>
-          <p:cNvPr id="70" name="文字23"/>
-          <p:cNvSpPr txBox="1"/>
-          <p:nvPr/>
-        </p:nvSpPr>
-        <p:spPr>
-          <a:xfrm>
-            <a:off x="37818000" y="11232000"/>
-            <a:ext cx="4824000" cy="5130000"/>
-          </a:xfrm>
-          <a:prstGeom prst="rect">
-            <a:avLst/>
-          </a:prstGeom>
-          <a:noFill/>
-        </p:spPr>
-        <p:txBody>
-          <a:bodyPr wrap="square" lIns="0" rIns="0" tIns="0" bIns="0" anchor="ctr">
-            <a:noAutofit/>
-          </a:bodyPr>
-          <a:lstStyle/>
-          <a:p>
-            <a:pPr algn="ctr">
-              <a:lnSpc>
-                <a:spcPts val="4677"/>
-              </a:lnSpc>
-            </a:pPr>
-            <a:r>
-              <a:rPr sz="3118" b="0">
-                <a:solidFill>
-                  <a:srgbClr val="3A2A1A"/>
-                </a:solidFill>
-                <a:latin typeface="Microsoft YaHei"/>
-                <a:ea typeface="微软雅黑"/>
-              </a:rPr>
-              <a:t>正面行为介绍待补充。</a:t>
-            </a:r>
-          </a:p>
-        </p:txBody>
-      </p:sp>
-      <p:sp>
-        <p:nvSpPr>
-          <p:cNvPr id="71" name="热区23">
+          <p:cNvPr id="50" name="热区23">
             <a:hlinkClick action="ppaction://hlinksldjump" r:id="rId9"/>
           </p:cNvPr>
           <p:cNvSpPr/>
@@ -25323,8 +22404,8 @@
         </p:nvSpPr>
         <p:spPr>
           <a:xfrm>
-            <a:off x="37530000" y="5400000"/>
-            <a:ext cx="5400000" cy="11430000"/>
+            <a:off x="37710000" y="7560000"/>
+            <a:ext cx="5580000" cy="5832000"/>
           </a:xfrm>
           <a:prstGeom prst="rect">
             <a:avLst/>
@@ -25348,18 +22429,18 @@
       </p:sp>
       <p:sp>
         <p:nvSpPr>
-          <p:cNvPr id="72" name="卡框24"/>
-          <p:cNvSpPr/>
-          <p:nvPr/>
-        </p:nvSpPr>
-        <p:spPr>
-          <a:xfrm>
-            <a:off x="43542000" y="5400000"/>
-            <a:ext cx="5400000" cy="5328000"/>
+          <p:cNvPr id="51" name="卡框24"/>
+          <p:cNvSpPr/>
+          <p:nvPr/>
+        </p:nvSpPr>
+        <p:spPr>
+          <a:xfrm>
+            <a:off x="43830000" y="7560000"/>
+            <a:ext cx="5580000" cy="5832000"/>
           </a:xfrm>
           <a:prstGeom prst="roundRect">
             <a:avLst>
-              <a:gd name="adj" fmla="val 4054"/>
+              <a:gd name="adj" fmla="val 3870"/>
             </a:avLst>
           </a:prstGeom>
           <a:gradFill rotWithShape="1">
@@ -25396,14 +22477,14 @@
       </p:sp>
       <p:sp>
         <p:nvSpPr>
-          <p:cNvPr id="73" name="衬纸24"/>
-          <p:cNvSpPr/>
-          <p:nvPr/>
-        </p:nvSpPr>
-        <p:spPr>
-          <a:xfrm>
-            <a:off x="43632000" y="5490000"/>
-            <a:ext cx="5220000" cy="3960000"/>
+          <p:cNvPr id="52" name="衬纸24"/>
+          <p:cNvSpPr/>
+          <p:nvPr/>
+        </p:nvSpPr>
+        <p:spPr>
+          <a:xfrm>
+            <a:off x="43920000" y="7650000"/>
+            <a:ext cx="5400000" cy="4104000"/>
           </a:xfrm>
           <a:prstGeom prst="rect">
             <a:avLst/>
@@ -25425,7 +22506,7 @@
       </p:sp>
       <p:pic>
         <p:nvPicPr>
-          <p:cNvPr id="74" name="!!p24" descr="image.jpg"/>
+          <p:cNvPr id="53" name="!!p24" descr="image.jpg"/>
           <p:cNvPicPr>
             <a:picLocks noChangeAspect="1"/>
           </p:cNvPicPr>
@@ -25440,8 +22521,8 @@
         </p:blipFill>
         <p:spPr>
           <a:xfrm>
-            <a:off x="43722000" y="5580000"/>
-            <a:ext cx="5040000" cy="3780000"/>
+            <a:off x="44010000" y="7740000"/>
+            <a:ext cx="5220000" cy="3924000"/>
           </a:xfrm>
           <a:prstGeom prst="rect">
             <a:avLst/>
@@ -25450,14 +22531,14 @@
       </p:pic>
       <p:sp>
         <p:nvSpPr>
-          <p:cNvPr id="75" name="名牌底24"/>
-          <p:cNvSpPr/>
-          <p:nvPr/>
-        </p:nvSpPr>
-        <p:spPr>
-          <a:xfrm>
-            <a:off x="43632000" y="9450000"/>
-            <a:ext cx="5220000" cy="1188000"/>
+          <p:cNvPr id="54" name="名牌底24"/>
+          <p:cNvSpPr/>
+          <p:nvPr/>
+        </p:nvSpPr>
+        <p:spPr>
+          <a:xfrm>
+            <a:off x="43920000" y="11754000"/>
+            <a:ext cx="5400000" cy="1548000"/>
           </a:xfrm>
           <a:prstGeom prst="rect">
             <a:avLst/>
@@ -25487,14 +22568,14 @@
       </p:sp>
       <p:sp>
         <p:nvSpPr>
-          <p:cNvPr id="76" name="名牌金线24"/>
-          <p:cNvSpPr/>
-          <p:nvPr/>
-        </p:nvSpPr>
-        <p:spPr>
-          <a:xfrm>
-            <a:off x="43632000" y="9450000"/>
-            <a:ext cx="5220000" cy="54000"/>
+          <p:cNvPr id="55" name="名牌金线24"/>
+          <p:cNvSpPr/>
+          <p:nvPr/>
+        </p:nvSpPr>
+        <p:spPr>
+          <a:xfrm>
+            <a:off x="43920000" y="11754000"/>
+            <a:ext cx="5400000" cy="54000"/>
           </a:xfrm>
           <a:prstGeom prst="rect">
             <a:avLst/>
@@ -25516,14 +22597,14 @@
       </p:sp>
       <p:sp>
         <p:nvSpPr>
-          <p:cNvPr id="77" name="名牌24"/>
+          <p:cNvPr id="56" name="名牌24"/>
           <p:cNvSpPr txBox="1"/>
           <p:nvPr/>
         </p:nvSpPr>
         <p:spPr>
           <a:xfrm>
-            <a:off x="43632000" y="9504000"/>
-            <a:ext cx="5220000" cy="1134000"/>
+            <a:off x="43920000" y="11808000"/>
+            <a:ext cx="5400000" cy="1494000"/>
           </a:xfrm>
           <a:prstGeom prst="rect">
             <a:avLst/>
@@ -25538,7 +22619,7 @@
           <a:p>
             <a:pPr algn="ctr"/>
             <a:r>
-              <a:rPr sz="4535" b="1">
+              <a:rPr sz="5669" b="1">
                 <a:solidFill>
                   <a:srgbClr val="FFD27A"/>
                 </a:solidFill>
@@ -25551,7 +22632,7 @@
           <a:p>
             <a:pPr algn="ctr"/>
             <a:r>
-              <a:rPr sz="2692" b="0">
+              <a:rPr sz="3259" b="0">
                 <a:solidFill>
                   <a:srgbClr val="FFF1D6"/>
                 </a:solidFill>
@@ -25565,128 +22646,7 @@
       </p:sp>
       <p:sp>
         <p:nvSpPr>
-          <p:cNvPr id="78" name="文字框24"/>
-          <p:cNvSpPr/>
-          <p:nvPr/>
-        </p:nvSpPr>
-        <p:spPr>
-          <a:xfrm>
-            <a:off x="43542000" y="10980000"/>
-            <a:ext cx="5400000" cy="5850000"/>
-          </a:xfrm>
-          <a:prstGeom prst="roundRect">
-            <a:avLst>
-              <a:gd name="adj" fmla="val 4000"/>
-            </a:avLst>
-          </a:prstGeom>
-          <a:gradFill rotWithShape="1">
-            <a:gsLst>
-              <a:gs pos="0">
-                <a:srgbClr val="FFFDF7"/>
-              </a:gs>
-              <a:gs pos="100000">
-                <a:srgbClr val="FBF1DC"/>
-              </a:gs>
-            </a:gsLst>
-            <a:lin ang="5400000" scaled="0"/>
-          </a:gradFill>
-          <a:ln w="36000">
-            <a:solidFill>
-              <a:srgbClr val="E9C46A"/>
-            </a:solidFill>
-          </a:ln>
-        </p:spPr>
-        <p:txBody>
-          <a:bodyPr rtlCol="0" anchor="ctr"/>
-          <a:lstStyle/>
-          <a:p>
-            <a:pPr algn="ctr"/>
-          </a:p>
-        </p:txBody>
-      </p:sp>
-      <p:sp>
-        <p:nvSpPr>
-          <p:cNvPr id="79" name="文字框饰条24"/>
-          <p:cNvSpPr/>
-          <p:nvPr/>
-        </p:nvSpPr>
-        <p:spPr>
-          <a:xfrm>
-            <a:off x="43758000" y="16578000"/>
-            <a:ext cx="4968000" cy="90000"/>
-          </a:xfrm>
-          <a:prstGeom prst="rect">
-            <a:avLst/>
-          </a:prstGeom>
-          <a:gradFill rotWithShape="1">
-            <a:gsLst>
-              <a:gs pos="0">
-                <a:srgbClr val="C8161D"/>
-              </a:gs>
-              <a:gs pos="60000">
-                <a:srgbClr val="E0A43A"/>
-              </a:gs>
-              <a:gs pos="100000">
-                <a:srgbClr val="FFD27A"/>
-              </a:gs>
-            </a:gsLst>
-            <a:lin ang="0" scaled="0"/>
-          </a:gradFill>
-          <a:ln>
-            <a:noFill/>
-          </a:ln>
-        </p:spPr>
-        <p:txBody>
-          <a:bodyPr rtlCol="0" anchor="ctr"/>
-          <a:lstStyle/>
-          <a:p>
-            <a:pPr algn="ctr"/>
-          </a:p>
-        </p:txBody>
-      </p:sp>
-      <p:sp>
-        <p:nvSpPr>
-          <p:cNvPr id="80" name="文字24"/>
-          <p:cNvSpPr txBox="1"/>
-          <p:nvPr/>
-        </p:nvSpPr>
-        <p:spPr>
-          <a:xfrm>
-            <a:off x="43830000" y="11232000"/>
-            <a:ext cx="4824000" cy="5130000"/>
-          </a:xfrm>
-          <a:prstGeom prst="rect">
-            <a:avLst/>
-          </a:prstGeom>
-          <a:noFill/>
-        </p:spPr>
-        <p:txBody>
-          <a:bodyPr wrap="square" lIns="0" rIns="0" tIns="0" bIns="0" anchor="ctr">
-            <a:noAutofit/>
-          </a:bodyPr>
-          <a:lstStyle/>
-          <a:p>
-            <a:pPr algn="ctr">
-              <a:lnSpc>
-                <a:spcPts val="4677"/>
-              </a:lnSpc>
-            </a:pPr>
-            <a:r>
-              <a:rPr sz="3118" b="0">
-                <a:solidFill>
-                  <a:srgbClr val="3A2A1A"/>
-                </a:solidFill>
-                <a:latin typeface="Microsoft YaHei"/>
-                <a:ea typeface="微软雅黑"/>
-              </a:rPr>
-              <a:t>正面行为介绍待补充。</a:t>
-            </a:r>
-          </a:p>
-        </p:txBody>
-      </p:sp>
-      <p:sp>
-        <p:nvSpPr>
-          <p:cNvPr id="81" name="热区24">
+          <p:cNvPr id="57" name="热区24">
             <a:hlinkClick action="ppaction://hlinksldjump" r:id="rId10"/>
           </p:cNvPr>
           <p:cNvSpPr/>
@@ -25694,8 +22654,8 @@
         </p:nvSpPr>
         <p:spPr>
           <a:xfrm>
-            <a:off x="43542000" y="5400000"/>
-            <a:ext cx="5400000" cy="11430000"/>
+            <a:off x="43830000" y="7560000"/>
+            <a:ext cx="5580000" cy="5832000"/>
           </a:xfrm>
           <a:prstGeom prst="rect">
             <a:avLst/>
@@ -25719,7 +22679,7 @@
       </p:sp>
       <p:sp>
         <p:nvSpPr>
-          <p:cNvPr id="82" name="上一页底"/>
+          <p:cNvPr id="58" name="上一页底"/>
           <p:cNvSpPr/>
           <p:nvPr/>
         </p:nvSpPr>
@@ -25754,7 +22714,7 @@
       </p:sp>
       <p:sp>
         <p:nvSpPr>
-          <p:cNvPr id="83" name="上一页字"/>
+          <p:cNvPr id="59" name="上一页字"/>
           <p:cNvSpPr txBox="1"/>
           <p:nvPr/>
         </p:nvSpPr>
@@ -25790,7 +22750,7 @@
       </p:sp>
       <p:sp>
         <p:nvSpPr>
-          <p:cNvPr id="84" name="上一页">
+          <p:cNvPr id="60" name="上一页">
             <a:hlinkClick action="ppaction://hlinksldjump" r:id="rId11"/>
           </p:cNvPr>
           <p:cNvSpPr/>
